--- a/kubernetes/09_ingress.pptx
+++ b/kubernetes/09_ingress.pptx
@@ -5,10 +5,10 @@
     <p:sldMasterId id="2147483733" r:id="rId1"/>
   </p:sldMasterIdLst>
   <p:notesMasterIdLst>
-    <p:notesMasterId r:id="rId19"/>
+    <p:notesMasterId r:id="rId20"/>
   </p:notesMasterIdLst>
   <p:handoutMasterIdLst>
-    <p:handoutMasterId r:id="rId20"/>
+    <p:handoutMasterId r:id="rId21"/>
   </p:handoutMasterIdLst>
   <p:sldIdLst>
     <p:sldId id="433" r:id="rId2"/>
@@ -18,16 +18,17 @@
     <p:sldId id="448" r:id="rId6"/>
     <p:sldId id="455" r:id="rId7"/>
     <p:sldId id="449" r:id="rId8"/>
-    <p:sldId id="460" r:id="rId9"/>
-    <p:sldId id="456" r:id="rId10"/>
-    <p:sldId id="457" r:id="rId11"/>
-    <p:sldId id="461" r:id="rId12"/>
-    <p:sldId id="458" r:id="rId13"/>
-    <p:sldId id="459" r:id="rId14"/>
-    <p:sldId id="462" r:id="rId15"/>
-    <p:sldId id="450" r:id="rId16"/>
-    <p:sldId id="451" r:id="rId17"/>
-    <p:sldId id="265" r:id="rId18"/>
+    <p:sldId id="464" r:id="rId9"/>
+    <p:sldId id="460" r:id="rId10"/>
+    <p:sldId id="456" r:id="rId11"/>
+    <p:sldId id="457" r:id="rId12"/>
+    <p:sldId id="461" r:id="rId13"/>
+    <p:sldId id="458" r:id="rId14"/>
+    <p:sldId id="459" r:id="rId15"/>
+    <p:sldId id="462" r:id="rId16"/>
+    <p:sldId id="450" r:id="rId17"/>
+    <p:sldId id="451" r:id="rId18"/>
+    <p:sldId id="265" r:id="rId19"/>
   </p:sldIdLst>
   <p:sldSz cx="12195175" cy="6858000"/>
   <p:notesSz cx="6858000" cy="9144000"/>
@@ -662,47 +663,8 @@
           <a:p>
             <a:r>
               <a:rPr lang="en-US" dirty="0"/>
-              <a:t>In the spec, there is a section about rules &amp; TLS. </a:t>
-            </a:r>
-          </a:p>
-          <a:p>
-            <a:r>
-              <a:rPr lang="en-US" dirty="0"/>
-              <a:t>Rules define forwarding of incoming traffic to services.</a:t>
-            </a:r>
-          </a:p>
-          <a:p>
-            <a:endParaRPr lang="en-US" dirty="0"/>
-          </a:p>
-          <a:p>
-            <a:r>
-              <a:rPr lang="en-US" dirty="0"/>
-              <a:t>With v0.22 the re-write annotation has been changed. Now it requires capture groups, if you want to pass on any substrings within the URI. Everything not captured will be dropped. In the example above every substring following “/my” and “/your” will be forwarded to the backend.</a:t>
-            </a:r>
-          </a:p>
-          <a:p>
-            <a:endParaRPr lang="en-US" dirty="0"/>
-          </a:p>
-          <a:p>
-            <a:r>
-              <a:rPr lang="en-US" dirty="0"/>
-              <a:t>For details, see: </a:t>
-            </a:r>
-          </a:p>
-          <a:p>
-            <a:r>
-              <a:rPr lang="en-US" dirty="0"/>
-              <a:t>https://github.com/kubernetes/ingress-nginx/releases/tag/nginx-0.22.0</a:t>
-            </a:r>
-          </a:p>
-          <a:p>
-            <a:r>
-              <a:rPr lang="en-US" dirty="0"/>
-              <a:t>https://kubernetes.github.io/ingress-nginx/examples/rewrite/#rewrite-target</a:t>
-            </a:r>
-          </a:p>
-          <a:p>
-            <a:endParaRPr lang="en-US" dirty="0"/>
+              <a:t>It is possible to mesh up multiple services within one Ingress endpoint and differentiate via URL paths. A user trying to access green needs to use https://app.ingress.com/my</a:t>
+            </a:r>
           </a:p>
         </p:txBody>
       </p:sp>
@@ -733,7 +695,7 @@
     </p:spTree>
     <p:extLst>
       <p:ext uri="{BB962C8B-B14F-4D97-AF65-F5344CB8AC3E}">
-        <p14:creationId xmlns:p14="http://schemas.microsoft.com/office/powerpoint/2010/main" val="2843793769"/>
+        <p14:creationId xmlns:p14="http://schemas.microsoft.com/office/powerpoint/2010/main" val="4009850538"/>
       </p:ext>
     </p:extLst>
   </p:cSld>
@@ -787,217 +749,49 @@
           <a:bodyPr/>
           <a:lstStyle/>
           <a:p>
-            <a:pPr marL="285750" marR="0" lvl="0" indent="-285750" algn="l" defTabSz="1088776" rtl="0" eaLnBrk="1" fontAlgn="auto" latinLnBrk="0" hangingPunct="1">
-              <a:lnSpc>
-                <a:spcPct val="100000"/>
-              </a:lnSpc>
-              <a:spcBef>
-                <a:spcPts val="0"/>
-              </a:spcBef>
-              <a:spcAft>
-                <a:spcPts val="0"/>
-              </a:spcAft>
-              <a:buClrTx/>
-              <a:buSzTx/>
-              <a:buFontTx/>
-              <a:buChar char="-"/>
-              <a:tabLst/>
-              <a:defRPr/>
-            </a:pPr>
-            <a:r>
-              <a:rPr lang="en-US" baseline="0" dirty="0"/>
-              <a:t>Use the 09_fanout_and_virtual_host_ingress.yaml to create a deployment, service and corresponding ingress resources</a:t>
-            </a:r>
-          </a:p>
-          <a:p>
-            <a:pPr marL="285750" marR="0" lvl="0" indent="-285750" algn="l" defTabSz="1088776" rtl="0" eaLnBrk="1" fontAlgn="auto" latinLnBrk="0" hangingPunct="1">
-              <a:lnSpc>
-                <a:spcPct val="100000"/>
-              </a:lnSpc>
-              <a:spcBef>
-                <a:spcPts val="0"/>
-              </a:spcBef>
-              <a:spcAft>
-                <a:spcPts val="0"/>
-              </a:spcAft>
-              <a:buClrTx/>
-              <a:buSzTx/>
-              <a:buFontTx/>
-              <a:buChar char="-"/>
-              <a:tabLst/>
-              <a:defRPr/>
-            </a:pPr>
-            <a:r>
-              <a:rPr lang="en-US" baseline="0" dirty="0"/>
-              <a:t>Note, that this file contains not only the fanout demo but based on the same 2 deployments &amp; services also the virtual host demo.</a:t>
-            </a:r>
-          </a:p>
-          <a:p>
-            <a:pPr marL="285750" marR="0" lvl="0" indent="-285750" algn="l" defTabSz="1088776" rtl="0" eaLnBrk="1" fontAlgn="auto" latinLnBrk="0" hangingPunct="1">
-              <a:lnSpc>
-                <a:spcPct val="100000"/>
-              </a:lnSpc>
-              <a:spcBef>
-                <a:spcPts val="0"/>
-              </a:spcBef>
-              <a:spcAft>
-                <a:spcPts val="0"/>
-              </a:spcAft>
-              <a:buClrTx/>
-              <a:buSzTx/>
-              <a:buFontTx/>
-              <a:buChar char="-"/>
-              <a:tabLst/>
-              <a:defRPr/>
-            </a:pPr>
-            <a:endParaRPr lang="en-US" baseline="0" dirty="0"/>
-          </a:p>
-          <a:p>
-            <a:pPr marL="285750" marR="0" lvl="0" indent="-285750" algn="l" defTabSz="1088776" rtl="0" eaLnBrk="1" fontAlgn="auto" latinLnBrk="0" hangingPunct="1">
-              <a:lnSpc>
-                <a:spcPct val="100000"/>
-              </a:lnSpc>
-              <a:spcBef>
-                <a:spcPts val="0"/>
-              </a:spcBef>
-              <a:spcAft>
-                <a:spcPts val="0"/>
-              </a:spcAft>
-              <a:buClrTx/>
-              <a:buSzTx/>
-              <a:buFontTx/>
-              <a:buChar char="-"/>
-              <a:tabLst/>
-              <a:defRPr/>
-            </a:pPr>
-            <a:r>
-              <a:rPr lang="en-US" baseline="0" dirty="0"/>
-              <a:t>Show the deployments &amp; services</a:t>
-            </a:r>
-          </a:p>
-          <a:p>
-            <a:pPr marL="285750" marR="0" lvl="0" indent="-285750" algn="l" defTabSz="1088776" rtl="0" eaLnBrk="1" fontAlgn="auto" latinLnBrk="0" hangingPunct="1">
-              <a:lnSpc>
-                <a:spcPct val="100000"/>
-              </a:lnSpc>
-              <a:spcBef>
-                <a:spcPts val="0"/>
-              </a:spcBef>
-              <a:spcAft>
-                <a:spcPts val="0"/>
-              </a:spcAft>
-              <a:buClrTx/>
-              <a:buSzTx/>
-              <a:buFontTx/>
-              <a:buChar char="-"/>
-              <a:tabLst/>
-              <a:defRPr/>
-            </a:pPr>
-            <a:r>
-              <a:rPr lang="en-US" baseline="0" dirty="0"/>
-              <a:t>Show the fanout ingress</a:t>
-            </a:r>
-          </a:p>
-          <a:p>
-            <a:pPr marL="465750" marR="0" lvl="1" indent="-285750" algn="l" defTabSz="1088776" rtl="0" eaLnBrk="1" fontAlgn="auto" latinLnBrk="0" hangingPunct="1">
-              <a:lnSpc>
-                <a:spcPct val="100000"/>
-              </a:lnSpc>
-              <a:spcBef>
-                <a:spcPts val="0"/>
-              </a:spcBef>
-              <a:spcAft>
-                <a:spcPts val="0"/>
-              </a:spcAft>
-              <a:buClrTx/>
-              <a:buSzTx/>
-              <a:buFontTx/>
-              <a:buChar char="-"/>
-              <a:tabLst/>
-              <a:defRPr/>
-            </a:pPr>
-            <a:r>
-              <a:rPr lang="en-US" baseline="0" dirty="0"/>
-              <a:t>Highlight the rewrite-target annotation and its importance.</a:t>
-            </a:r>
-          </a:p>
-          <a:p>
-            <a:pPr marL="465750" marR="0" lvl="1" indent="-285750" algn="l" defTabSz="1088776" rtl="0" eaLnBrk="1" fontAlgn="auto" latinLnBrk="0" hangingPunct="1">
-              <a:lnSpc>
-                <a:spcPct val="100000"/>
-              </a:lnSpc>
-              <a:spcBef>
-                <a:spcPts val="0"/>
-              </a:spcBef>
-              <a:spcAft>
-                <a:spcPts val="0"/>
-              </a:spcAft>
-              <a:buClrTx/>
-              <a:buSzTx/>
-              <a:buFontTx/>
-              <a:buChar char="-"/>
-              <a:tabLst/>
-              <a:defRPr/>
-            </a:pPr>
-            <a:r>
-              <a:rPr lang="en-US" baseline="0" dirty="0"/>
-              <a:t>Without this annotation the traffic would be forwarded to my-</a:t>
-            </a:r>
-            <a:r>
-              <a:rPr lang="en-US" baseline="0" dirty="0" err="1"/>
-              <a:t>nginx</a:t>
-            </a:r>
-            <a:r>
-              <a:rPr lang="en-US" baseline="0" dirty="0"/>
-              <a:t>-service/</a:t>
-            </a:r>
-            <a:r>
-              <a:rPr lang="en-US" baseline="0" dirty="0" err="1"/>
-              <a:t>mynginx</a:t>
-            </a:r>
-            <a:r>
-              <a:rPr lang="en-US" baseline="0" dirty="0"/>
-              <a:t> or your-</a:t>
-            </a:r>
-            <a:r>
-              <a:rPr lang="en-US" baseline="0" dirty="0" err="1"/>
-              <a:t>nginx</a:t>
-            </a:r>
-            <a:r>
-              <a:rPr lang="en-US" baseline="0" dirty="0"/>
-              <a:t>-service/</a:t>
-            </a:r>
-            <a:r>
-              <a:rPr lang="en-US" baseline="0" dirty="0" err="1"/>
-              <a:t>yournginx</a:t>
-            </a:r>
-            <a:r>
-              <a:rPr lang="en-US" baseline="0" dirty="0"/>
-              <a:t>. Obviously none of the services is aware of this path, so you would get an error instead of your index.html.</a:t>
-            </a:r>
-          </a:p>
-          <a:p>
-            <a:pPr marL="285750" marR="0" lvl="0" indent="-285750" algn="l" defTabSz="1088776" rtl="0" eaLnBrk="1" fontAlgn="auto" latinLnBrk="0" hangingPunct="1">
-              <a:lnSpc>
-                <a:spcPct val="100000"/>
-              </a:lnSpc>
-              <a:spcBef>
-                <a:spcPts val="0"/>
-              </a:spcBef>
-              <a:spcAft>
-                <a:spcPts val="0"/>
-              </a:spcAft>
-              <a:buClrTx/>
-              <a:buSzTx/>
-              <a:buFontTx/>
-              <a:buChar char="-"/>
-              <a:tabLst/>
-              <a:defRPr/>
-            </a:pPr>
-            <a:r>
-              <a:rPr lang="en-US" baseline="0" dirty="0"/>
-              <a:t>Open the URL in a browser and show the different endpoints based on their path</a:t>
-            </a:r>
+            <a:r>
+              <a:rPr lang="en-US" dirty="0"/>
+              <a:t>In the spec, there is a section about rules &amp; TLS. </a:t>
+            </a:r>
+          </a:p>
+          <a:p>
+            <a:r>
+              <a:rPr lang="en-US" dirty="0"/>
+              <a:t>Rules define forwarding of incoming traffic to services.</a:t>
+            </a:r>
+          </a:p>
+          <a:p>
+            <a:endParaRPr lang="en-US" dirty="0"/>
+          </a:p>
+          <a:p>
+            <a:r>
+              <a:rPr lang="en-US" dirty="0"/>
+              <a:t>With v0.22 the re-write annotation has been changed. Now it requires capture groups, if you want to pass on any substrings within the URI. Everything not captured will be dropped. In the example above every substring following “/my” and “/your” will be forwarded to the backend.</a:t>
+            </a:r>
+          </a:p>
+          <a:p>
+            <a:endParaRPr lang="en-US" dirty="0"/>
+          </a:p>
+          <a:p>
+            <a:r>
+              <a:rPr lang="en-US" dirty="0"/>
+              <a:t>For details, see: </a:t>
+            </a:r>
+          </a:p>
+          <a:p>
+            <a:r>
+              <a:rPr lang="en-US" dirty="0"/>
+              <a:t>https://github.com/kubernetes/ingress-nginx/releases/tag/nginx-0.22.0</a:t>
+            </a:r>
+          </a:p>
+          <a:p>
+            <a:r>
+              <a:rPr lang="en-US" dirty="0"/>
+              <a:t>https://kubernetes.github.io/ingress-nginx/examples/rewrite/#rewrite-target</a:t>
+            </a:r>
+          </a:p>
+          <a:p>
+            <a:endParaRPr lang="en-US" dirty="0"/>
           </a:p>
         </p:txBody>
       </p:sp>
@@ -1028,7 +822,7 @@
     </p:spTree>
     <p:extLst>
       <p:ext uri="{BB962C8B-B14F-4D97-AF65-F5344CB8AC3E}">
-        <p14:creationId xmlns:p14="http://schemas.microsoft.com/office/powerpoint/2010/main" val="1516069979"/>
+        <p14:creationId xmlns:p14="http://schemas.microsoft.com/office/powerpoint/2010/main" val="2843793769"/>
       </p:ext>
     </p:extLst>
   </p:cSld>
@@ -1082,17 +876,216 @@
           <a:bodyPr/>
           <a:lstStyle/>
           <a:p>
-            <a:r>
-              <a:rPr lang="en-US" dirty="0"/>
-              <a:t>The 3</a:t>
-            </a:r>
-            <a:r>
-              <a:rPr lang="en-US" baseline="30000" dirty="0"/>
-              <a:t>rd</a:t>
-            </a:r>
-            <a:r>
-              <a:rPr lang="en-US" dirty="0"/>
-              <a:t> option to make services available is to have several URLs managed by one Ingress resource. The IP also here, the IP endpoint remains stable. </a:t>
+            <a:pPr marL="285750" marR="0" lvl="0" indent="-285750" algn="l" defTabSz="1088776" rtl="0" eaLnBrk="1" fontAlgn="auto" latinLnBrk="0" hangingPunct="1">
+              <a:lnSpc>
+                <a:spcPct val="100000"/>
+              </a:lnSpc>
+              <a:spcBef>
+                <a:spcPts val="0"/>
+              </a:spcBef>
+              <a:spcAft>
+                <a:spcPts val="0"/>
+              </a:spcAft>
+              <a:buClrTx/>
+              <a:buSzTx/>
+              <a:buFontTx/>
+              <a:buChar char="-"/>
+              <a:tabLst/>
+              <a:defRPr/>
+            </a:pPr>
+            <a:r>
+              <a:rPr lang="en-US" baseline="0" dirty="0"/>
+              <a:t>Use the 09_fanout_and_virtual_host_ingress.yaml to create a deployment, service and corresponding ingress resources</a:t>
+            </a:r>
+          </a:p>
+          <a:p>
+            <a:pPr marL="285750" marR="0" lvl="0" indent="-285750" algn="l" defTabSz="1088776" rtl="0" eaLnBrk="1" fontAlgn="auto" latinLnBrk="0" hangingPunct="1">
+              <a:lnSpc>
+                <a:spcPct val="100000"/>
+              </a:lnSpc>
+              <a:spcBef>
+                <a:spcPts val="0"/>
+              </a:spcBef>
+              <a:spcAft>
+                <a:spcPts val="0"/>
+              </a:spcAft>
+              <a:buClrTx/>
+              <a:buSzTx/>
+              <a:buFontTx/>
+              <a:buChar char="-"/>
+              <a:tabLst/>
+              <a:defRPr/>
+            </a:pPr>
+            <a:r>
+              <a:rPr lang="en-US" baseline="0" dirty="0"/>
+              <a:t>Note, that this file contains not only the fanout demo but based on the same 2 deployments &amp; services also the virtual host demo.</a:t>
+            </a:r>
+          </a:p>
+          <a:p>
+            <a:pPr marL="285750" marR="0" lvl="0" indent="-285750" algn="l" defTabSz="1088776" rtl="0" eaLnBrk="1" fontAlgn="auto" latinLnBrk="0" hangingPunct="1">
+              <a:lnSpc>
+                <a:spcPct val="100000"/>
+              </a:lnSpc>
+              <a:spcBef>
+                <a:spcPts val="0"/>
+              </a:spcBef>
+              <a:spcAft>
+                <a:spcPts val="0"/>
+              </a:spcAft>
+              <a:buClrTx/>
+              <a:buSzTx/>
+              <a:buFontTx/>
+              <a:buChar char="-"/>
+              <a:tabLst/>
+              <a:defRPr/>
+            </a:pPr>
+            <a:endParaRPr lang="en-US" baseline="0" dirty="0"/>
+          </a:p>
+          <a:p>
+            <a:pPr marL="285750" marR="0" lvl="0" indent="-285750" algn="l" defTabSz="1088776" rtl="0" eaLnBrk="1" fontAlgn="auto" latinLnBrk="0" hangingPunct="1">
+              <a:lnSpc>
+                <a:spcPct val="100000"/>
+              </a:lnSpc>
+              <a:spcBef>
+                <a:spcPts val="0"/>
+              </a:spcBef>
+              <a:spcAft>
+                <a:spcPts val="0"/>
+              </a:spcAft>
+              <a:buClrTx/>
+              <a:buSzTx/>
+              <a:buFontTx/>
+              <a:buChar char="-"/>
+              <a:tabLst/>
+              <a:defRPr/>
+            </a:pPr>
+            <a:r>
+              <a:rPr lang="en-US" baseline="0" dirty="0"/>
+              <a:t>Show the deployments &amp; services</a:t>
+            </a:r>
+          </a:p>
+          <a:p>
+            <a:pPr marL="285750" marR="0" lvl="0" indent="-285750" algn="l" defTabSz="1088776" rtl="0" eaLnBrk="1" fontAlgn="auto" latinLnBrk="0" hangingPunct="1">
+              <a:lnSpc>
+                <a:spcPct val="100000"/>
+              </a:lnSpc>
+              <a:spcBef>
+                <a:spcPts val="0"/>
+              </a:spcBef>
+              <a:spcAft>
+                <a:spcPts val="0"/>
+              </a:spcAft>
+              <a:buClrTx/>
+              <a:buSzTx/>
+              <a:buFontTx/>
+              <a:buChar char="-"/>
+              <a:tabLst/>
+              <a:defRPr/>
+            </a:pPr>
+            <a:r>
+              <a:rPr lang="en-US" baseline="0" dirty="0"/>
+              <a:t>Show the fanout ingress</a:t>
+            </a:r>
+          </a:p>
+          <a:p>
+            <a:pPr marL="465750" marR="0" lvl="1" indent="-285750" algn="l" defTabSz="1088776" rtl="0" eaLnBrk="1" fontAlgn="auto" latinLnBrk="0" hangingPunct="1">
+              <a:lnSpc>
+                <a:spcPct val="100000"/>
+              </a:lnSpc>
+              <a:spcBef>
+                <a:spcPts val="0"/>
+              </a:spcBef>
+              <a:spcAft>
+                <a:spcPts val="0"/>
+              </a:spcAft>
+              <a:buClrTx/>
+              <a:buSzTx/>
+              <a:buFontTx/>
+              <a:buChar char="-"/>
+              <a:tabLst/>
+              <a:defRPr/>
+            </a:pPr>
+            <a:r>
+              <a:rPr lang="en-US" baseline="0" dirty="0"/>
+              <a:t>Highlight the rewrite-target annotation and its importance.</a:t>
+            </a:r>
+          </a:p>
+          <a:p>
+            <a:pPr marL="465750" marR="0" lvl="1" indent="-285750" algn="l" defTabSz="1088776" rtl="0" eaLnBrk="1" fontAlgn="auto" latinLnBrk="0" hangingPunct="1">
+              <a:lnSpc>
+                <a:spcPct val="100000"/>
+              </a:lnSpc>
+              <a:spcBef>
+                <a:spcPts val="0"/>
+              </a:spcBef>
+              <a:spcAft>
+                <a:spcPts val="0"/>
+              </a:spcAft>
+              <a:buClrTx/>
+              <a:buSzTx/>
+              <a:buFontTx/>
+              <a:buChar char="-"/>
+              <a:tabLst/>
+              <a:defRPr/>
+            </a:pPr>
+            <a:r>
+              <a:rPr lang="en-US" baseline="0" dirty="0"/>
+              <a:t>Without this annotation the traffic would be forwarded to my-</a:t>
+            </a:r>
+            <a:r>
+              <a:rPr lang="en-US" baseline="0" dirty="0" err="1"/>
+              <a:t>nginx</a:t>
+            </a:r>
+            <a:r>
+              <a:rPr lang="en-US" baseline="0" dirty="0"/>
+              <a:t>-service/</a:t>
+            </a:r>
+            <a:r>
+              <a:rPr lang="en-US" baseline="0" dirty="0" err="1"/>
+              <a:t>mynginx</a:t>
+            </a:r>
+            <a:r>
+              <a:rPr lang="en-US" baseline="0" dirty="0"/>
+              <a:t> or your-</a:t>
+            </a:r>
+            <a:r>
+              <a:rPr lang="en-US" baseline="0" dirty="0" err="1"/>
+              <a:t>nginx</a:t>
+            </a:r>
+            <a:r>
+              <a:rPr lang="en-US" baseline="0" dirty="0"/>
+              <a:t>-service/</a:t>
+            </a:r>
+            <a:r>
+              <a:rPr lang="en-US" baseline="0" dirty="0" err="1"/>
+              <a:t>yournginx</a:t>
+            </a:r>
+            <a:r>
+              <a:rPr lang="en-US" baseline="0" dirty="0"/>
+              <a:t>. Obviously none of the services is aware of this path, so you would get an error instead of your index.html.</a:t>
+            </a:r>
+          </a:p>
+          <a:p>
+            <a:pPr marL="285750" marR="0" lvl="0" indent="-285750" algn="l" defTabSz="1088776" rtl="0" eaLnBrk="1" fontAlgn="auto" latinLnBrk="0" hangingPunct="1">
+              <a:lnSpc>
+                <a:spcPct val="100000"/>
+              </a:lnSpc>
+              <a:spcBef>
+                <a:spcPts val="0"/>
+              </a:spcBef>
+              <a:spcAft>
+                <a:spcPts val="0"/>
+              </a:spcAft>
+              <a:buClrTx/>
+              <a:buSzTx/>
+              <a:buFontTx/>
+              <a:buChar char="-"/>
+              <a:tabLst/>
+              <a:defRPr/>
+            </a:pPr>
+            <a:r>
+              <a:rPr lang="en-US" baseline="0" dirty="0"/>
+              <a:t>Open the URL in a browser and show the different endpoints based on their path</a:t>
             </a:r>
           </a:p>
         </p:txBody>
@@ -1124,7 +1117,7 @@
     </p:spTree>
     <p:extLst>
       <p:ext uri="{BB962C8B-B14F-4D97-AF65-F5344CB8AC3E}">
-        <p14:creationId xmlns:p14="http://schemas.microsoft.com/office/powerpoint/2010/main" val="2950948830"/>
+        <p14:creationId xmlns:p14="http://schemas.microsoft.com/office/powerpoint/2010/main" val="1516069979"/>
       </p:ext>
     </p:extLst>
   </p:cSld>
@@ -1180,13 +1173,15 @@
           <a:p>
             <a:r>
               <a:rPr lang="en-US" dirty="0"/>
-              <a:t>In the spec, there is a section about rules &amp; TLS. </a:t>
-            </a:r>
-          </a:p>
-          <a:p>
+              <a:t>The 3</a:t>
+            </a:r>
+            <a:r>
+              <a:rPr lang="en-US" baseline="30000" dirty="0"/>
+              <a:t>rd</a:t>
+            </a:r>
             <a:r>
               <a:rPr lang="en-US" dirty="0"/>
-              <a:t>Rules define forwarding of incoming traffic to services.</a:t>
+              <a:t> option to make services available is to have several URLs managed by one Ingress resource. The IP also here, the IP endpoint remains stable. </a:t>
             </a:r>
           </a:p>
         </p:txBody>
@@ -1218,7 +1213,7 @@
     </p:spTree>
     <p:extLst>
       <p:ext uri="{BB962C8B-B14F-4D97-AF65-F5344CB8AC3E}">
-        <p14:creationId xmlns:p14="http://schemas.microsoft.com/office/powerpoint/2010/main" val="4151655171"/>
+        <p14:creationId xmlns:p14="http://schemas.microsoft.com/office/powerpoint/2010/main" val="2950948830"/>
       </p:ext>
     </p:extLst>
   </p:cSld>
@@ -1272,216 +1267,15 @@
           <a:bodyPr/>
           <a:lstStyle/>
           <a:p>
-            <a:pPr marL="285750" marR="0" lvl="0" indent="-285750" algn="l" defTabSz="1088776" rtl="0" eaLnBrk="1" fontAlgn="auto" latinLnBrk="0" hangingPunct="1">
-              <a:lnSpc>
-                <a:spcPct val="100000"/>
-              </a:lnSpc>
-              <a:spcBef>
-                <a:spcPts val="0"/>
-              </a:spcBef>
-              <a:spcAft>
-                <a:spcPts val="0"/>
-              </a:spcAft>
-              <a:buClrTx/>
-              <a:buSzTx/>
-              <a:buFontTx/>
-              <a:buChar char="-"/>
-              <a:tabLst/>
-              <a:defRPr/>
-            </a:pPr>
-            <a:r>
-              <a:rPr lang="en-US" baseline="0" dirty="0"/>
-              <a:t>Use the 09_fanout_and_virtual_host_ingress.yaml to create a deployment, service and corresponding ingress resources</a:t>
-            </a:r>
-          </a:p>
-          <a:p>
-            <a:pPr marL="285750" marR="0" lvl="0" indent="-285750" algn="l" defTabSz="1088776" rtl="0" eaLnBrk="1" fontAlgn="auto" latinLnBrk="0" hangingPunct="1">
-              <a:lnSpc>
-                <a:spcPct val="100000"/>
-              </a:lnSpc>
-              <a:spcBef>
-                <a:spcPts val="0"/>
-              </a:spcBef>
-              <a:spcAft>
-                <a:spcPts val="0"/>
-              </a:spcAft>
-              <a:buClrTx/>
-              <a:buSzTx/>
-              <a:buFontTx/>
-              <a:buChar char="-"/>
-              <a:tabLst/>
-              <a:defRPr/>
-            </a:pPr>
-            <a:r>
-              <a:rPr lang="en-US" baseline="0" dirty="0"/>
-              <a:t>Note, that this file contains not only the fanout demo but based on the same 2 deployments &amp; services also the virtual host demo.</a:t>
-            </a:r>
-          </a:p>
-          <a:p>
-            <a:pPr marL="285750" marR="0" lvl="0" indent="-285750" algn="l" defTabSz="1088776" rtl="0" eaLnBrk="1" fontAlgn="auto" latinLnBrk="0" hangingPunct="1">
-              <a:lnSpc>
-                <a:spcPct val="100000"/>
-              </a:lnSpc>
-              <a:spcBef>
-                <a:spcPts val="0"/>
-              </a:spcBef>
-              <a:spcAft>
-                <a:spcPts val="0"/>
-              </a:spcAft>
-              <a:buClrTx/>
-              <a:buSzTx/>
-              <a:buFontTx/>
-              <a:buChar char="-"/>
-              <a:tabLst/>
-              <a:defRPr/>
-            </a:pPr>
-            <a:endParaRPr lang="en-US" baseline="0" dirty="0"/>
-          </a:p>
-          <a:p>
-            <a:pPr marL="285750" marR="0" lvl="0" indent="-285750" algn="l" defTabSz="1088776" rtl="0" eaLnBrk="1" fontAlgn="auto" latinLnBrk="0" hangingPunct="1">
-              <a:lnSpc>
-                <a:spcPct val="100000"/>
-              </a:lnSpc>
-              <a:spcBef>
-                <a:spcPts val="0"/>
-              </a:spcBef>
-              <a:spcAft>
-                <a:spcPts val="0"/>
-              </a:spcAft>
-              <a:buClrTx/>
-              <a:buSzTx/>
-              <a:buFontTx/>
-              <a:buChar char="-"/>
-              <a:tabLst/>
-              <a:defRPr/>
-            </a:pPr>
-            <a:r>
-              <a:rPr lang="en-US" baseline="0" dirty="0"/>
-              <a:t>Show the deployments &amp; services</a:t>
-            </a:r>
-          </a:p>
-          <a:p>
-            <a:pPr marL="285750" marR="0" lvl="0" indent="-285750" algn="l" defTabSz="1088776" rtl="0" eaLnBrk="1" fontAlgn="auto" latinLnBrk="0" hangingPunct="1">
-              <a:lnSpc>
-                <a:spcPct val="100000"/>
-              </a:lnSpc>
-              <a:spcBef>
-                <a:spcPts val="0"/>
-              </a:spcBef>
-              <a:spcAft>
-                <a:spcPts val="0"/>
-              </a:spcAft>
-              <a:buClrTx/>
-              <a:buSzTx/>
-              <a:buFontTx/>
-              <a:buChar char="-"/>
-              <a:tabLst/>
-              <a:defRPr/>
-            </a:pPr>
-            <a:r>
-              <a:rPr lang="en-US" baseline="0" dirty="0"/>
-              <a:t>Show the virtual hosts ingress</a:t>
-            </a:r>
-          </a:p>
-          <a:p>
-            <a:pPr marL="465750" marR="0" lvl="1" indent="-285750" algn="l" defTabSz="1088776" rtl="0" eaLnBrk="1" fontAlgn="auto" latinLnBrk="0" hangingPunct="1">
-              <a:lnSpc>
-                <a:spcPct val="100000"/>
-              </a:lnSpc>
-              <a:spcBef>
-                <a:spcPts val="0"/>
-              </a:spcBef>
-              <a:spcAft>
-                <a:spcPts val="0"/>
-              </a:spcAft>
-              <a:buClrTx/>
-              <a:buSzTx/>
-              <a:buFontTx/>
-              <a:buChar char="-"/>
-              <a:tabLst/>
-              <a:defRPr/>
-            </a:pPr>
-            <a:r>
-              <a:rPr lang="en-US" baseline="0" dirty="0"/>
-              <a:t>Highlight the rewrite-target annotation and its importance.</a:t>
-            </a:r>
-          </a:p>
-          <a:p>
-            <a:pPr marL="465750" marR="0" lvl="1" indent="-285750" algn="l" defTabSz="1088776" rtl="0" eaLnBrk="1" fontAlgn="auto" latinLnBrk="0" hangingPunct="1">
-              <a:lnSpc>
-                <a:spcPct val="100000"/>
-              </a:lnSpc>
-              <a:spcBef>
-                <a:spcPts val="0"/>
-              </a:spcBef>
-              <a:spcAft>
-                <a:spcPts val="0"/>
-              </a:spcAft>
-              <a:buClrTx/>
-              <a:buSzTx/>
-              <a:buFontTx/>
-              <a:buChar char="-"/>
-              <a:tabLst/>
-              <a:defRPr/>
-            </a:pPr>
-            <a:r>
-              <a:rPr lang="en-US" baseline="0" dirty="0"/>
-              <a:t>Without this annotation the traffic would be forwarded to my-</a:t>
-            </a:r>
-            <a:r>
-              <a:rPr lang="en-US" baseline="0" dirty="0" err="1"/>
-              <a:t>nginx</a:t>
-            </a:r>
-            <a:r>
-              <a:rPr lang="en-US" baseline="0" dirty="0"/>
-              <a:t>-service/</a:t>
-            </a:r>
-            <a:r>
-              <a:rPr lang="en-US" baseline="0" dirty="0" err="1"/>
-              <a:t>mynginx</a:t>
-            </a:r>
-            <a:r>
-              <a:rPr lang="en-US" baseline="0" dirty="0"/>
-              <a:t> or your-</a:t>
-            </a:r>
-            <a:r>
-              <a:rPr lang="en-US" baseline="0" dirty="0" err="1"/>
-              <a:t>nginx</a:t>
-            </a:r>
-            <a:r>
-              <a:rPr lang="en-US" baseline="0" dirty="0"/>
-              <a:t>-service/</a:t>
-            </a:r>
-            <a:r>
-              <a:rPr lang="en-US" baseline="0" dirty="0" err="1"/>
-              <a:t>yournginx</a:t>
-            </a:r>
-            <a:r>
-              <a:rPr lang="en-US" baseline="0" dirty="0"/>
-              <a:t>. Obviously none of the services is aware of this path, so you would get an error instead of your index.html.</a:t>
-            </a:r>
-          </a:p>
-          <a:p>
-            <a:pPr marL="285750" marR="0" lvl="0" indent="-285750" algn="l" defTabSz="1088776" rtl="0" eaLnBrk="1" fontAlgn="auto" latinLnBrk="0" hangingPunct="1">
-              <a:lnSpc>
-                <a:spcPct val="100000"/>
-              </a:lnSpc>
-              <a:spcBef>
-                <a:spcPts val="0"/>
-              </a:spcBef>
-              <a:spcAft>
-                <a:spcPts val="0"/>
-              </a:spcAft>
-              <a:buClrTx/>
-              <a:buSzTx/>
-              <a:buFontTx/>
-              <a:buChar char="-"/>
-              <a:tabLst/>
-              <a:defRPr/>
-            </a:pPr>
-            <a:r>
-              <a:rPr lang="en-US" baseline="0" dirty="0"/>
-              <a:t>Open the URL in a browser and show the different endpoints based on their URL</a:t>
+            <a:r>
+              <a:rPr lang="en-US" dirty="0"/>
+              <a:t>In the spec, there is a section about rules &amp; TLS. </a:t>
+            </a:r>
+          </a:p>
+          <a:p>
+            <a:r>
+              <a:rPr lang="en-US" dirty="0"/>
+              <a:t>Rules define forwarding of incoming traffic to services.</a:t>
             </a:r>
           </a:p>
         </p:txBody>
@@ -1513,7 +1307,7 @@
     </p:spTree>
     <p:extLst>
       <p:ext uri="{BB962C8B-B14F-4D97-AF65-F5344CB8AC3E}">
-        <p14:creationId xmlns:p14="http://schemas.microsoft.com/office/powerpoint/2010/main" val="2138588329"/>
+        <p14:creationId xmlns:p14="http://schemas.microsoft.com/office/powerpoint/2010/main" val="4151655171"/>
       </p:ext>
     </p:extLst>
   </p:cSld>
@@ -1567,37 +1361,217 @@
           <a:bodyPr/>
           <a:lstStyle/>
           <a:p>
-            <a:r>
-              <a:rPr lang="en-US" dirty="0"/>
-              <a:t>With Gardener, you get an ingress controller for free </a:t>
-            </a:r>
-            <a:r>
-              <a:rPr lang="en-US" dirty="0">
-                <a:sym typeface="Wingdings" panose="05000000000000000000" pitchFamily="2" charset="2"/>
-              </a:rPr>
-              <a:t> it is also registered with a domain, so you will get your own sub-domain to register your URLs.</a:t>
-            </a:r>
-          </a:p>
-          <a:p>
-            <a:r>
-              <a:rPr lang="en-US" dirty="0">
-                <a:sym typeface="Wingdings" panose="05000000000000000000" pitchFamily="2" charset="2"/>
-              </a:rPr>
-              <a:t>The schema is described in the Gardener how-to docs. You might need to adapt the </a:t>
-            </a:r>
-            <a:r>
-              <a:rPr lang="en-US" dirty="0" err="1">
-                <a:sym typeface="Wingdings" panose="05000000000000000000" pitchFamily="2" charset="2"/>
-              </a:rPr>
-              <a:t>ingress.yaml</a:t>
-            </a:r>
-            <a:r>
-              <a:rPr lang="en-US" dirty="0">
-                <a:sym typeface="Wingdings" panose="05000000000000000000" pitchFamily="2" charset="2"/>
-              </a:rPr>
-              <a:t> to your training project.</a:t>
-            </a:r>
-            <a:endParaRPr lang="en-US" dirty="0"/>
+            <a:pPr marL="285750" marR="0" lvl="0" indent="-285750" algn="l" defTabSz="1088776" rtl="0" eaLnBrk="1" fontAlgn="auto" latinLnBrk="0" hangingPunct="1">
+              <a:lnSpc>
+                <a:spcPct val="100000"/>
+              </a:lnSpc>
+              <a:spcBef>
+                <a:spcPts val="0"/>
+              </a:spcBef>
+              <a:spcAft>
+                <a:spcPts val="0"/>
+              </a:spcAft>
+              <a:buClrTx/>
+              <a:buSzTx/>
+              <a:buFontTx/>
+              <a:buChar char="-"/>
+              <a:tabLst/>
+              <a:defRPr/>
+            </a:pPr>
+            <a:r>
+              <a:rPr lang="en-US" baseline="0" dirty="0"/>
+              <a:t>Use the 09_fanout_and_virtual_host_ingress.yaml to create a deployment, service and corresponding ingress resources</a:t>
+            </a:r>
+          </a:p>
+          <a:p>
+            <a:pPr marL="285750" marR="0" lvl="0" indent="-285750" algn="l" defTabSz="1088776" rtl="0" eaLnBrk="1" fontAlgn="auto" latinLnBrk="0" hangingPunct="1">
+              <a:lnSpc>
+                <a:spcPct val="100000"/>
+              </a:lnSpc>
+              <a:spcBef>
+                <a:spcPts val="0"/>
+              </a:spcBef>
+              <a:spcAft>
+                <a:spcPts val="0"/>
+              </a:spcAft>
+              <a:buClrTx/>
+              <a:buSzTx/>
+              <a:buFontTx/>
+              <a:buChar char="-"/>
+              <a:tabLst/>
+              <a:defRPr/>
+            </a:pPr>
+            <a:r>
+              <a:rPr lang="en-US" baseline="0" dirty="0"/>
+              <a:t>Note, that this file contains not only the fanout demo but based on the same 2 deployments &amp; services also the virtual host demo.</a:t>
+            </a:r>
+          </a:p>
+          <a:p>
+            <a:pPr marL="285750" marR="0" lvl="0" indent="-285750" algn="l" defTabSz="1088776" rtl="0" eaLnBrk="1" fontAlgn="auto" latinLnBrk="0" hangingPunct="1">
+              <a:lnSpc>
+                <a:spcPct val="100000"/>
+              </a:lnSpc>
+              <a:spcBef>
+                <a:spcPts val="0"/>
+              </a:spcBef>
+              <a:spcAft>
+                <a:spcPts val="0"/>
+              </a:spcAft>
+              <a:buClrTx/>
+              <a:buSzTx/>
+              <a:buFontTx/>
+              <a:buChar char="-"/>
+              <a:tabLst/>
+              <a:defRPr/>
+            </a:pPr>
+            <a:endParaRPr lang="en-US" baseline="0" dirty="0"/>
+          </a:p>
+          <a:p>
+            <a:pPr marL="285750" marR="0" lvl="0" indent="-285750" algn="l" defTabSz="1088776" rtl="0" eaLnBrk="1" fontAlgn="auto" latinLnBrk="0" hangingPunct="1">
+              <a:lnSpc>
+                <a:spcPct val="100000"/>
+              </a:lnSpc>
+              <a:spcBef>
+                <a:spcPts val="0"/>
+              </a:spcBef>
+              <a:spcAft>
+                <a:spcPts val="0"/>
+              </a:spcAft>
+              <a:buClrTx/>
+              <a:buSzTx/>
+              <a:buFontTx/>
+              <a:buChar char="-"/>
+              <a:tabLst/>
+              <a:defRPr/>
+            </a:pPr>
+            <a:r>
+              <a:rPr lang="en-US" baseline="0" dirty="0"/>
+              <a:t>Show the deployments &amp; services</a:t>
+            </a:r>
+          </a:p>
+          <a:p>
+            <a:pPr marL="285750" marR="0" lvl="0" indent="-285750" algn="l" defTabSz="1088776" rtl="0" eaLnBrk="1" fontAlgn="auto" latinLnBrk="0" hangingPunct="1">
+              <a:lnSpc>
+                <a:spcPct val="100000"/>
+              </a:lnSpc>
+              <a:spcBef>
+                <a:spcPts val="0"/>
+              </a:spcBef>
+              <a:spcAft>
+                <a:spcPts val="0"/>
+              </a:spcAft>
+              <a:buClrTx/>
+              <a:buSzTx/>
+              <a:buFontTx/>
+              <a:buChar char="-"/>
+              <a:tabLst/>
+              <a:defRPr/>
+            </a:pPr>
+            <a:r>
+              <a:rPr lang="en-US" baseline="0" dirty="0"/>
+              <a:t>Show the virtual hosts ingress</a:t>
+            </a:r>
+          </a:p>
+          <a:p>
+            <a:pPr marL="465750" marR="0" lvl="1" indent="-285750" algn="l" defTabSz="1088776" rtl="0" eaLnBrk="1" fontAlgn="auto" latinLnBrk="0" hangingPunct="1">
+              <a:lnSpc>
+                <a:spcPct val="100000"/>
+              </a:lnSpc>
+              <a:spcBef>
+                <a:spcPts val="0"/>
+              </a:spcBef>
+              <a:spcAft>
+                <a:spcPts val="0"/>
+              </a:spcAft>
+              <a:buClrTx/>
+              <a:buSzTx/>
+              <a:buFontTx/>
+              <a:buChar char="-"/>
+              <a:tabLst/>
+              <a:defRPr/>
+            </a:pPr>
+            <a:r>
+              <a:rPr lang="en-US" baseline="0" dirty="0"/>
+              <a:t>Highlight the rewrite-target annotation and its importance.</a:t>
+            </a:r>
+          </a:p>
+          <a:p>
+            <a:pPr marL="465750" marR="0" lvl="1" indent="-285750" algn="l" defTabSz="1088776" rtl="0" eaLnBrk="1" fontAlgn="auto" latinLnBrk="0" hangingPunct="1">
+              <a:lnSpc>
+                <a:spcPct val="100000"/>
+              </a:lnSpc>
+              <a:spcBef>
+                <a:spcPts val="0"/>
+              </a:spcBef>
+              <a:spcAft>
+                <a:spcPts val="0"/>
+              </a:spcAft>
+              <a:buClrTx/>
+              <a:buSzTx/>
+              <a:buFontTx/>
+              <a:buChar char="-"/>
+              <a:tabLst/>
+              <a:defRPr/>
+            </a:pPr>
+            <a:r>
+              <a:rPr lang="en-US" baseline="0" dirty="0"/>
+              <a:t>Without this annotation the traffic would be forwarded to my-</a:t>
+            </a:r>
+            <a:r>
+              <a:rPr lang="en-US" baseline="0" dirty="0" err="1"/>
+              <a:t>nginx</a:t>
+            </a:r>
+            <a:r>
+              <a:rPr lang="en-US" baseline="0" dirty="0"/>
+              <a:t>-service/</a:t>
+            </a:r>
+            <a:r>
+              <a:rPr lang="en-US" baseline="0" dirty="0" err="1"/>
+              <a:t>mynginx</a:t>
+            </a:r>
+            <a:r>
+              <a:rPr lang="en-US" baseline="0" dirty="0"/>
+              <a:t> or your-</a:t>
+            </a:r>
+            <a:r>
+              <a:rPr lang="en-US" baseline="0" dirty="0" err="1"/>
+              <a:t>nginx</a:t>
+            </a:r>
+            <a:r>
+              <a:rPr lang="en-US" baseline="0" dirty="0"/>
+              <a:t>-service/</a:t>
+            </a:r>
+            <a:r>
+              <a:rPr lang="en-US" baseline="0" dirty="0" err="1"/>
+              <a:t>yournginx</a:t>
+            </a:r>
+            <a:r>
+              <a:rPr lang="en-US" baseline="0" dirty="0"/>
+              <a:t>. Obviously none of the services is aware of this path, so you would get an error instead of your index.html.</a:t>
+            </a:r>
+          </a:p>
+          <a:p>
+            <a:pPr marL="285750" marR="0" lvl="0" indent="-285750" algn="l" defTabSz="1088776" rtl="0" eaLnBrk="1" fontAlgn="auto" latinLnBrk="0" hangingPunct="1">
+              <a:lnSpc>
+                <a:spcPct val="100000"/>
+              </a:lnSpc>
+              <a:spcBef>
+                <a:spcPts val="0"/>
+              </a:spcBef>
+              <a:spcAft>
+                <a:spcPts val="0"/>
+              </a:spcAft>
+              <a:buClrTx/>
+              <a:buSzTx/>
+              <a:buFontTx/>
+              <a:buChar char="-"/>
+              <a:tabLst/>
+              <a:defRPr/>
+            </a:pPr>
+            <a:r>
+              <a:rPr lang="en-US" baseline="0" dirty="0"/>
+              <a:t>Open the URL in a browser and show the different endpoints based on their URL</a:t>
+            </a:r>
           </a:p>
         </p:txBody>
       </p:sp>
@@ -1628,6 +1602,120 @@
     </p:spTree>
     <p:extLst>
       <p:ext uri="{BB962C8B-B14F-4D97-AF65-F5344CB8AC3E}">
+        <p14:creationId xmlns:p14="http://schemas.microsoft.com/office/powerpoint/2010/main" val="2138588329"/>
+      </p:ext>
+    </p:extLst>
+  </p:cSld>
+  <p:clrMapOvr>
+    <a:masterClrMapping/>
+  </p:clrMapOvr>
+</p:notes>
+</file>
+
+<file path=ppt/notesSlides/notesSlide16.xml><?xml version="1.0" encoding="utf-8"?>
+<p:notes xmlns:a="http://schemas.openxmlformats.org/drawingml/2006/main" xmlns:r="http://schemas.openxmlformats.org/officeDocument/2006/relationships" xmlns:p="http://schemas.openxmlformats.org/presentationml/2006/main">
+  <p:cSld>
+    <p:spTree>
+      <p:nvGrpSpPr>
+        <p:cNvPr id="1" name=""/>
+        <p:cNvGrpSpPr/>
+        <p:nvPr/>
+      </p:nvGrpSpPr>
+      <p:grpSpPr>
+        <a:xfrm>
+          <a:off x="0" y="0"/>
+          <a:ext cx="0" cy="0"/>
+          <a:chOff x="0" y="0"/>
+          <a:chExt cx="0" cy="0"/>
+        </a:xfrm>
+      </p:grpSpPr>
+      <p:sp>
+        <p:nvSpPr>
+          <p:cNvPr id="2" name="Slide Image Placeholder 1"/>
+          <p:cNvSpPr>
+            <a:spLocks noGrp="1" noRot="1" noChangeAspect="1"/>
+          </p:cNvSpPr>
+          <p:nvPr>
+            <p:ph type="sldImg"/>
+          </p:nvPr>
+        </p:nvSpPr>
+        <p:spPr/>
+      </p:sp>
+      <p:sp>
+        <p:nvSpPr>
+          <p:cNvPr id="3" name="Notes Placeholder 2"/>
+          <p:cNvSpPr>
+            <a:spLocks noGrp="1"/>
+          </p:cNvSpPr>
+          <p:nvPr>
+            <p:ph type="body" idx="1"/>
+          </p:nvPr>
+        </p:nvSpPr>
+        <p:spPr/>
+        <p:txBody>
+          <a:bodyPr/>
+          <a:lstStyle/>
+          <a:p>
+            <a:r>
+              <a:rPr lang="en-US" dirty="0"/>
+              <a:t>With Gardener allows to deploy an ingress controller as a managed addon. It is not possible / allowed to change its configuration, but a great starting point.</a:t>
+            </a:r>
+          </a:p>
+          <a:p>
+            <a:endParaRPr lang="en-US" dirty="0"/>
+          </a:p>
+          <a:p>
+            <a:r>
+              <a:rPr lang="en-US" dirty="0"/>
+              <a:t>The dashboard will also display the ingress’ domain. Give it a try and lookup the address it is pointing to and compare it to the </a:t>
+            </a:r>
+            <a:r>
+              <a:rPr lang="en-US" dirty="0" err="1"/>
+              <a:t>LoadBalancer</a:t>
+            </a:r>
+            <a:r>
+              <a:rPr lang="en-US" dirty="0"/>
+              <a:t> IP in </a:t>
+            </a:r>
+            <a:r>
+              <a:rPr lang="en-US" dirty="0" err="1"/>
+              <a:t>kube</a:t>
+            </a:r>
+            <a:r>
+              <a:rPr lang="en-US"/>
+              <a:t>-system namespace</a:t>
+            </a:r>
+            <a:endParaRPr lang="en-US" dirty="0"/>
+          </a:p>
+        </p:txBody>
+      </p:sp>
+      <p:sp>
+        <p:nvSpPr>
+          <p:cNvPr id="4" name="Slide Number Placeholder 3"/>
+          <p:cNvSpPr>
+            <a:spLocks noGrp="1"/>
+          </p:cNvSpPr>
+          <p:nvPr>
+            <p:ph type="sldNum" sz="quarter" idx="10"/>
+          </p:nvPr>
+        </p:nvSpPr>
+        <p:spPr/>
+        <p:txBody>
+          <a:bodyPr/>
+          <a:lstStyle/>
+          <a:p>
+            <a:fld id="{7D8C2C35-2B8A-446E-BEC0-FD36716C29AC}" type="slidenum">
+              <a:rPr lang="de-DE" smtClean="0"/>
+              <a:pPr/>
+              <a:t>16</a:t>
+            </a:fld>
+            <a:endParaRPr lang="de-DE" dirty="0"/>
+          </a:p>
+        </p:txBody>
+      </p:sp>
+    </p:spTree>
+    <p:extLst>
+      <p:ext uri="{BB962C8B-B14F-4D97-AF65-F5344CB8AC3E}">
         <p14:creationId xmlns:p14="http://schemas.microsoft.com/office/powerpoint/2010/main" val="2003310675"/>
       </p:ext>
     </p:extLst>
@@ -1638,7 +1726,7 @@
 </p:notes>
 </file>
 
-<file path=ppt/notesSlides/notesSlide16.xml><?xml version="1.0" encoding="utf-8"?>
+<file path=ppt/notesSlides/notesSlide17.xml><?xml version="1.0" encoding="utf-8"?>
 <p:notes xmlns:a="http://schemas.openxmlformats.org/drawingml/2006/main" xmlns:r="http://schemas.openxmlformats.org/officeDocument/2006/relationships" xmlns:p="http://schemas.openxmlformats.org/presentationml/2006/main">
   <p:cSld>
     <p:spTree>
@@ -1673,7 +1761,7 @@
             <a:fld id="{7D8C2C35-2B8A-446E-BEC0-FD36716C29AC}" type="slidenum">
               <a:rPr lang="en-US" smtClean="0"/>
               <a:pPr/>
-              <a:t>17</a:t>
+              <a:t>18</a:t>
             </a:fld>
             <a:endParaRPr lang="en-US" dirty="0"/>
           </a:p>
@@ -2557,7 +2645,30 @@
           <a:p>
             <a:r>
               <a:rPr lang="en-US" dirty="0"/>
-              <a:t>Rules define forwarding of incoming traffic to services.</a:t>
+              <a:t>Rules define forwarding of incoming traffic to backends.</a:t>
+            </a:r>
+          </a:p>
+          <a:p>
+            <a:endParaRPr lang="en-US" dirty="0"/>
+          </a:p>
+          <a:p>
+            <a:r>
+              <a:rPr lang="en-US" dirty="0"/>
+              <a:t>In this case traffic is send to a service. The path “/” in combination with </a:t>
+            </a:r>
+            <a:r>
+              <a:rPr lang="en-US" dirty="0" err="1"/>
+              <a:t>pathType</a:t>
+            </a:r>
+            <a:r>
+              <a:rPr lang="en-US" dirty="0"/>
+              <a:t>: Prefix matches all paths. For more details about routing, check this link:</a:t>
+            </a:r>
+          </a:p>
+          <a:p>
+            <a:r>
+              <a:rPr lang="en-US" dirty="0"/>
+              <a:t>https://kubernetes.io/docs/concepts/services-networking/ingress/#path-types</a:t>
             </a:r>
           </a:p>
         </p:txBody>
@@ -2643,351 +2754,7 @@
           <a:bodyPr/>
           <a:lstStyle/>
           <a:p>
-            <a:pPr marL="285750" marR="0" lvl="0" indent="-285750" algn="l" defTabSz="1088776" rtl="0" eaLnBrk="1" fontAlgn="auto" latinLnBrk="0" hangingPunct="1">
-              <a:lnSpc>
-                <a:spcPct val="100000"/>
-              </a:lnSpc>
-              <a:spcBef>
-                <a:spcPts val="0"/>
-              </a:spcBef>
-              <a:spcAft>
-                <a:spcPts val="0"/>
-              </a:spcAft>
-              <a:buClrTx/>
-              <a:buSzTx/>
-              <a:buFontTx/>
-              <a:buChar char="-"/>
-              <a:tabLst/>
-              <a:defRPr/>
-            </a:pPr>
-            <a:r>
-              <a:rPr lang="en-US" baseline="0" dirty="0"/>
-              <a:t>Go to the admin folder in the repo and run the create_ingress_tls.sh script</a:t>
-            </a:r>
-          </a:p>
-          <a:p>
-            <a:pPr marL="285750" marR="0" lvl="0" indent="-285750" algn="l" defTabSz="1088776" rtl="0" eaLnBrk="1" fontAlgn="auto" latinLnBrk="0" hangingPunct="1">
-              <a:lnSpc>
-                <a:spcPct val="100000"/>
-              </a:lnSpc>
-              <a:spcBef>
-                <a:spcPts val="0"/>
-              </a:spcBef>
-              <a:spcAft>
-                <a:spcPts val="0"/>
-              </a:spcAft>
-              <a:buClrTx/>
-              <a:buSzTx/>
-              <a:buFontTx/>
-              <a:buChar char="-"/>
-              <a:tabLst/>
-              <a:defRPr/>
-            </a:pPr>
-            <a:r>
-              <a:rPr lang="en-US" baseline="0" dirty="0"/>
-              <a:t>Create a secret with the generated files as suggested by the script</a:t>
-            </a:r>
-          </a:p>
-          <a:p>
-            <a:pPr marL="285750" marR="0" lvl="0" indent="-285750" algn="l" defTabSz="1088776" rtl="0" eaLnBrk="1" fontAlgn="auto" latinLnBrk="0" hangingPunct="1">
-              <a:lnSpc>
-                <a:spcPct val="100000"/>
-              </a:lnSpc>
-              <a:spcBef>
-                <a:spcPts val="0"/>
-              </a:spcBef>
-              <a:spcAft>
-                <a:spcPts val="0"/>
-              </a:spcAft>
-              <a:buClrTx/>
-              <a:buSzTx/>
-              <a:buFontTx/>
-              <a:buChar char="-"/>
-              <a:tabLst/>
-              <a:defRPr/>
-            </a:pPr>
-            <a:r>
-              <a:rPr lang="en-US" baseline="0" dirty="0"/>
-              <a:t>Use the 09_tls_ingress.yaml to create a deployment, service and corresponding ingress resource</a:t>
-            </a:r>
-          </a:p>
-          <a:p>
-            <a:pPr marL="285750" marR="0" lvl="0" indent="-285750" algn="l" defTabSz="1088776" rtl="0" eaLnBrk="1" fontAlgn="auto" latinLnBrk="0" hangingPunct="1">
-              <a:lnSpc>
-                <a:spcPct val="100000"/>
-              </a:lnSpc>
-              <a:spcBef>
-                <a:spcPts val="0"/>
-              </a:spcBef>
-              <a:spcAft>
-                <a:spcPts val="0"/>
-              </a:spcAft>
-              <a:buClrTx/>
-              <a:buSzTx/>
-              <a:buFontTx/>
-              <a:buChar char="-"/>
-              <a:tabLst/>
-              <a:defRPr/>
-            </a:pPr>
-            <a:r>
-              <a:rPr lang="en-US" baseline="0" dirty="0"/>
-              <a:t>Show the deployment &amp; service</a:t>
-            </a:r>
-          </a:p>
-          <a:p>
-            <a:pPr marL="285750" marR="0" lvl="0" indent="-285750" algn="l" defTabSz="1088776" rtl="0" eaLnBrk="1" fontAlgn="auto" latinLnBrk="0" hangingPunct="1">
-              <a:lnSpc>
-                <a:spcPct val="100000"/>
-              </a:lnSpc>
-              <a:spcBef>
-                <a:spcPts val="0"/>
-              </a:spcBef>
-              <a:spcAft>
-                <a:spcPts val="0"/>
-              </a:spcAft>
-              <a:buClrTx/>
-              <a:buSzTx/>
-              <a:buFontTx/>
-              <a:buChar char="-"/>
-              <a:tabLst/>
-              <a:defRPr/>
-            </a:pPr>
-            <a:r>
-              <a:rPr lang="en-US" baseline="0" dirty="0"/>
-              <a:t>Show the ingress with the host &amp; </a:t>
-            </a:r>
-            <a:r>
-              <a:rPr lang="en-US" baseline="0" dirty="0" err="1"/>
-              <a:t>tls</a:t>
-            </a:r>
-            <a:r>
-              <a:rPr lang="en-US" baseline="0" dirty="0"/>
-              <a:t> section. Highlight that the </a:t>
-            </a:r>
-            <a:r>
-              <a:rPr lang="en-US" baseline="0" dirty="0" err="1"/>
-              <a:t>nginx</a:t>
-            </a:r>
-            <a:r>
-              <a:rPr lang="en-US" baseline="0" dirty="0"/>
-              <a:t> itself is not configured for https but the connection terminates at the ingress endpoint.</a:t>
-            </a:r>
-          </a:p>
-          <a:p>
-            <a:pPr marL="285750" marR="0" lvl="0" indent="-285750" algn="l" defTabSz="1088776" rtl="0" eaLnBrk="1" fontAlgn="auto" latinLnBrk="0" hangingPunct="1">
-              <a:lnSpc>
-                <a:spcPct val="100000"/>
-              </a:lnSpc>
-              <a:spcBef>
-                <a:spcPts val="0"/>
-              </a:spcBef>
-              <a:spcAft>
-                <a:spcPts val="0"/>
-              </a:spcAft>
-              <a:buClrTx/>
-              <a:buSzTx/>
-              <a:buFontTx/>
-              <a:buChar char="-"/>
-              <a:tabLst/>
-              <a:defRPr/>
-            </a:pPr>
-            <a:r>
-              <a:rPr lang="en-US" baseline="0" dirty="0" err="1"/>
-              <a:t>Kubectl</a:t>
-            </a:r>
-            <a:r>
-              <a:rPr lang="en-US" baseline="0" dirty="0"/>
-              <a:t> describe ingress &lt;ingress-name&gt; -&gt; show the events for this ingress and point to the cert-manager events to provision the secret</a:t>
-            </a:r>
-          </a:p>
-          <a:p>
-            <a:pPr marL="285750" marR="0" lvl="0" indent="-285750" algn="l" defTabSz="1088776" rtl="0" eaLnBrk="1" fontAlgn="auto" latinLnBrk="0" hangingPunct="1">
-              <a:lnSpc>
-                <a:spcPct val="100000"/>
-              </a:lnSpc>
-              <a:spcBef>
-                <a:spcPts val="0"/>
-              </a:spcBef>
-              <a:spcAft>
-                <a:spcPts val="0"/>
-              </a:spcAft>
-              <a:buClrTx/>
-              <a:buSzTx/>
-              <a:buFontTx/>
-              <a:buChar char="-"/>
-              <a:tabLst/>
-              <a:defRPr/>
-            </a:pPr>
-            <a:r>
-              <a:rPr lang="en-US" baseline="0" dirty="0"/>
-              <a:t>Open the URL in a browser, show the certificate – it should be issued by let’s encrypt. </a:t>
-            </a:r>
-          </a:p>
-          <a:p>
-            <a:pPr marL="285750" marR="0" lvl="0" indent="-285750" algn="l" defTabSz="1088776" rtl="0" eaLnBrk="1" fontAlgn="auto" latinLnBrk="0" hangingPunct="1">
-              <a:lnSpc>
-                <a:spcPct val="100000"/>
-              </a:lnSpc>
-              <a:spcBef>
-                <a:spcPts val="0"/>
-              </a:spcBef>
-              <a:spcAft>
-                <a:spcPts val="0"/>
-              </a:spcAft>
-              <a:buClrTx/>
-              <a:buSzTx/>
-              <a:buFontTx/>
-              <a:buChar char="-"/>
-              <a:tabLst/>
-              <a:defRPr/>
-            </a:pPr>
-            <a:r>
-              <a:rPr lang="en-US" baseline="0" dirty="0"/>
-              <a:t>Go to the </a:t>
-            </a:r>
-            <a:r>
-              <a:rPr lang="en-US" baseline="0" dirty="0" err="1"/>
-              <a:t>yaml</a:t>
-            </a:r>
-            <a:r>
-              <a:rPr lang="en-US" baseline="0" dirty="0"/>
-              <a:t> file of the deployment and show the </a:t>
-            </a:r>
-            <a:r>
-              <a:rPr lang="en-US" baseline="0" dirty="0" err="1"/>
-              <a:t>init</a:t>
-            </a:r>
-            <a:r>
-              <a:rPr lang="en-US" baseline="0" dirty="0"/>
-              <a:t> container that runs upon pod start.</a:t>
-            </a:r>
-          </a:p>
-          <a:p>
-            <a:pPr marL="465750" marR="0" lvl="1" indent="-285750" algn="l" defTabSz="1088776" rtl="0" eaLnBrk="1" fontAlgn="auto" latinLnBrk="0" hangingPunct="1">
-              <a:lnSpc>
-                <a:spcPct val="100000"/>
-              </a:lnSpc>
-              <a:spcBef>
-                <a:spcPts val="0"/>
-              </a:spcBef>
-              <a:spcAft>
-                <a:spcPts val="0"/>
-              </a:spcAft>
-              <a:buClrTx/>
-              <a:buSzTx/>
-              <a:buFontTx/>
-              <a:buChar char="-"/>
-              <a:tabLst/>
-              <a:defRPr/>
-            </a:pPr>
-            <a:r>
-              <a:rPr lang="en-US" baseline="0" dirty="0"/>
-              <a:t>Highlight that it writes some text to an </a:t>
-            </a:r>
-            <a:r>
-              <a:rPr lang="en-US" baseline="0" dirty="0" err="1"/>
-              <a:t>emptyDir</a:t>
-            </a:r>
-            <a:r>
-              <a:rPr lang="en-US" baseline="0" dirty="0"/>
-              <a:t> volume which is then mounted into the </a:t>
-            </a:r>
-            <a:r>
-              <a:rPr lang="en-US" baseline="0" dirty="0" err="1"/>
-              <a:t>nginx</a:t>
-            </a:r>
-            <a:r>
-              <a:rPr lang="en-US" baseline="0" dirty="0"/>
-              <a:t> container.</a:t>
-            </a:r>
-          </a:p>
-          <a:p>
-            <a:pPr marL="0" marR="0" lvl="0" indent="0" algn="l" defTabSz="1088776" rtl="0" eaLnBrk="1" fontAlgn="auto" latinLnBrk="0" hangingPunct="1">
-              <a:lnSpc>
-                <a:spcPct val="100000"/>
-              </a:lnSpc>
-              <a:spcBef>
-                <a:spcPts val="0"/>
-              </a:spcBef>
-              <a:spcAft>
-                <a:spcPts val="0"/>
-              </a:spcAft>
-              <a:buClrTx/>
-              <a:buSzTx/>
-              <a:buFontTx/>
-              <a:buNone/>
-              <a:tabLst/>
-              <a:defRPr/>
-            </a:pPr>
-            <a:endParaRPr lang="en-US" baseline="0" dirty="0"/>
-          </a:p>
-          <a:p>
-            <a:pPr marL="0" marR="0" lvl="0" indent="0" algn="l" defTabSz="1088776" rtl="0" eaLnBrk="1" fontAlgn="auto" latinLnBrk="0" hangingPunct="1">
-              <a:lnSpc>
-                <a:spcPct val="100000"/>
-              </a:lnSpc>
-              <a:spcBef>
-                <a:spcPts val="0"/>
-              </a:spcBef>
-              <a:spcAft>
-                <a:spcPts val="0"/>
-              </a:spcAft>
-              <a:buClrTx/>
-              <a:buSzTx/>
-              <a:buFontTx/>
-              <a:buNone/>
-              <a:tabLst/>
-              <a:defRPr/>
-            </a:pPr>
-            <a:r>
-              <a:rPr lang="en-US" baseline="0" dirty="0"/>
-              <a:t>Cert manager </a:t>
-            </a:r>
-            <a:r>
-              <a:rPr lang="en-US" baseline="0"/>
-              <a:t>tutorial: </a:t>
-            </a:r>
-            <a:r>
-              <a:rPr lang="de-DE" sz="1400" b="0" u="sng" kern="1200">
-                <a:solidFill>
-                  <a:schemeClr val="tx1"/>
-                </a:solidFill>
-                <a:effectLst/>
-                <a:latin typeface="+mn-lt"/>
-                <a:ea typeface="+mn-ea"/>
-                <a:cs typeface="+mn-cs"/>
-              </a:rPr>
-              <a:t>https://gardener.cloud/050-tutorials/content/howto/x509_certificates/</a:t>
-            </a:r>
-            <a:endParaRPr lang="de-DE" sz="1400" b="0" kern="1200">
-              <a:solidFill>
-                <a:schemeClr val="tx1"/>
-              </a:solidFill>
-              <a:effectLst/>
-              <a:latin typeface="+mn-lt"/>
-              <a:ea typeface="+mn-ea"/>
-              <a:cs typeface="+mn-cs"/>
-            </a:endParaRPr>
-          </a:p>
-          <a:p>
-            <a:pPr marL="0" marR="0" lvl="0" indent="0" algn="l" defTabSz="1088776" rtl="0" eaLnBrk="1" fontAlgn="auto" latinLnBrk="0" hangingPunct="1">
-              <a:lnSpc>
-                <a:spcPct val="100000"/>
-              </a:lnSpc>
-              <a:spcBef>
-                <a:spcPts val="0"/>
-              </a:spcBef>
-              <a:spcAft>
-                <a:spcPts val="0"/>
-              </a:spcAft>
-              <a:buClrTx/>
-              <a:buSzTx/>
-              <a:buFontTx/>
-              <a:buNone/>
-              <a:tabLst/>
-              <a:defRPr/>
-            </a:pPr>
-            <a:endParaRPr lang="en-US" baseline="0" dirty="0"/>
+            <a:endParaRPr lang="en-US" dirty="0"/>
           </a:p>
         </p:txBody>
       </p:sp>
@@ -2998,7 +2765,7 @@
             <a:spLocks noGrp="1"/>
           </p:cNvSpPr>
           <p:nvPr>
-            <p:ph type="sldNum" sz="quarter" idx="10"/>
+            <p:ph type="sldNum" sz="quarter" idx="5"/>
           </p:nvPr>
         </p:nvSpPr>
         <p:spPr/>
@@ -3018,7 +2785,7 @@
     </p:spTree>
     <p:extLst>
       <p:ext uri="{BB962C8B-B14F-4D97-AF65-F5344CB8AC3E}">
-        <p14:creationId xmlns:p14="http://schemas.microsoft.com/office/powerpoint/2010/main" val="679445197"/>
+        <p14:creationId xmlns:p14="http://schemas.microsoft.com/office/powerpoint/2010/main" val="1587051893"/>
       </p:ext>
     </p:extLst>
   </p:cSld>
@@ -3072,10 +2839,351 @@
           <a:bodyPr/>
           <a:lstStyle/>
           <a:p>
-            <a:r>
-              <a:rPr lang="en-US" dirty="0"/>
-              <a:t>It is possible to mesh up multiple services within one Ingress endpoint and differentiate via URL paths. A user trying to access green needs to use https://app.ingress.com/my</a:t>
-            </a:r>
+            <a:pPr marL="285750" marR="0" lvl="0" indent="-285750" algn="l" defTabSz="1088776" rtl="0" eaLnBrk="1" fontAlgn="auto" latinLnBrk="0" hangingPunct="1">
+              <a:lnSpc>
+                <a:spcPct val="100000"/>
+              </a:lnSpc>
+              <a:spcBef>
+                <a:spcPts val="0"/>
+              </a:spcBef>
+              <a:spcAft>
+                <a:spcPts val="0"/>
+              </a:spcAft>
+              <a:buClrTx/>
+              <a:buSzTx/>
+              <a:buFontTx/>
+              <a:buChar char="-"/>
+              <a:tabLst/>
+              <a:defRPr/>
+            </a:pPr>
+            <a:r>
+              <a:rPr lang="en-US" baseline="0" dirty="0"/>
+              <a:t>Go to the admin folder in the repo and run the create_ingress_tls.sh script</a:t>
+            </a:r>
+          </a:p>
+          <a:p>
+            <a:pPr marL="285750" marR="0" lvl="0" indent="-285750" algn="l" defTabSz="1088776" rtl="0" eaLnBrk="1" fontAlgn="auto" latinLnBrk="0" hangingPunct="1">
+              <a:lnSpc>
+                <a:spcPct val="100000"/>
+              </a:lnSpc>
+              <a:spcBef>
+                <a:spcPts val="0"/>
+              </a:spcBef>
+              <a:spcAft>
+                <a:spcPts val="0"/>
+              </a:spcAft>
+              <a:buClrTx/>
+              <a:buSzTx/>
+              <a:buFontTx/>
+              <a:buChar char="-"/>
+              <a:tabLst/>
+              <a:defRPr/>
+            </a:pPr>
+            <a:r>
+              <a:rPr lang="en-US" baseline="0" dirty="0"/>
+              <a:t>Create a secret with the generated files as suggested by the script</a:t>
+            </a:r>
+          </a:p>
+          <a:p>
+            <a:pPr marL="285750" marR="0" lvl="0" indent="-285750" algn="l" defTabSz="1088776" rtl="0" eaLnBrk="1" fontAlgn="auto" latinLnBrk="0" hangingPunct="1">
+              <a:lnSpc>
+                <a:spcPct val="100000"/>
+              </a:lnSpc>
+              <a:spcBef>
+                <a:spcPts val="0"/>
+              </a:spcBef>
+              <a:spcAft>
+                <a:spcPts val="0"/>
+              </a:spcAft>
+              <a:buClrTx/>
+              <a:buSzTx/>
+              <a:buFontTx/>
+              <a:buChar char="-"/>
+              <a:tabLst/>
+              <a:defRPr/>
+            </a:pPr>
+            <a:r>
+              <a:rPr lang="en-US" baseline="0" dirty="0"/>
+              <a:t>Use the 09_tls_ingress.yaml to create a deployment, service and corresponding ingress resource</a:t>
+            </a:r>
+          </a:p>
+          <a:p>
+            <a:pPr marL="285750" marR="0" lvl="0" indent="-285750" algn="l" defTabSz="1088776" rtl="0" eaLnBrk="1" fontAlgn="auto" latinLnBrk="0" hangingPunct="1">
+              <a:lnSpc>
+                <a:spcPct val="100000"/>
+              </a:lnSpc>
+              <a:spcBef>
+                <a:spcPts val="0"/>
+              </a:spcBef>
+              <a:spcAft>
+                <a:spcPts val="0"/>
+              </a:spcAft>
+              <a:buClrTx/>
+              <a:buSzTx/>
+              <a:buFontTx/>
+              <a:buChar char="-"/>
+              <a:tabLst/>
+              <a:defRPr/>
+            </a:pPr>
+            <a:r>
+              <a:rPr lang="en-US" baseline="0" dirty="0"/>
+              <a:t>Show the deployment &amp; service</a:t>
+            </a:r>
+          </a:p>
+          <a:p>
+            <a:pPr marL="285750" marR="0" lvl="0" indent="-285750" algn="l" defTabSz="1088776" rtl="0" eaLnBrk="1" fontAlgn="auto" latinLnBrk="0" hangingPunct="1">
+              <a:lnSpc>
+                <a:spcPct val="100000"/>
+              </a:lnSpc>
+              <a:spcBef>
+                <a:spcPts val="0"/>
+              </a:spcBef>
+              <a:spcAft>
+                <a:spcPts val="0"/>
+              </a:spcAft>
+              <a:buClrTx/>
+              <a:buSzTx/>
+              <a:buFontTx/>
+              <a:buChar char="-"/>
+              <a:tabLst/>
+              <a:defRPr/>
+            </a:pPr>
+            <a:r>
+              <a:rPr lang="en-US" baseline="0" dirty="0"/>
+              <a:t>Show the ingress with the host &amp; </a:t>
+            </a:r>
+            <a:r>
+              <a:rPr lang="en-US" baseline="0" dirty="0" err="1"/>
+              <a:t>tls</a:t>
+            </a:r>
+            <a:r>
+              <a:rPr lang="en-US" baseline="0" dirty="0"/>
+              <a:t> section. Highlight that the </a:t>
+            </a:r>
+            <a:r>
+              <a:rPr lang="en-US" baseline="0" dirty="0" err="1"/>
+              <a:t>nginx</a:t>
+            </a:r>
+            <a:r>
+              <a:rPr lang="en-US" baseline="0" dirty="0"/>
+              <a:t> itself is not configured for https but the connection terminates at the ingress endpoint.</a:t>
+            </a:r>
+          </a:p>
+          <a:p>
+            <a:pPr marL="285750" marR="0" lvl="0" indent="-285750" algn="l" defTabSz="1088776" rtl="0" eaLnBrk="1" fontAlgn="auto" latinLnBrk="0" hangingPunct="1">
+              <a:lnSpc>
+                <a:spcPct val="100000"/>
+              </a:lnSpc>
+              <a:spcBef>
+                <a:spcPts val="0"/>
+              </a:spcBef>
+              <a:spcAft>
+                <a:spcPts val="0"/>
+              </a:spcAft>
+              <a:buClrTx/>
+              <a:buSzTx/>
+              <a:buFontTx/>
+              <a:buChar char="-"/>
+              <a:tabLst/>
+              <a:defRPr/>
+            </a:pPr>
+            <a:r>
+              <a:rPr lang="en-US" baseline="0" dirty="0" err="1"/>
+              <a:t>Kubectl</a:t>
+            </a:r>
+            <a:r>
+              <a:rPr lang="en-US" baseline="0" dirty="0"/>
+              <a:t> describe ingress &lt;ingress-name&gt; -&gt; show the events for this ingress and point to the cert-manager events to provision the secret</a:t>
+            </a:r>
+          </a:p>
+          <a:p>
+            <a:pPr marL="285750" marR="0" lvl="0" indent="-285750" algn="l" defTabSz="1088776" rtl="0" eaLnBrk="1" fontAlgn="auto" latinLnBrk="0" hangingPunct="1">
+              <a:lnSpc>
+                <a:spcPct val="100000"/>
+              </a:lnSpc>
+              <a:spcBef>
+                <a:spcPts val="0"/>
+              </a:spcBef>
+              <a:spcAft>
+                <a:spcPts val="0"/>
+              </a:spcAft>
+              <a:buClrTx/>
+              <a:buSzTx/>
+              <a:buFontTx/>
+              <a:buChar char="-"/>
+              <a:tabLst/>
+              <a:defRPr/>
+            </a:pPr>
+            <a:r>
+              <a:rPr lang="en-US" baseline="0" dirty="0"/>
+              <a:t>Open the URL in a browser, show the certificate – it should be issued by let’s encrypt. </a:t>
+            </a:r>
+          </a:p>
+          <a:p>
+            <a:pPr marL="285750" marR="0" lvl="0" indent="-285750" algn="l" defTabSz="1088776" rtl="0" eaLnBrk="1" fontAlgn="auto" latinLnBrk="0" hangingPunct="1">
+              <a:lnSpc>
+                <a:spcPct val="100000"/>
+              </a:lnSpc>
+              <a:spcBef>
+                <a:spcPts val="0"/>
+              </a:spcBef>
+              <a:spcAft>
+                <a:spcPts val="0"/>
+              </a:spcAft>
+              <a:buClrTx/>
+              <a:buSzTx/>
+              <a:buFontTx/>
+              <a:buChar char="-"/>
+              <a:tabLst/>
+              <a:defRPr/>
+            </a:pPr>
+            <a:r>
+              <a:rPr lang="en-US" baseline="0" dirty="0"/>
+              <a:t>Go to the </a:t>
+            </a:r>
+            <a:r>
+              <a:rPr lang="en-US" baseline="0" dirty="0" err="1"/>
+              <a:t>yaml</a:t>
+            </a:r>
+            <a:r>
+              <a:rPr lang="en-US" baseline="0" dirty="0"/>
+              <a:t> file of the deployment and show the </a:t>
+            </a:r>
+            <a:r>
+              <a:rPr lang="en-US" baseline="0" dirty="0" err="1"/>
+              <a:t>init</a:t>
+            </a:r>
+            <a:r>
+              <a:rPr lang="en-US" baseline="0" dirty="0"/>
+              <a:t> container that runs upon pod start.</a:t>
+            </a:r>
+          </a:p>
+          <a:p>
+            <a:pPr marL="465750" marR="0" lvl="1" indent="-285750" algn="l" defTabSz="1088776" rtl="0" eaLnBrk="1" fontAlgn="auto" latinLnBrk="0" hangingPunct="1">
+              <a:lnSpc>
+                <a:spcPct val="100000"/>
+              </a:lnSpc>
+              <a:spcBef>
+                <a:spcPts val="0"/>
+              </a:spcBef>
+              <a:spcAft>
+                <a:spcPts val="0"/>
+              </a:spcAft>
+              <a:buClrTx/>
+              <a:buSzTx/>
+              <a:buFontTx/>
+              <a:buChar char="-"/>
+              <a:tabLst/>
+              <a:defRPr/>
+            </a:pPr>
+            <a:r>
+              <a:rPr lang="en-US" baseline="0" dirty="0"/>
+              <a:t>Highlight that it writes some text to an </a:t>
+            </a:r>
+            <a:r>
+              <a:rPr lang="en-US" baseline="0" dirty="0" err="1"/>
+              <a:t>emptyDir</a:t>
+            </a:r>
+            <a:r>
+              <a:rPr lang="en-US" baseline="0" dirty="0"/>
+              <a:t> volume which is then mounted into the </a:t>
+            </a:r>
+            <a:r>
+              <a:rPr lang="en-US" baseline="0" dirty="0" err="1"/>
+              <a:t>nginx</a:t>
+            </a:r>
+            <a:r>
+              <a:rPr lang="en-US" baseline="0" dirty="0"/>
+              <a:t> container.</a:t>
+            </a:r>
+          </a:p>
+          <a:p>
+            <a:pPr marL="0" marR="0" lvl="0" indent="0" algn="l" defTabSz="1088776" rtl="0" eaLnBrk="1" fontAlgn="auto" latinLnBrk="0" hangingPunct="1">
+              <a:lnSpc>
+                <a:spcPct val="100000"/>
+              </a:lnSpc>
+              <a:spcBef>
+                <a:spcPts val="0"/>
+              </a:spcBef>
+              <a:spcAft>
+                <a:spcPts val="0"/>
+              </a:spcAft>
+              <a:buClrTx/>
+              <a:buSzTx/>
+              <a:buFontTx/>
+              <a:buNone/>
+              <a:tabLst/>
+              <a:defRPr/>
+            </a:pPr>
+            <a:endParaRPr lang="en-US" baseline="0" dirty="0"/>
+          </a:p>
+          <a:p>
+            <a:pPr marL="0" marR="0" lvl="0" indent="0" algn="l" defTabSz="1088776" rtl="0" eaLnBrk="1" fontAlgn="auto" latinLnBrk="0" hangingPunct="1">
+              <a:lnSpc>
+                <a:spcPct val="100000"/>
+              </a:lnSpc>
+              <a:spcBef>
+                <a:spcPts val="0"/>
+              </a:spcBef>
+              <a:spcAft>
+                <a:spcPts val="0"/>
+              </a:spcAft>
+              <a:buClrTx/>
+              <a:buSzTx/>
+              <a:buFontTx/>
+              <a:buNone/>
+              <a:tabLst/>
+              <a:defRPr/>
+            </a:pPr>
+            <a:r>
+              <a:rPr lang="en-US" baseline="0" dirty="0"/>
+              <a:t>Cert manager </a:t>
+            </a:r>
+            <a:r>
+              <a:rPr lang="en-US" baseline="0"/>
+              <a:t>tutorial: </a:t>
+            </a:r>
+            <a:r>
+              <a:rPr lang="de-DE" sz="1400" b="0" u="sng" kern="1200">
+                <a:solidFill>
+                  <a:schemeClr val="tx1"/>
+                </a:solidFill>
+                <a:effectLst/>
+                <a:latin typeface="+mn-lt"/>
+                <a:ea typeface="+mn-ea"/>
+                <a:cs typeface="+mn-cs"/>
+              </a:rPr>
+              <a:t>https://gardener.cloud/050-tutorials/content/howto/x509_certificates/</a:t>
+            </a:r>
+            <a:endParaRPr lang="de-DE" sz="1400" b="0" kern="1200">
+              <a:solidFill>
+                <a:schemeClr val="tx1"/>
+              </a:solidFill>
+              <a:effectLst/>
+              <a:latin typeface="+mn-lt"/>
+              <a:ea typeface="+mn-ea"/>
+              <a:cs typeface="+mn-cs"/>
+            </a:endParaRPr>
+          </a:p>
+          <a:p>
+            <a:pPr marL="0" marR="0" lvl="0" indent="0" algn="l" defTabSz="1088776" rtl="0" eaLnBrk="1" fontAlgn="auto" latinLnBrk="0" hangingPunct="1">
+              <a:lnSpc>
+                <a:spcPct val="100000"/>
+              </a:lnSpc>
+              <a:spcBef>
+                <a:spcPts val="0"/>
+              </a:spcBef>
+              <a:spcAft>
+                <a:spcPts val="0"/>
+              </a:spcAft>
+              <a:buClrTx/>
+              <a:buSzTx/>
+              <a:buFontTx/>
+              <a:buNone/>
+              <a:tabLst/>
+              <a:defRPr/>
+            </a:pPr>
+            <a:endParaRPr lang="en-US" baseline="0" dirty="0"/>
           </a:p>
         </p:txBody>
       </p:sp>
@@ -3106,7 +3214,7 @@
     </p:spTree>
     <p:extLst>
       <p:ext uri="{BB962C8B-B14F-4D97-AF65-F5344CB8AC3E}">
-        <p14:creationId xmlns:p14="http://schemas.microsoft.com/office/powerpoint/2010/main" val="4009850538"/>
+        <p14:creationId xmlns:p14="http://schemas.microsoft.com/office/powerpoint/2010/main" val="679445197"/>
       </p:ext>
     </p:extLst>
   </p:cSld>
@@ -16563,12 +16671,1705 @@
           <a:chExt cx="0" cy="0"/>
         </a:xfrm>
       </p:grpSpPr>
+      <p:sp>
+        <p:nvSpPr>
+          <p:cNvPr id="14" name="Rectangle: Rounded Corners 13">
+            <a:extLst>
+              <a:ext uri="{FF2B5EF4-FFF2-40B4-BE49-F238E27FC236}">
+                <a16:creationId xmlns:a16="http://schemas.microsoft.com/office/drawing/2014/main" id="{4DF03BB3-7969-41F8-BB01-B24EF0F775A1}"/>
+              </a:ext>
+            </a:extLst>
+          </p:cNvPr>
+          <p:cNvSpPr/>
+          <p:nvPr/>
+        </p:nvSpPr>
+        <p:spPr bwMode="gray">
+          <a:xfrm>
+            <a:off x="5270643" y="1206858"/>
+            <a:ext cx="6378813" cy="5093357"/>
+          </a:xfrm>
+          <a:prstGeom prst="roundRect">
+            <a:avLst/>
+          </a:prstGeom>
+          <a:ln>
+            <a:headEnd/>
+            <a:tailEnd/>
+          </a:ln>
+        </p:spPr>
+        <p:style>
+          <a:lnRef idx="1">
+            <a:schemeClr val="accent2"/>
+          </a:lnRef>
+          <a:fillRef idx="2">
+            <a:schemeClr val="accent2"/>
+          </a:fillRef>
+          <a:effectRef idx="1">
+            <a:schemeClr val="accent2"/>
+          </a:effectRef>
+          <a:fontRef idx="minor">
+            <a:schemeClr val="dk1"/>
+          </a:fontRef>
+        </p:style>
+        <p:txBody>
+          <a:bodyPr lIns="90000" tIns="72000" rIns="90000" bIns="72000" rtlCol="0" anchor="t"/>
+          <a:lstStyle/>
+          <a:p>
+            <a:pPr marR="0" algn="ctr" defTabSz="914400" eaLnBrk="1" fontAlgn="base" latinLnBrk="0" hangingPunct="1">
+              <a:lnSpc>
+                <a:spcPct val="100000"/>
+              </a:lnSpc>
+              <a:spcBef>
+                <a:spcPct val="50000"/>
+              </a:spcBef>
+              <a:spcAft>
+                <a:spcPct val="0"/>
+              </a:spcAft>
+              <a:buClr>
+                <a:srgbClr val="F0AB00"/>
+              </a:buClr>
+              <a:buSzPct val="80000"/>
+              <a:tabLst/>
+            </a:pPr>
+            <a:r>
+              <a:rPr kumimoji="0" lang="en-US" sz="1800" b="1" i="0" u="none" strike="noStrike" kern="0" cap="none" spc="0" normalizeH="0" baseline="0" noProof="0" dirty="0">
+                <a:ln>
+                  <a:noFill/>
+                </a:ln>
+                <a:effectLst/>
+                <a:uLnTx/>
+                <a:uFillTx/>
+                <a:ea typeface="Arial Unicode MS" pitchFamily="34" charset="-128"/>
+                <a:cs typeface="Arial Unicode MS" pitchFamily="34" charset="-128"/>
+              </a:rPr>
+              <a:t>Inside K8s</a:t>
+            </a:r>
+          </a:p>
+        </p:txBody>
+      </p:sp>
+      <p:sp>
+        <p:nvSpPr>
+          <p:cNvPr id="2" name="Title 1">
+            <a:extLst>
+              <a:ext uri="{FF2B5EF4-FFF2-40B4-BE49-F238E27FC236}">
+                <a16:creationId xmlns:a16="http://schemas.microsoft.com/office/drawing/2014/main" id="{5A81982A-92E0-45C7-BD26-824B847D1E7C}"/>
+              </a:ext>
+            </a:extLst>
+          </p:cNvPr>
+          <p:cNvSpPr>
+            <a:spLocks noGrp="1"/>
+          </p:cNvSpPr>
+          <p:nvPr>
+            <p:ph type="title"/>
+          </p:nvPr>
+        </p:nvSpPr>
+        <p:spPr/>
+        <p:txBody>
+          <a:bodyPr/>
+          <a:lstStyle/>
+          <a:p>
+            <a:r>
+              <a:rPr lang="en-US" dirty="0"/>
+              <a:t>Fanout</a:t>
+            </a:r>
+          </a:p>
+        </p:txBody>
+      </p:sp>
+      <p:grpSp>
+        <p:nvGrpSpPr>
+          <p:cNvPr id="8" name="Group 7">
+            <a:extLst>
+              <a:ext uri="{FF2B5EF4-FFF2-40B4-BE49-F238E27FC236}">
+                <a16:creationId xmlns:a16="http://schemas.microsoft.com/office/drawing/2014/main" id="{358CDFFD-2085-488C-BBB2-C4A1E71F2454}"/>
+              </a:ext>
+            </a:extLst>
+          </p:cNvPr>
+          <p:cNvGrpSpPr/>
+          <p:nvPr/>
+        </p:nvGrpSpPr>
+        <p:grpSpPr>
+          <a:xfrm>
+            <a:off x="7772400" y="2171876"/>
+            <a:ext cx="3573677" cy="1778068"/>
+            <a:chOff x="7814563" y="2523339"/>
+            <a:chExt cx="3266338" cy="1778068"/>
+          </a:xfrm>
+        </p:grpSpPr>
+        <p:sp>
+          <p:nvSpPr>
+            <p:cNvPr id="3" name="Rectangle 2">
+              <a:extLst>
+                <a:ext uri="{FF2B5EF4-FFF2-40B4-BE49-F238E27FC236}">
+                  <a16:creationId xmlns:a16="http://schemas.microsoft.com/office/drawing/2014/main" id="{B4457830-39F9-4350-B509-B924BFD1AFE9}"/>
+                </a:ext>
+              </a:extLst>
+            </p:cNvPr>
+            <p:cNvSpPr/>
+            <p:nvPr/>
+          </p:nvSpPr>
+          <p:spPr bwMode="gray">
+            <a:xfrm>
+              <a:off x="7814563" y="3016033"/>
+              <a:ext cx="1117498" cy="795956"/>
+            </a:xfrm>
+            <a:prstGeom prst="rect">
+              <a:avLst/>
+            </a:prstGeom>
+            <a:solidFill>
+              <a:schemeClr val="accent4">
+                <a:lumMod val="60000"/>
+                <a:lumOff val="40000"/>
+              </a:schemeClr>
+            </a:solidFill>
+            <a:ln>
+              <a:solidFill>
+                <a:schemeClr val="accent4">
+                  <a:lumMod val="60000"/>
+                  <a:lumOff val="40000"/>
+                </a:schemeClr>
+              </a:solidFill>
+              <a:headEnd/>
+              <a:tailEnd/>
+            </a:ln>
+          </p:spPr>
+          <p:style>
+            <a:lnRef idx="1">
+              <a:schemeClr val="accent1"/>
+            </a:lnRef>
+            <a:fillRef idx="2">
+              <a:schemeClr val="accent1"/>
+            </a:fillRef>
+            <a:effectRef idx="1">
+              <a:schemeClr val="accent1"/>
+            </a:effectRef>
+            <a:fontRef idx="minor">
+              <a:schemeClr val="dk1"/>
+            </a:fontRef>
+          </p:style>
+          <p:txBody>
+            <a:bodyPr lIns="90000" tIns="72000" rIns="90000" bIns="72000" rtlCol="0" anchor="ctr"/>
+            <a:lstStyle/>
+            <a:p>
+              <a:pPr marR="0" algn="ctr" defTabSz="914400" eaLnBrk="1" fontAlgn="base" latinLnBrk="0" hangingPunct="1">
+                <a:lnSpc>
+                  <a:spcPct val="100000"/>
+                </a:lnSpc>
+                <a:spcBef>
+                  <a:spcPct val="50000"/>
+                </a:spcBef>
+                <a:spcAft>
+                  <a:spcPct val="0"/>
+                </a:spcAft>
+                <a:buClr>
+                  <a:srgbClr val="F0AB00"/>
+                </a:buClr>
+                <a:buSzPct val="80000"/>
+                <a:tabLst/>
+              </a:pPr>
+              <a:r>
+                <a:rPr lang="de-DE" sz="1800" b="1" kern="0" dirty="0">
+                  <a:ea typeface="Arial Unicode MS" pitchFamily="34" charset="-128"/>
+                  <a:cs typeface="Arial Unicode MS" pitchFamily="34" charset="-128"/>
+                </a:rPr>
+                <a:t>Service</a:t>
+              </a:r>
+            </a:p>
+            <a:p>
+              <a:pPr marR="0" algn="ctr" defTabSz="914400" eaLnBrk="1" fontAlgn="base" latinLnBrk="0" hangingPunct="1">
+                <a:lnSpc>
+                  <a:spcPct val="100000"/>
+                </a:lnSpc>
+                <a:spcBef>
+                  <a:spcPct val="50000"/>
+                </a:spcBef>
+                <a:spcAft>
+                  <a:spcPct val="0"/>
+                </a:spcAft>
+                <a:buClr>
+                  <a:srgbClr val="F0AB00"/>
+                </a:buClr>
+                <a:buSzPct val="80000"/>
+                <a:tabLst/>
+              </a:pPr>
+              <a:r>
+                <a:rPr kumimoji="0" lang="de-DE" sz="1800" b="0" i="0" u="none" strike="noStrike" kern="0" cap="none" spc="0" normalizeH="0" baseline="0" noProof="0" dirty="0">
+                  <a:ln>
+                    <a:noFill/>
+                  </a:ln>
+                  <a:effectLst/>
+                  <a:uLnTx/>
+                  <a:uFillTx/>
+                  <a:ea typeface="Arial Unicode MS" pitchFamily="34" charset="-128"/>
+                  <a:cs typeface="Arial Unicode MS" pitchFamily="34" charset="-128"/>
+                </a:rPr>
+                <a:t>Port </a:t>
+              </a:r>
+              <a:r>
+                <a:rPr lang="de-DE" sz="1800" kern="0" dirty="0">
+                  <a:ea typeface="Arial Unicode MS" pitchFamily="34" charset="-128"/>
+                  <a:cs typeface="Arial Unicode MS" pitchFamily="34" charset="-128"/>
+                </a:rPr>
+                <a:t>8081</a:t>
+              </a:r>
+              <a:endParaRPr kumimoji="0" lang="de-DE" sz="1800" b="0" i="0" u="none" strike="noStrike" kern="0" cap="none" spc="0" normalizeH="0" baseline="0" noProof="0" dirty="0">
+                <a:ln>
+                  <a:noFill/>
+                </a:ln>
+                <a:effectLst/>
+                <a:uLnTx/>
+                <a:uFillTx/>
+                <a:ea typeface="Arial Unicode MS" pitchFamily="34" charset="-128"/>
+                <a:cs typeface="Arial Unicode MS" pitchFamily="34" charset="-128"/>
+              </a:endParaRPr>
+            </a:p>
+          </p:txBody>
+        </p:sp>
+        <p:sp>
+          <p:nvSpPr>
+            <p:cNvPr id="4" name="Rectangle 3">
+              <a:extLst>
+                <a:ext uri="{FF2B5EF4-FFF2-40B4-BE49-F238E27FC236}">
+                  <a16:creationId xmlns:a16="http://schemas.microsoft.com/office/drawing/2014/main" id="{08D608E2-0C6A-4963-B4A7-7686ABF7E70E}"/>
+                </a:ext>
+              </a:extLst>
+            </p:cNvPr>
+            <p:cNvSpPr/>
+            <p:nvPr/>
+          </p:nvSpPr>
+          <p:spPr bwMode="gray">
+            <a:xfrm>
+              <a:off x="9963403" y="2523339"/>
+              <a:ext cx="1117498" cy="795956"/>
+            </a:xfrm>
+            <a:prstGeom prst="rect">
+              <a:avLst/>
+            </a:prstGeom>
+            <a:solidFill>
+              <a:schemeClr val="accent4">
+                <a:lumMod val="60000"/>
+                <a:lumOff val="40000"/>
+              </a:schemeClr>
+            </a:solidFill>
+            <a:ln>
+              <a:solidFill>
+                <a:schemeClr val="accent4">
+                  <a:lumMod val="60000"/>
+                  <a:lumOff val="40000"/>
+                </a:schemeClr>
+              </a:solidFill>
+              <a:headEnd/>
+              <a:tailEnd/>
+            </a:ln>
+          </p:spPr>
+          <p:style>
+            <a:lnRef idx="1">
+              <a:schemeClr val="accent1"/>
+            </a:lnRef>
+            <a:fillRef idx="2">
+              <a:schemeClr val="accent1"/>
+            </a:fillRef>
+            <a:effectRef idx="1">
+              <a:schemeClr val="accent1"/>
+            </a:effectRef>
+            <a:fontRef idx="minor">
+              <a:schemeClr val="dk1"/>
+            </a:fontRef>
+          </p:style>
+          <p:txBody>
+            <a:bodyPr lIns="90000" tIns="72000" rIns="90000" bIns="72000" rtlCol="0" anchor="ctr"/>
+            <a:lstStyle/>
+            <a:p>
+              <a:pPr algn="ctr" defTabSz="914400" fontAlgn="base">
+                <a:spcBef>
+                  <a:spcPct val="50000"/>
+                </a:spcBef>
+                <a:spcAft>
+                  <a:spcPct val="0"/>
+                </a:spcAft>
+                <a:buClr>
+                  <a:srgbClr val="F0AB00"/>
+                </a:buClr>
+                <a:buSzPct val="80000"/>
+              </a:pPr>
+              <a:r>
+                <a:rPr lang="de-DE" sz="1800" b="1" kern="0" dirty="0" err="1">
+                  <a:ea typeface="Arial Unicode MS" pitchFamily="34" charset="-128"/>
+                  <a:cs typeface="Arial Unicode MS" pitchFamily="34" charset="-128"/>
+                </a:rPr>
+                <a:t>Pod</a:t>
+              </a:r>
+              <a:endParaRPr lang="de-DE" sz="1800" b="1" kern="0" dirty="0">
+                <a:ea typeface="Arial Unicode MS" pitchFamily="34" charset="-128"/>
+                <a:cs typeface="Arial Unicode MS" pitchFamily="34" charset="-128"/>
+              </a:endParaRPr>
+            </a:p>
+            <a:p>
+              <a:pPr algn="ctr" defTabSz="914400" fontAlgn="base">
+                <a:spcBef>
+                  <a:spcPct val="50000"/>
+                </a:spcBef>
+                <a:spcAft>
+                  <a:spcPct val="0"/>
+                </a:spcAft>
+                <a:buClr>
+                  <a:srgbClr val="F0AB00"/>
+                </a:buClr>
+                <a:buSzPct val="80000"/>
+              </a:pPr>
+              <a:r>
+                <a:rPr lang="de-DE" sz="1800" kern="0" dirty="0">
+                  <a:ea typeface="Arial Unicode MS" pitchFamily="34" charset="-128"/>
+                  <a:cs typeface="Arial Unicode MS" pitchFamily="34" charset="-128"/>
+                </a:rPr>
+                <a:t>Port 80</a:t>
+              </a:r>
+            </a:p>
+          </p:txBody>
+        </p:sp>
+        <p:sp>
+          <p:nvSpPr>
+            <p:cNvPr id="5" name="Rectangle 4">
+              <a:extLst>
+                <a:ext uri="{FF2B5EF4-FFF2-40B4-BE49-F238E27FC236}">
+                  <a16:creationId xmlns:a16="http://schemas.microsoft.com/office/drawing/2014/main" id="{0D18E228-9082-4236-885A-0F4636E68086}"/>
+                </a:ext>
+              </a:extLst>
+            </p:cNvPr>
+            <p:cNvSpPr/>
+            <p:nvPr/>
+          </p:nvSpPr>
+          <p:spPr bwMode="gray">
+            <a:xfrm>
+              <a:off x="9963403" y="3505451"/>
+              <a:ext cx="1117498" cy="795956"/>
+            </a:xfrm>
+            <a:prstGeom prst="rect">
+              <a:avLst/>
+            </a:prstGeom>
+            <a:solidFill>
+              <a:schemeClr val="accent4">
+                <a:lumMod val="60000"/>
+                <a:lumOff val="40000"/>
+              </a:schemeClr>
+            </a:solidFill>
+            <a:ln>
+              <a:solidFill>
+                <a:schemeClr val="accent4">
+                  <a:lumMod val="60000"/>
+                  <a:lumOff val="40000"/>
+                </a:schemeClr>
+              </a:solidFill>
+              <a:headEnd/>
+              <a:tailEnd/>
+            </a:ln>
+          </p:spPr>
+          <p:style>
+            <a:lnRef idx="1">
+              <a:schemeClr val="accent1"/>
+            </a:lnRef>
+            <a:fillRef idx="2">
+              <a:schemeClr val="accent1"/>
+            </a:fillRef>
+            <a:effectRef idx="1">
+              <a:schemeClr val="accent1"/>
+            </a:effectRef>
+            <a:fontRef idx="minor">
+              <a:schemeClr val="dk1"/>
+            </a:fontRef>
+          </p:style>
+          <p:txBody>
+            <a:bodyPr lIns="90000" tIns="72000" rIns="90000" bIns="72000" rtlCol="0" anchor="ctr"/>
+            <a:lstStyle/>
+            <a:p>
+              <a:pPr algn="ctr" defTabSz="914400" fontAlgn="base">
+                <a:spcBef>
+                  <a:spcPct val="50000"/>
+                </a:spcBef>
+                <a:spcAft>
+                  <a:spcPct val="0"/>
+                </a:spcAft>
+                <a:buClr>
+                  <a:srgbClr val="F0AB00"/>
+                </a:buClr>
+                <a:buSzPct val="80000"/>
+              </a:pPr>
+              <a:r>
+                <a:rPr lang="de-DE" sz="1800" b="1" kern="0" dirty="0" err="1">
+                  <a:ea typeface="Arial Unicode MS" pitchFamily="34" charset="-128"/>
+                  <a:cs typeface="Arial Unicode MS" pitchFamily="34" charset="-128"/>
+                </a:rPr>
+                <a:t>Pod</a:t>
+              </a:r>
+              <a:endParaRPr lang="de-DE" sz="1800" b="1" kern="0" dirty="0">
+                <a:ea typeface="Arial Unicode MS" pitchFamily="34" charset="-128"/>
+                <a:cs typeface="Arial Unicode MS" pitchFamily="34" charset="-128"/>
+              </a:endParaRPr>
+            </a:p>
+            <a:p>
+              <a:pPr algn="ctr" defTabSz="914400" fontAlgn="base">
+                <a:spcBef>
+                  <a:spcPct val="50000"/>
+                </a:spcBef>
+                <a:spcAft>
+                  <a:spcPct val="0"/>
+                </a:spcAft>
+                <a:buClr>
+                  <a:srgbClr val="F0AB00"/>
+                </a:buClr>
+                <a:buSzPct val="80000"/>
+              </a:pPr>
+              <a:r>
+                <a:rPr lang="de-DE" sz="1800" kern="0" dirty="0">
+                  <a:ea typeface="Arial Unicode MS" pitchFamily="34" charset="-128"/>
+                  <a:cs typeface="Arial Unicode MS" pitchFamily="34" charset="-128"/>
+                </a:rPr>
+                <a:t>Port 80</a:t>
+              </a:r>
+            </a:p>
+          </p:txBody>
+        </p:sp>
+        <p:cxnSp>
+          <p:nvCxnSpPr>
+            <p:cNvPr id="6" name="Connector: Elbow 5">
+              <a:extLst>
+                <a:ext uri="{FF2B5EF4-FFF2-40B4-BE49-F238E27FC236}">
+                  <a16:creationId xmlns:a16="http://schemas.microsoft.com/office/drawing/2014/main" id="{B1B508C1-CE67-4683-8539-9ED63738D7AF}"/>
+                </a:ext>
+              </a:extLst>
+            </p:cNvPr>
+            <p:cNvCxnSpPr>
+              <a:cxnSpLocks/>
+              <a:stCxn id="3" idx="3"/>
+              <a:endCxn id="4" idx="1"/>
+            </p:cNvCxnSpPr>
+            <p:nvPr/>
+          </p:nvCxnSpPr>
+          <p:spPr>
+            <a:xfrm flipV="1">
+              <a:off x="8932061" y="2921317"/>
+              <a:ext cx="1031342" cy="492694"/>
+            </a:xfrm>
+            <a:prstGeom prst="bentConnector3">
+              <a:avLst/>
+            </a:prstGeom>
+            <a:ln w="57150">
+              <a:solidFill>
+                <a:schemeClr val="accent4">
+                  <a:lumMod val="60000"/>
+                  <a:lumOff val="40000"/>
+                </a:schemeClr>
+              </a:solidFill>
+              <a:headEnd type="none" w="med" len="med"/>
+              <a:tailEnd type="none" w="med" len="med"/>
+            </a:ln>
+          </p:spPr>
+          <p:style>
+            <a:lnRef idx="1">
+              <a:schemeClr val="accent1"/>
+            </a:lnRef>
+            <a:fillRef idx="0">
+              <a:schemeClr val="accent1"/>
+            </a:fillRef>
+            <a:effectRef idx="0">
+              <a:schemeClr val="accent1"/>
+            </a:effectRef>
+            <a:fontRef idx="minor">
+              <a:schemeClr val="tx1"/>
+            </a:fontRef>
+          </p:style>
+        </p:cxnSp>
+        <p:cxnSp>
+          <p:nvCxnSpPr>
+            <p:cNvPr id="7" name="Connector: Elbow 6">
+              <a:extLst>
+                <a:ext uri="{FF2B5EF4-FFF2-40B4-BE49-F238E27FC236}">
+                  <a16:creationId xmlns:a16="http://schemas.microsoft.com/office/drawing/2014/main" id="{0B8E918E-7337-4DDD-A077-2D130786BAFE}"/>
+                </a:ext>
+              </a:extLst>
+            </p:cNvPr>
+            <p:cNvCxnSpPr>
+              <a:cxnSpLocks/>
+              <a:stCxn id="3" idx="3"/>
+              <a:endCxn id="5" idx="1"/>
+            </p:cNvCxnSpPr>
+            <p:nvPr/>
+          </p:nvCxnSpPr>
+          <p:spPr>
+            <a:xfrm>
+              <a:off x="8932061" y="3414011"/>
+              <a:ext cx="1031342" cy="489418"/>
+            </a:xfrm>
+            <a:prstGeom prst="bentConnector3">
+              <a:avLst/>
+            </a:prstGeom>
+            <a:ln w="57150">
+              <a:solidFill>
+                <a:schemeClr val="accent4">
+                  <a:lumMod val="60000"/>
+                  <a:lumOff val="40000"/>
+                </a:schemeClr>
+              </a:solidFill>
+              <a:headEnd type="none" w="med" len="med"/>
+              <a:tailEnd type="none" w="med" len="med"/>
+            </a:ln>
+          </p:spPr>
+          <p:style>
+            <a:lnRef idx="1">
+              <a:schemeClr val="accent1"/>
+            </a:lnRef>
+            <a:fillRef idx="0">
+              <a:schemeClr val="accent1"/>
+            </a:fillRef>
+            <a:effectRef idx="0">
+              <a:schemeClr val="accent1"/>
+            </a:effectRef>
+            <a:fontRef idx="minor">
+              <a:schemeClr val="tx1"/>
+            </a:fontRef>
+          </p:style>
+        </p:cxnSp>
+      </p:grpSp>
+      <p:sp>
+        <p:nvSpPr>
+          <p:cNvPr id="9" name="Rectangle 8">
+            <a:extLst>
+              <a:ext uri="{FF2B5EF4-FFF2-40B4-BE49-F238E27FC236}">
+                <a16:creationId xmlns:a16="http://schemas.microsoft.com/office/drawing/2014/main" id="{099CA93B-821C-49D8-A92A-02926E93612E}"/>
+              </a:ext>
+            </a:extLst>
+          </p:cNvPr>
+          <p:cNvSpPr/>
+          <p:nvPr/>
+        </p:nvSpPr>
+        <p:spPr bwMode="gray">
+          <a:xfrm>
+            <a:off x="3200128" y="2322576"/>
+            <a:ext cx="4052013" cy="1982018"/>
+          </a:xfrm>
+          <a:prstGeom prst="rect">
+            <a:avLst/>
+          </a:prstGeom>
+          <a:ln>
+            <a:headEnd/>
+            <a:tailEnd/>
+          </a:ln>
+        </p:spPr>
+        <p:style>
+          <a:lnRef idx="1">
+            <a:schemeClr val="accent1"/>
+          </a:lnRef>
+          <a:fillRef idx="2">
+            <a:schemeClr val="accent1"/>
+          </a:fillRef>
+          <a:effectRef idx="1">
+            <a:schemeClr val="accent1"/>
+          </a:effectRef>
+          <a:fontRef idx="minor">
+            <a:schemeClr val="dk1"/>
+          </a:fontRef>
+        </p:style>
+        <p:txBody>
+          <a:bodyPr lIns="90000" tIns="72000" rIns="90000" bIns="72000" rtlCol="0" anchor="ctr"/>
+          <a:lstStyle/>
+          <a:p>
+            <a:pPr marR="0" algn="ctr" defTabSz="914400" eaLnBrk="1" fontAlgn="base" latinLnBrk="0" hangingPunct="1">
+              <a:lnSpc>
+                <a:spcPct val="100000"/>
+              </a:lnSpc>
+              <a:spcBef>
+                <a:spcPct val="50000"/>
+              </a:spcBef>
+              <a:spcAft>
+                <a:spcPct val="0"/>
+              </a:spcAft>
+              <a:buClr>
+                <a:srgbClr val="F0AB00"/>
+              </a:buClr>
+              <a:buSzPct val="80000"/>
+              <a:tabLst/>
+            </a:pPr>
+            <a:r>
+              <a:rPr lang="de-DE" sz="1800" b="1" kern="0" dirty="0">
+                <a:ea typeface="Arial Unicode MS" pitchFamily="34" charset="-128"/>
+                <a:cs typeface="Arial Unicode MS" pitchFamily="34" charset="-128"/>
+              </a:rPr>
+              <a:t>Ingress</a:t>
+            </a:r>
+          </a:p>
+          <a:p>
+            <a:pPr marR="0" algn="ctr" defTabSz="914400" eaLnBrk="1" fontAlgn="base" latinLnBrk="0" hangingPunct="1">
+              <a:lnSpc>
+                <a:spcPct val="100000"/>
+              </a:lnSpc>
+              <a:spcBef>
+                <a:spcPct val="50000"/>
+              </a:spcBef>
+              <a:spcAft>
+                <a:spcPct val="0"/>
+              </a:spcAft>
+              <a:buClr>
+                <a:srgbClr val="F0AB00"/>
+              </a:buClr>
+              <a:buSzPct val="80000"/>
+              <a:tabLst/>
+            </a:pPr>
+            <a:r>
+              <a:rPr lang="de-DE" sz="1800" kern="0" dirty="0">
+                <a:ea typeface="Arial Unicode MS" pitchFamily="34" charset="-128"/>
+                <a:cs typeface="Arial Unicode MS" pitchFamily="34" charset="-128"/>
+                <a:hlinkClick r:id="rId3"/>
+              </a:rPr>
+              <a:t>https://koopa.ondemand.com/</a:t>
+            </a:r>
+            <a:r>
+              <a:rPr lang="de-DE" sz="1800" b="1" kern="0" dirty="0">
+                <a:ea typeface="Arial Unicode MS" pitchFamily="34" charset="-128"/>
+                <a:cs typeface="Arial Unicode MS" pitchFamily="34" charset="-128"/>
+                <a:hlinkClick r:id="rId3"/>
+              </a:rPr>
+              <a:t>green</a:t>
+            </a:r>
+            <a:r>
+              <a:rPr lang="de-DE" sz="800" b="1" kern="0" dirty="0">
+                <a:ea typeface="Arial Unicode MS" pitchFamily="34" charset="-128"/>
+                <a:cs typeface="Arial Unicode MS" pitchFamily="34" charset="-128"/>
+              </a:rPr>
+              <a:t> </a:t>
+            </a:r>
+          </a:p>
+          <a:p>
+            <a:pPr algn="ctr" defTabSz="914400" fontAlgn="base">
+              <a:spcBef>
+                <a:spcPct val="50000"/>
+              </a:spcBef>
+              <a:spcAft>
+                <a:spcPct val="0"/>
+              </a:spcAft>
+              <a:buClr>
+                <a:srgbClr val="F0AB00"/>
+              </a:buClr>
+              <a:buSzPct val="80000"/>
+            </a:pPr>
+            <a:r>
+              <a:rPr lang="de-DE" sz="1800" kern="0" dirty="0">
+                <a:ea typeface="Arial Unicode MS" pitchFamily="34" charset="-128"/>
+                <a:cs typeface="Arial Unicode MS" pitchFamily="34" charset="-128"/>
+                <a:hlinkClick r:id="rId4"/>
+              </a:rPr>
+              <a:t>https://koopa.ondemand.com/</a:t>
+            </a:r>
+            <a:r>
+              <a:rPr lang="de-DE" sz="1800" b="1" kern="0" dirty="0">
+                <a:ea typeface="Arial Unicode MS" pitchFamily="34" charset="-128"/>
+                <a:cs typeface="Arial Unicode MS" pitchFamily="34" charset="-128"/>
+                <a:hlinkClick r:id="rId4"/>
+              </a:rPr>
+              <a:t>red</a:t>
+            </a:r>
+            <a:r>
+              <a:rPr lang="de-DE" sz="1800" kern="0" dirty="0">
+                <a:ea typeface="Arial Unicode MS" pitchFamily="34" charset="-128"/>
+                <a:cs typeface="Arial Unicode MS" pitchFamily="34" charset="-128"/>
+              </a:rPr>
+              <a:t>  </a:t>
+            </a:r>
+          </a:p>
+          <a:p>
+            <a:pPr algn="ctr" defTabSz="914400" fontAlgn="base">
+              <a:spcBef>
+                <a:spcPct val="50000"/>
+              </a:spcBef>
+              <a:spcAft>
+                <a:spcPct val="0"/>
+              </a:spcAft>
+              <a:buClr>
+                <a:srgbClr val="F0AB00"/>
+              </a:buClr>
+              <a:buSzPct val="80000"/>
+            </a:pPr>
+            <a:r>
+              <a:rPr lang="de-DE" sz="1800" kern="0" dirty="0">
+                <a:ea typeface="Arial Unicode MS" pitchFamily="34" charset="-128"/>
+                <a:cs typeface="Arial Unicode MS" pitchFamily="34" charset="-128"/>
+              </a:rPr>
+              <a:t>35.205.166.164</a:t>
+            </a:r>
+            <a:endParaRPr kumimoji="0" lang="de-DE" sz="1800" b="0" i="0" u="none" strike="noStrike" kern="0" cap="none" spc="0" normalizeH="0" baseline="0" noProof="0" dirty="0">
+              <a:ln>
+                <a:noFill/>
+              </a:ln>
+              <a:effectLst/>
+              <a:uLnTx/>
+              <a:uFillTx/>
+              <a:ea typeface="Arial Unicode MS" pitchFamily="34" charset="-128"/>
+              <a:cs typeface="Arial Unicode MS" pitchFamily="34" charset="-128"/>
+            </a:endParaRPr>
+          </a:p>
+        </p:txBody>
+      </p:sp>
+      <p:sp>
+        <p:nvSpPr>
+          <p:cNvPr id="12" name="Cloud 11">
+            <a:extLst>
+              <a:ext uri="{FF2B5EF4-FFF2-40B4-BE49-F238E27FC236}">
+                <a16:creationId xmlns:a16="http://schemas.microsoft.com/office/drawing/2014/main" id="{1743D8BF-8F3B-443E-ABD5-8A254B403503}"/>
+              </a:ext>
+            </a:extLst>
+          </p:cNvPr>
+          <p:cNvSpPr/>
+          <p:nvPr/>
+        </p:nvSpPr>
+        <p:spPr bwMode="gray">
+          <a:xfrm>
+            <a:off x="320690" y="2760382"/>
+            <a:ext cx="2249770" cy="1106406"/>
+          </a:xfrm>
+          <a:prstGeom prst="cloud">
+            <a:avLst/>
+          </a:prstGeom>
+          <a:ln>
+            <a:headEnd/>
+            <a:tailEnd/>
+          </a:ln>
+        </p:spPr>
+        <p:style>
+          <a:lnRef idx="2">
+            <a:schemeClr val="accent1">
+              <a:shade val="50000"/>
+            </a:schemeClr>
+          </a:lnRef>
+          <a:fillRef idx="1">
+            <a:schemeClr val="accent1"/>
+          </a:fillRef>
+          <a:effectRef idx="0">
+            <a:schemeClr val="accent1"/>
+          </a:effectRef>
+          <a:fontRef idx="minor">
+            <a:schemeClr val="lt1"/>
+          </a:fontRef>
+        </p:style>
+        <p:txBody>
+          <a:bodyPr lIns="90000" tIns="72000" rIns="90000" bIns="72000" rtlCol="0" anchor="ctr"/>
+          <a:lstStyle/>
+          <a:p>
+            <a:pPr marR="0" algn="ctr" defTabSz="914400" eaLnBrk="1" fontAlgn="base" latinLnBrk="0" hangingPunct="1">
+              <a:lnSpc>
+                <a:spcPct val="100000"/>
+              </a:lnSpc>
+              <a:spcBef>
+                <a:spcPct val="50000"/>
+              </a:spcBef>
+              <a:spcAft>
+                <a:spcPct val="0"/>
+              </a:spcAft>
+              <a:buClr>
+                <a:srgbClr val="F0AB00"/>
+              </a:buClr>
+              <a:buSzPct val="80000"/>
+              <a:tabLst/>
+            </a:pPr>
+            <a:endParaRPr kumimoji="0" lang="en-US" sz="1800" b="0" i="0" u="none" strike="noStrike" kern="0" cap="none" spc="0" normalizeH="0" baseline="0" noProof="0" dirty="0" err="1">
+              <a:ln>
+                <a:noFill/>
+              </a:ln>
+              <a:effectLst/>
+              <a:uLnTx/>
+              <a:uFillTx/>
+              <a:ea typeface="Arial Unicode MS" pitchFamily="34" charset="-128"/>
+              <a:cs typeface="Arial Unicode MS" pitchFamily="34" charset="-128"/>
+            </a:endParaRPr>
+          </a:p>
+        </p:txBody>
+      </p:sp>
       <p:pic>
         <p:nvPicPr>
-          <p:cNvPr id="3" name="Picture 2">
+          <p:cNvPr id="13" name="Graphic 12" descr="User">
             <a:extLst>
               <a:ext uri="{FF2B5EF4-FFF2-40B4-BE49-F238E27FC236}">
-                <a16:creationId xmlns:a16="http://schemas.microsoft.com/office/drawing/2014/main" id="{C8CAC47D-D6C8-41F3-9DEC-9D25F9D43C92}"/>
+                <a16:creationId xmlns:a16="http://schemas.microsoft.com/office/drawing/2014/main" id="{59D580DD-E40F-4993-B360-B0AD4EB046D0}"/>
+              </a:ext>
+            </a:extLst>
+          </p:cNvPr>
+          <p:cNvPicPr>
+            <a:picLocks noChangeAspect="1"/>
+          </p:cNvPicPr>
+          <p:nvPr/>
+        </p:nvPicPr>
+        <p:blipFill>
+          <a:blip r:embed="rId5">
+            <a:extLst>
+              <a:ext uri="{96DAC541-7B7A-43D3-8B79-37D633B846F1}">
+                <asvg:svgBlip xmlns:asvg="http://schemas.microsoft.com/office/drawing/2016/SVG/main" r:embed="rId6"/>
+              </a:ext>
+            </a:extLst>
+          </a:blip>
+          <a:stretch>
+            <a:fillRect/>
+          </a:stretch>
+        </p:blipFill>
+        <p:spPr>
+          <a:xfrm>
+            <a:off x="986764" y="2787861"/>
+            <a:ext cx="914400" cy="914400"/>
+          </a:xfrm>
+          <a:prstGeom prst="rect">
+            <a:avLst/>
+          </a:prstGeom>
+        </p:spPr>
+      </p:pic>
+      <p:cxnSp>
+        <p:nvCxnSpPr>
+          <p:cNvPr id="33" name="Straight Connector 32">
+            <a:extLst>
+              <a:ext uri="{FF2B5EF4-FFF2-40B4-BE49-F238E27FC236}">
+                <a16:creationId xmlns:a16="http://schemas.microsoft.com/office/drawing/2014/main" id="{93CFC0E6-4B2E-4A4A-8320-32CEDFC1F8AC}"/>
+              </a:ext>
+            </a:extLst>
+          </p:cNvPr>
+          <p:cNvCxnSpPr>
+            <a:cxnSpLocks/>
+          </p:cNvCxnSpPr>
+          <p:nvPr/>
+        </p:nvCxnSpPr>
+        <p:spPr>
+          <a:xfrm>
+            <a:off x="1818290" y="3181110"/>
+            <a:ext cx="1381838" cy="6351"/>
+          </a:xfrm>
+          <a:prstGeom prst="line">
+            <a:avLst/>
+          </a:prstGeom>
+          <a:ln w="57150">
+            <a:solidFill>
+              <a:schemeClr val="accent4">
+                <a:lumMod val="60000"/>
+                <a:lumOff val="40000"/>
+              </a:schemeClr>
+            </a:solidFill>
+            <a:headEnd type="none" w="med" len="med"/>
+            <a:tailEnd type="triangle" w="med" len="med"/>
+          </a:ln>
+        </p:spPr>
+        <p:style>
+          <a:lnRef idx="1">
+            <a:schemeClr val="accent1"/>
+          </a:lnRef>
+          <a:fillRef idx="0">
+            <a:schemeClr val="accent1"/>
+          </a:fillRef>
+          <a:effectRef idx="0">
+            <a:schemeClr val="accent1"/>
+          </a:effectRef>
+          <a:fontRef idx="minor">
+            <a:schemeClr val="tx1"/>
+          </a:fontRef>
+        </p:style>
+      </p:cxnSp>
+      <p:grpSp>
+        <p:nvGrpSpPr>
+          <p:cNvPr id="45" name="Group 44">
+            <a:extLst>
+              <a:ext uri="{FF2B5EF4-FFF2-40B4-BE49-F238E27FC236}">
+                <a16:creationId xmlns:a16="http://schemas.microsoft.com/office/drawing/2014/main" id="{D9E39F9B-D558-4B40-B770-65B1E36C58AE}"/>
+              </a:ext>
+            </a:extLst>
+          </p:cNvPr>
+          <p:cNvGrpSpPr/>
+          <p:nvPr/>
+        </p:nvGrpSpPr>
+        <p:grpSpPr>
+          <a:xfrm>
+            <a:off x="7772400" y="4304593"/>
+            <a:ext cx="3573677" cy="1778068"/>
+            <a:chOff x="7814563" y="2523339"/>
+            <a:chExt cx="3266338" cy="1778068"/>
+          </a:xfrm>
+        </p:grpSpPr>
+        <p:sp>
+          <p:nvSpPr>
+            <p:cNvPr id="46" name="Rectangle 45">
+              <a:extLst>
+                <a:ext uri="{FF2B5EF4-FFF2-40B4-BE49-F238E27FC236}">
+                  <a16:creationId xmlns:a16="http://schemas.microsoft.com/office/drawing/2014/main" id="{CEEAF3AB-2B14-422E-BE74-A813BE5ADFF9}"/>
+                </a:ext>
+              </a:extLst>
+            </p:cNvPr>
+            <p:cNvSpPr/>
+            <p:nvPr/>
+          </p:nvSpPr>
+          <p:spPr bwMode="gray">
+            <a:xfrm>
+              <a:off x="7814563" y="3016033"/>
+              <a:ext cx="1117498" cy="795956"/>
+            </a:xfrm>
+            <a:prstGeom prst="rect">
+              <a:avLst/>
+            </a:prstGeom>
+            <a:ln>
+              <a:headEnd/>
+              <a:tailEnd/>
+            </a:ln>
+          </p:spPr>
+          <p:style>
+            <a:lnRef idx="2">
+              <a:schemeClr val="accent5">
+                <a:shade val="50000"/>
+              </a:schemeClr>
+            </a:lnRef>
+            <a:fillRef idx="1">
+              <a:schemeClr val="accent5"/>
+            </a:fillRef>
+            <a:effectRef idx="0">
+              <a:schemeClr val="accent5"/>
+            </a:effectRef>
+            <a:fontRef idx="minor">
+              <a:schemeClr val="lt1"/>
+            </a:fontRef>
+          </p:style>
+          <p:txBody>
+            <a:bodyPr lIns="90000" tIns="72000" rIns="90000" bIns="72000" rtlCol="0" anchor="ctr"/>
+            <a:lstStyle/>
+            <a:p>
+              <a:pPr marR="0" algn="ctr" defTabSz="914400" eaLnBrk="1" fontAlgn="base" latinLnBrk="0" hangingPunct="1">
+                <a:lnSpc>
+                  <a:spcPct val="100000"/>
+                </a:lnSpc>
+                <a:spcBef>
+                  <a:spcPct val="50000"/>
+                </a:spcBef>
+                <a:spcAft>
+                  <a:spcPct val="0"/>
+                </a:spcAft>
+                <a:buClr>
+                  <a:srgbClr val="F0AB00"/>
+                </a:buClr>
+                <a:buSzPct val="80000"/>
+                <a:tabLst/>
+              </a:pPr>
+              <a:r>
+                <a:rPr lang="de-DE" sz="1800" b="1" kern="0" dirty="0">
+                  <a:ea typeface="Arial Unicode MS" pitchFamily="34" charset="-128"/>
+                  <a:cs typeface="Arial Unicode MS" pitchFamily="34" charset="-128"/>
+                </a:rPr>
+                <a:t>Service</a:t>
+              </a:r>
+            </a:p>
+            <a:p>
+              <a:pPr marR="0" algn="ctr" defTabSz="914400" eaLnBrk="1" fontAlgn="base" latinLnBrk="0" hangingPunct="1">
+                <a:lnSpc>
+                  <a:spcPct val="100000"/>
+                </a:lnSpc>
+                <a:spcBef>
+                  <a:spcPct val="50000"/>
+                </a:spcBef>
+                <a:spcAft>
+                  <a:spcPct val="0"/>
+                </a:spcAft>
+                <a:buClr>
+                  <a:srgbClr val="F0AB00"/>
+                </a:buClr>
+                <a:buSzPct val="80000"/>
+                <a:tabLst/>
+              </a:pPr>
+              <a:r>
+                <a:rPr kumimoji="0" lang="de-DE" sz="1800" b="0" i="0" u="none" strike="noStrike" kern="0" cap="none" spc="0" normalizeH="0" baseline="0" noProof="0" dirty="0">
+                  <a:ln>
+                    <a:noFill/>
+                  </a:ln>
+                  <a:effectLst/>
+                  <a:uLnTx/>
+                  <a:uFillTx/>
+                  <a:ea typeface="Arial Unicode MS" pitchFamily="34" charset="-128"/>
+                  <a:cs typeface="Arial Unicode MS" pitchFamily="34" charset="-128"/>
+                </a:rPr>
+                <a:t>Port </a:t>
+              </a:r>
+              <a:r>
+                <a:rPr lang="de-DE" sz="1800" kern="0" dirty="0">
+                  <a:ea typeface="Arial Unicode MS" pitchFamily="34" charset="-128"/>
+                  <a:cs typeface="Arial Unicode MS" pitchFamily="34" charset="-128"/>
+                </a:rPr>
+                <a:t>8081</a:t>
+              </a:r>
+              <a:endParaRPr kumimoji="0" lang="de-DE" sz="1800" b="0" i="0" u="none" strike="noStrike" kern="0" cap="none" spc="0" normalizeH="0" baseline="0" noProof="0" dirty="0">
+                <a:ln>
+                  <a:noFill/>
+                </a:ln>
+                <a:effectLst/>
+                <a:uLnTx/>
+                <a:uFillTx/>
+                <a:ea typeface="Arial Unicode MS" pitchFamily="34" charset="-128"/>
+                <a:cs typeface="Arial Unicode MS" pitchFamily="34" charset="-128"/>
+              </a:endParaRPr>
+            </a:p>
+          </p:txBody>
+        </p:sp>
+        <p:sp>
+          <p:nvSpPr>
+            <p:cNvPr id="47" name="Rectangle 46">
+              <a:extLst>
+                <a:ext uri="{FF2B5EF4-FFF2-40B4-BE49-F238E27FC236}">
+                  <a16:creationId xmlns:a16="http://schemas.microsoft.com/office/drawing/2014/main" id="{4E86DE12-4246-4DA8-BEB6-AACA302A24EC}"/>
+                </a:ext>
+              </a:extLst>
+            </p:cNvPr>
+            <p:cNvSpPr/>
+            <p:nvPr/>
+          </p:nvSpPr>
+          <p:spPr bwMode="gray">
+            <a:xfrm>
+              <a:off x="9963403" y="2523339"/>
+              <a:ext cx="1117498" cy="795956"/>
+            </a:xfrm>
+            <a:prstGeom prst="rect">
+              <a:avLst/>
+            </a:prstGeom>
+            <a:ln>
+              <a:headEnd/>
+              <a:tailEnd/>
+            </a:ln>
+          </p:spPr>
+          <p:style>
+            <a:lnRef idx="2">
+              <a:schemeClr val="accent5">
+                <a:shade val="50000"/>
+              </a:schemeClr>
+            </a:lnRef>
+            <a:fillRef idx="1">
+              <a:schemeClr val="accent5"/>
+            </a:fillRef>
+            <a:effectRef idx="0">
+              <a:schemeClr val="accent5"/>
+            </a:effectRef>
+            <a:fontRef idx="minor">
+              <a:schemeClr val="lt1"/>
+            </a:fontRef>
+          </p:style>
+          <p:txBody>
+            <a:bodyPr lIns="90000" tIns="72000" rIns="90000" bIns="72000" rtlCol="0" anchor="ctr"/>
+            <a:lstStyle/>
+            <a:p>
+              <a:pPr algn="ctr" defTabSz="914400" fontAlgn="base">
+                <a:spcBef>
+                  <a:spcPct val="50000"/>
+                </a:spcBef>
+                <a:spcAft>
+                  <a:spcPct val="0"/>
+                </a:spcAft>
+                <a:buClr>
+                  <a:srgbClr val="F0AB00"/>
+                </a:buClr>
+                <a:buSzPct val="80000"/>
+              </a:pPr>
+              <a:r>
+                <a:rPr lang="de-DE" sz="1800" b="1" kern="0" dirty="0" err="1">
+                  <a:ea typeface="Arial Unicode MS" pitchFamily="34" charset="-128"/>
+                  <a:cs typeface="Arial Unicode MS" pitchFamily="34" charset="-128"/>
+                </a:rPr>
+                <a:t>Pod</a:t>
+              </a:r>
+              <a:endParaRPr lang="de-DE" sz="1800" b="1" kern="0" dirty="0">
+                <a:ea typeface="Arial Unicode MS" pitchFamily="34" charset="-128"/>
+                <a:cs typeface="Arial Unicode MS" pitchFamily="34" charset="-128"/>
+              </a:endParaRPr>
+            </a:p>
+            <a:p>
+              <a:pPr algn="ctr" defTabSz="914400" fontAlgn="base">
+                <a:spcBef>
+                  <a:spcPct val="50000"/>
+                </a:spcBef>
+                <a:spcAft>
+                  <a:spcPct val="0"/>
+                </a:spcAft>
+                <a:buClr>
+                  <a:srgbClr val="F0AB00"/>
+                </a:buClr>
+                <a:buSzPct val="80000"/>
+              </a:pPr>
+              <a:r>
+                <a:rPr lang="de-DE" sz="1800" kern="0" dirty="0">
+                  <a:ea typeface="Arial Unicode MS" pitchFamily="34" charset="-128"/>
+                  <a:cs typeface="Arial Unicode MS" pitchFamily="34" charset="-128"/>
+                </a:rPr>
+                <a:t>Port 80</a:t>
+              </a:r>
+            </a:p>
+          </p:txBody>
+        </p:sp>
+        <p:sp>
+          <p:nvSpPr>
+            <p:cNvPr id="48" name="Rectangle 47">
+              <a:extLst>
+                <a:ext uri="{FF2B5EF4-FFF2-40B4-BE49-F238E27FC236}">
+                  <a16:creationId xmlns:a16="http://schemas.microsoft.com/office/drawing/2014/main" id="{4122934F-5543-403B-8578-B738A0FA9A96}"/>
+                </a:ext>
+              </a:extLst>
+            </p:cNvPr>
+            <p:cNvSpPr/>
+            <p:nvPr/>
+          </p:nvSpPr>
+          <p:spPr bwMode="gray">
+            <a:xfrm>
+              <a:off x="9963403" y="3505451"/>
+              <a:ext cx="1117498" cy="795956"/>
+            </a:xfrm>
+            <a:prstGeom prst="rect">
+              <a:avLst/>
+            </a:prstGeom>
+            <a:ln>
+              <a:headEnd/>
+              <a:tailEnd/>
+            </a:ln>
+          </p:spPr>
+          <p:style>
+            <a:lnRef idx="2">
+              <a:schemeClr val="accent5">
+                <a:shade val="50000"/>
+              </a:schemeClr>
+            </a:lnRef>
+            <a:fillRef idx="1">
+              <a:schemeClr val="accent5"/>
+            </a:fillRef>
+            <a:effectRef idx="0">
+              <a:schemeClr val="accent5"/>
+            </a:effectRef>
+            <a:fontRef idx="minor">
+              <a:schemeClr val="lt1"/>
+            </a:fontRef>
+          </p:style>
+          <p:txBody>
+            <a:bodyPr lIns="90000" tIns="72000" rIns="90000" bIns="72000" rtlCol="0" anchor="ctr"/>
+            <a:lstStyle/>
+            <a:p>
+              <a:pPr algn="ctr" defTabSz="914400" fontAlgn="base">
+                <a:spcBef>
+                  <a:spcPct val="50000"/>
+                </a:spcBef>
+                <a:spcAft>
+                  <a:spcPct val="0"/>
+                </a:spcAft>
+                <a:buClr>
+                  <a:srgbClr val="F0AB00"/>
+                </a:buClr>
+                <a:buSzPct val="80000"/>
+              </a:pPr>
+              <a:r>
+                <a:rPr lang="de-DE" sz="1800" b="1" kern="0" dirty="0" err="1">
+                  <a:ea typeface="Arial Unicode MS" pitchFamily="34" charset="-128"/>
+                  <a:cs typeface="Arial Unicode MS" pitchFamily="34" charset="-128"/>
+                </a:rPr>
+                <a:t>Pod</a:t>
+              </a:r>
+              <a:endParaRPr lang="de-DE" sz="1800" b="1" kern="0" dirty="0">
+                <a:ea typeface="Arial Unicode MS" pitchFamily="34" charset="-128"/>
+                <a:cs typeface="Arial Unicode MS" pitchFamily="34" charset="-128"/>
+              </a:endParaRPr>
+            </a:p>
+            <a:p>
+              <a:pPr algn="ctr" defTabSz="914400" fontAlgn="base">
+                <a:spcBef>
+                  <a:spcPct val="50000"/>
+                </a:spcBef>
+                <a:spcAft>
+                  <a:spcPct val="0"/>
+                </a:spcAft>
+                <a:buClr>
+                  <a:srgbClr val="F0AB00"/>
+                </a:buClr>
+                <a:buSzPct val="80000"/>
+              </a:pPr>
+              <a:r>
+                <a:rPr lang="de-DE" sz="1800" kern="0" dirty="0">
+                  <a:ea typeface="Arial Unicode MS" pitchFamily="34" charset="-128"/>
+                  <a:cs typeface="Arial Unicode MS" pitchFamily="34" charset="-128"/>
+                </a:rPr>
+                <a:t>Port 80</a:t>
+              </a:r>
+            </a:p>
+          </p:txBody>
+        </p:sp>
+        <p:cxnSp>
+          <p:nvCxnSpPr>
+            <p:cNvPr id="49" name="Connector: Elbow 48">
+              <a:extLst>
+                <a:ext uri="{FF2B5EF4-FFF2-40B4-BE49-F238E27FC236}">
+                  <a16:creationId xmlns:a16="http://schemas.microsoft.com/office/drawing/2014/main" id="{B359FC99-1C4A-4619-A466-64CCFC7A7B3A}"/>
+                </a:ext>
+              </a:extLst>
+            </p:cNvPr>
+            <p:cNvCxnSpPr>
+              <a:cxnSpLocks/>
+              <a:stCxn id="46" idx="3"/>
+              <a:endCxn id="47" idx="1"/>
+            </p:cNvCxnSpPr>
+            <p:nvPr/>
+          </p:nvCxnSpPr>
+          <p:spPr>
+            <a:xfrm flipV="1">
+              <a:off x="8932061" y="2921317"/>
+              <a:ext cx="1031342" cy="492694"/>
+            </a:xfrm>
+            <a:prstGeom prst="bentConnector3">
+              <a:avLst/>
+            </a:prstGeom>
+            <a:ln w="38100">
+              <a:headEnd type="none" w="med" len="med"/>
+              <a:tailEnd type="none" w="med" len="med"/>
+            </a:ln>
+          </p:spPr>
+          <p:style>
+            <a:lnRef idx="2">
+              <a:schemeClr val="accent5">
+                <a:shade val="50000"/>
+              </a:schemeClr>
+            </a:lnRef>
+            <a:fillRef idx="1">
+              <a:schemeClr val="accent5"/>
+            </a:fillRef>
+            <a:effectRef idx="0">
+              <a:schemeClr val="accent5"/>
+            </a:effectRef>
+            <a:fontRef idx="minor">
+              <a:schemeClr val="lt1"/>
+            </a:fontRef>
+          </p:style>
+        </p:cxnSp>
+        <p:cxnSp>
+          <p:nvCxnSpPr>
+            <p:cNvPr id="50" name="Connector: Elbow 49">
+              <a:extLst>
+                <a:ext uri="{FF2B5EF4-FFF2-40B4-BE49-F238E27FC236}">
+                  <a16:creationId xmlns:a16="http://schemas.microsoft.com/office/drawing/2014/main" id="{E03C267F-AC82-4CAE-92DE-678DD4DF9F43}"/>
+                </a:ext>
+              </a:extLst>
+            </p:cNvPr>
+            <p:cNvCxnSpPr>
+              <a:cxnSpLocks/>
+              <a:stCxn id="46" idx="3"/>
+              <a:endCxn id="48" idx="1"/>
+            </p:cNvCxnSpPr>
+            <p:nvPr/>
+          </p:nvCxnSpPr>
+          <p:spPr>
+            <a:xfrm>
+              <a:off x="8932061" y="3414011"/>
+              <a:ext cx="1031342" cy="489418"/>
+            </a:xfrm>
+            <a:prstGeom prst="bentConnector3">
+              <a:avLst/>
+            </a:prstGeom>
+            <a:ln w="38100">
+              <a:headEnd type="none" w="med" len="med"/>
+              <a:tailEnd type="none" w="med" len="med"/>
+            </a:ln>
+          </p:spPr>
+          <p:style>
+            <a:lnRef idx="2">
+              <a:schemeClr val="accent5">
+                <a:shade val="50000"/>
+              </a:schemeClr>
+            </a:lnRef>
+            <a:fillRef idx="1">
+              <a:schemeClr val="accent5"/>
+            </a:fillRef>
+            <a:effectRef idx="0">
+              <a:schemeClr val="accent5"/>
+            </a:effectRef>
+            <a:fontRef idx="minor">
+              <a:schemeClr val="lt1"/>
+            </a:fontRef>
+          </p:style>
+        </p:cxnSp>
+      </p:grpSp>
+      <p:cxnSp>
+        <p:nvCxnSpPr>
+          <p:cNvPr id="56" name="Straight Connector 55">
+            <a:extLst>
+              <a:ext uri="{FF2B5EF4-FFF2-40B4-BE49-F238E27FC236}">
+                <a16:creationId xmlns:a16="http://schemas.microsoft.com/office/drawing/2014/main" id="{0353F190-1BB4-4019-BD52-08E340747687}"/>
+              </a:ext>
+            </a:extLst>
+          </p:cNvPr>
+          <p:cNvCxnSpPr>
+            <a:cxnSpLocks/>
+          </p:cNvCxnSpPr>
+          <p:nvPr/>
+        </p:nvCxnSpPr>
+        <p:spPr>
+          <a:xfrm>
+            <a:off x="1818290" y="3387160"/>
+            <a:ext cx="1381838" cy="0"/>
+          </a:xfrm>
+          <a:prstGeom prst="line">
+            <a:avLst/>
+          </a:prstGeom>
+          <a:ln w="57150">
+            <a:solidFill>
+              <a:schemeClr val="accent5"/>
+            </a:solidFill>
+            <a:headEnd type="none" w="med" len="med"/>
+            <a:tailEnd type="triangle" w="med" len="med"/>
+          </a:ln>
+        </p:spPr>
+        <p:style>
+          <a:lnRef idx="1">
+            <a:schemeClr val="accent1"/>
+          </a:lnRef>
+          <a:fillRef idx="0">
+            <a:schemeClr val="accent1"/>
+          </a:fillRef>
+          <a:effectRef idx="0">
+            <a:schemeClr val="accent1"/>
+          </a:effectRef>
+          <a:fontRef idx="minor">
+            <a:schemeClr val="tx1"/>
+          </a:fontRef>
+        </p:style>
+      </p:cxnSp>
+      <p:sp>
+        <p:nvSpPr>
+          <p:cNvPr id="61" name="Speech Bubble: Rectangle 60">
+            <a:extLst>
+              <a:ext uri="{FF2B5EF4-FFF2-40B4-BE49-F238E27FC236}">
+                <a16:creationId xmlns:a16="http://schemas.microsoft.com/office/drawing/2014/main" id="{56360F17-096E-4C95-841B-4E6B27202A13}"/>
+              </a:ext>
+            </a:extLst>
+          </p:cNvPr>
+          <p:cNvSpPr/>
+          <p:nvPr/>
+        </p:nvSpPr>
+        <p:spPr bwMode="gray">
+          <a:xfrm>
+            <a:off x="849098" y="5204116"/>
+            <a:ext cx="3649701" cy="1014983"/>
+          </a:xfrm>
+          <a:prstGeom prst="wedgeRectCallout">
+            <a:avLst>
+              <a:gd name="adj1" fmla="val 26705"/>
+              <a:gd name="adj2" fmla="val -162849"/>
+            </a:avLst>
+          </a:prstGeom>
+          <a:ln>
+            <a:headEnd/>
+            <a:tailEnd/>
+          </a:ln>
+        </p:spPr>
+        <p:style>
+          <a:lnRef idx="2">
+            <a:schemeClr val="accent5"/>
+          </a:lnRef>
+          <a:fillRef idx="1">
+            <a:schemeClr val="lt1"/>
+          </a:fillRef>
+          <a:effectRef idx="0">
+            <a:schemeClr val="accent5"/>
+          </a:effectRef>
+          <a:fontRef idx="minor">
+            <a:schemeClr val="dk1"/>
+          </a:fontRef>
+        </p:style>
+        <p:txBody>
+          <a:bodyPr lIns="90000" tIns="72000" rIns="90000" bIns="72000" rtlCol="0" anchor="ctr"/>
+          <a:lstStyle/>
+          <a:p>
+            <a:pPr marR="0" algn="ctr" defTabSz="914400" eaLnBrk="1" fontAlgn="base" latinLnBrk="0" hangingPunct="1">
+              <a:lnSpc>
+                <a:spcPct val="100000"/>
+              </a:lnSpc>
+              <a:spcBef>
+                <a:spcPct val="50000"/>
+              </a:spcBef>
+              <a:spcAft>
+                <a:spcPct val="0"/>
+              </a:spcAft>
+              <a:buClr>
+                <a:srgbClr val="F0AB00"/>
+              </a:buClr>
+              <a:buSzPct val="80000"/>
+              <a:tabLst/>
+            </a:pPr>
+            <a:r>
+              <a:rPr kumimoji="0" lang="en-US" sz="1800" b="0" i="0" u="none" strike="noStrike" kern="0" cap="none" spc="0" normalizeH="0" baseline="0" noProof="0" dirty="0">
+                <a:ln>
+                  <a:noFill/>
+                </a:ln>
+                <a:effectLst/>
+                <a:uLnTx/>
+                <a:uFillTx/>
+                <a:ea typeface="Arial Unicode MS" pitchFamily="34" charset="-128"/>
+                <a:cs typeface="Arial Unicode MS" pitchFamily="34" charset="-128"/>
+              </a:rPr>
+              <a:t>Users access different backends via different suffixes: </a:t>
+            </a:r>
+            <a:r>
+              <a:rPr kumimoji="0" lang="en-US" sz="1800" b="1" i="0" u="sng" strike="noStrike" kern="0" cap="none" spc="0" normalizeH="0" baseline="0" noProof="0" dirty="0">
+                <a:ln>
+                  <a:noFill/>
+                </a:ln>
+                <a:solidFill>
+                  <a:schemeClr val="accent3"/>
+                </a:solidFill>
+                <a:effectLst/>
+                <a:uLnTx/>
+                <a:uFillTx/>
+                <a:ea typeface="Arial Unicode MS" pitchFamily="34" charset="-128"/>
+                <a:cs typeface="Arial Unicode MS" pitchFamily="34" charset="-128"/>
+              </a:rPr>
+              <a:t>/green </a:t>
+            </a:r>
+            <a:r>
+              <a:rPr kumimoji="0" lang="en-US" sz="1800" b="0" i="0" u="none" strike="noStrike" kern="0" cap="none" spc="0" normalizeH="0" baseline="0" noProof="0" dirty="0">
+                <a:ln>
+                  <a:noFill/>
+                </a:ln>
+                <a:effectLst/>
+                <a:uLnTx/>
+                <a:uFillTx/>
+                <a:ea typeface="Arial Unicode MS" pitchFamily="34" charset="-128"/>
+                <a:cs typeface="Arial Unicode MS" pitchFamily="34" charset="-128"/>
+              </a:rPr>
+              <a:t>or </a:t>
+            </a:r>
+            <a:r>
+              <a:rPr lang="en-US" sz="1800" b="1" u="sng" kern="0" dirty="0">
+                <a:solidFill>
+                  <a:schemeClr val="accent3"/>
+                </a:solidFill>
+                <a:ea typeface="Arial Unicode MS" pitchFamily="34" charset="-128"/>
+              </a:rPr>
+              <a:t>/red</a:t>
+            </a:r>
+          </a:p>
+        </p:txBody>
+      </p:sp>
+      <p:cxnSp>
+        <p:nvCxnSpPr>
+          <p:cNvPr id="69" name="Connector: Elbow 68">
+            <a:extLst>
+              <a:ext uri="{FF2B5EF4-FFF2-40B4-BE49-F238E27FC236}">
+                <a16:creationId xmlns:a16="http://schemas.microsoft.com/office/drawing/2014/main" id="{DE6C42AB-2708-4B3C-A9D4-CACA17320CE4}"/>
+              </a:ext>
+            </a:extLst>
+          </p:cNvPr>
+          <p:cNvCxnSpPr>
+            <a:cxnSpLocks/>
+            <a:stCxn id="3" idx="1"/>
+          </p:cNvCxnSpPr>
+          <p:nvPr/>
+        </p:nvCxnSpPr>
+        <p:spPr>
+          <a:xfrm rot="10800000" flipV="1">
+            <a:off x="7275708" y="3062547"/>
+            <a:ext cx="496693" cy="244709"/>
+          </a:xfrm>
+          <a:prstGeom prst="bentConnector3">
+            <a:avLst>
+              <a:gd name="adj1" fmla="val 50000"/>
+            </a:avLst>
+          </a:prstGeom>
+          <a:ln w="57150">
+            <a:solidFill>
+              <a:schemeClr val="accent4">
+                <a:lumMod val="60000"/>
+                <a:lumOff val="40000"/>
+              </a:schemeClr>
+            </a:solidFill>
+            <a:headEnd type="none" w="med" len="med"/>
+            <a:tailEnd type="none" w="med" len="med"/>
+          </a:ln>
+        </p:spPr>
+        <p:style>
+          <a:lnRef idx="1">
+            <a:schemeClr val="accent1"/>
+          </a:lnRef>
+          <a:fillRef idx="0">
+            <a:schemeClr val="accent1"/>
+          </a:fillRef>
+          <a:effectRef idx="0">
+            <a:schemeClr val="accent1"/>
+          </a:effectRef>
+          <a:fontRef idx="minor">
+            <a:schemeClr val="tx1"/>
+          </a:fontRef>
+        </p:style>
+      </p:cxnSp>
+      <p:cxnSp>
+        <p:nvCxnSpPr>
+          <p:cNvPr id="73" name="Connector: Elbow 72">
+            <a:extLst>
+              <a:ext uri="{FF2B5EF4-FFF2-40B4-BE49-F238E27FC236}">
+                <a16:creationId xmlns:a16="http://schemas.microsoft.com/office/drawing/2014/main" id="{0F105FA0-FC20-48F8-8370-34E3EEB66099}"/>
+              </a:ext>
+            </a:extLst>
+          </p:cNvPr>
+          <p:cNvCxnSpPr>
+            <a:cxnSpLocks/>
+            <a:stCxn id="9" idx="3"/>
+            <a:endCxn id="46" idx="1"/>
+          </p:cNvCxnSpPr>
+          <p:nvPr/>
+        </p:nvCxnSpPr>
+        <p:spPr>
+          <a:xfrm>
+            <a:off x="7252141" y="3313585"/>
+            <a:ext cx="520259" cy="1881680"/>
+          </a:xfrm>
+          <a:prstGeom prst="bentConnector3">
+            <a:avLst>
+              <a:gd name="adj1" fmla="val 21717"/>
+            </a:avLst>
+          </a:prstGeom>
+          <a:ln w="38100">
+            <a:headEnd type="none" w="med" len="med"/>
+            <a:tailEnd type="none" w="med" len="med"/>
+          </a:ln>
+        </p:spPr>
+        <p:style>
+          <a:lnRef idx="2">
+            <a:schemeClr val="accent5">
+              <a:shade val="50000"/>
+            </a:schemeClr>
+          </a:lnRef>
+          <a:fillRef idx="1">
+            <a:schemeClr val="accent5"/>
+          </a:fillRef>
+          <a:effectRef idx="0">
+            <a:schemeClr val="accent5"/>
+          </a:effectRef>
+          <a:fontRef idx="minor">
+            <a:schemeClr val="lt1"/>
+          </a:fontRef>
+        </p:style>
+      </p:cxnSp>
+      <p:pic>
+        <p:nvPicPr>
+          <p:cNvPr id="63" name="Picture 2" descr="https://vignette.wikia.nocookie.net/nintendo/images/8/83/KoopaNSMB.png/revision/latest?cb=20110724132501&amp;path-prefix=en">
+            <a:extLst>
+              <a:ext uri="{FF2B5EF4-FFF2-40B4-BE49-F238E27FC236}">
+                <a16:creationId xmlns:a16="http://schemas.microsoft.com/office/drawing/2014/main" id="{146A0740-6CF7-4453-940E-E529058DAC5C}"/>
+              </a:ext>
+            </a:extLst>
+          </p:cNvPr>
+          <p:cNvPicPr>
+            <a:picLocks noChangeAspect="1" noChangeArrowheads="1"/>
+          </p:cNvPicPr>
+          <p:nvPr/>
+        </p:nvPicPr>
+        <p:blipFill>
+          <a:blip r:embed="rId7">
+            <a:extLst>
+              <a:ext uri="{28A0092B-C50C-407E-A947-70E740481C1C}">
+                <a14:useLocalDpi xmlns:a14="http://schemas.microsoft.com/office/drawing/2010/main" val="0"/>
+              </a:ext>
+            </a:extLst>
+          </a:blip>
+          <a:srcRect/>
+          <a:stretch>
+            <a:fillRect/>
+          </a:stretch>
+        </p:blipFill>
+        <p:spPr bwMode="auto">
+          <a:xfrm>
+            <a:off x="6601051" y="1908914"/>
+            <a:ext cx="519950" cy="827324"/>
+          </a:xfrm>
+          <a:prstGeom prst="rect">
+            <a:avLst/>
+          </a:prstGeom>
+          <a:noFill/>
+          <a:extLst>
+            <a:ext uri="{909E8E84-426E-40DD-AFC4-6F175D3DCCD1}">
+              <a14:hiddenFill xmlns:a14="http://schemas.microsoft.com/office/drawing/2010/main">
+                <a:solidFill>
+                  <a:srgbClr val="FFFFFF"/>
+                </a:solidFill>
+              </a14:hiddenFill>
+            </a:ext>
+          </a:extLst>
+        </p:spPr>
+      </p:pic>
+      <p:pic>
+        <p:nvPicPr>
+          <p:cNvPr id="64" name="Picture 10" descr="Image result for nintendo koopa troopa">
+            <a:extLst>
+              <a:ext uri="{FF2B5EF4-FFF2-40B4-BE49-F238E27FC236}">
+                <a16:creationId xmlns:a16="http://schemas.microsoft.com/office/drawing/2014/main" id="{B849C9E0-9AB3-481D-88A2-9845E445CE6D}"/>
+              </a:ext>
+            </a:extLst>
+          </p:cNvPr>
+          <p:cNvPicPr>
+            <a:picLocks noChangeAspect="1" noChangeArrowheads="1"/>
+          </p:cNvPicPr>
+          <p:nvPr/>
+        </p:nvPicPr>
+        <p:blipFill>
+          <a:blip r:embed="rId8">
+            <a:extLst>
+              <a:ext uri="{28A0092B-C50C-407E-A947-70E740481C1C}">
+                <a14:useLocalDpi xmlns:a14="http://schemas.microsoft.com/office/drawing/2010/main" val="0"/>
+              </a:ext>
+            </a:extLst>
+          </a:blip>
+          <a:srcRect/>
+          <a:stretch>
+            <a:fillRect/>
+          </a:stretch>
+        </p:blipFill>
+        <p:spPr bwMode="auto">
+          <a:xfrm>
+            <a:off x="6541385" y="3825518"/>
+            <a:ext cx="647257" cy="826723"/>
+          </a:xfrm>
+          <a:prstGeom prst="rect">
+            <a:avLst/>
+          </a:prstGeom>
+          <a:noFill/>
+          <a:extLst>
+            <a:ext uri="{909E8E84-426E-40DD-AFC4-6F175D3DCCD1}">
+              <a14:hiddenFill xmlns:a14="http://schemas.microsoft.com/office/drawing/2010/main">
+                <a:solidFill>
+                  <a:srgbClr val="FFFFFF"/>
+                </a:solidFill>
+              </a14:hiddenFill>
+            </a:ext>
+          </a:extLst>
+        </p:spPr>
+      </p:pic>
+    </p:spTree>
+    <p:extLst>
+      <p:ext uri="{BB962C8B-B14F-4D97-AF65-F5344CB8AC3E}">
+        <p14:creationId xmlns:p14="http://schemas.microsoft.com/office/powerpoint/2010/main" val="3337258942"/>
+      </p:ext>
+    </p:extLst>
+  </p:cSld>
+  <p:clrMapOvr>
+    <a:masterClrMapping/>
+  </p:clrMapOvr>
+</p:sld>
+</file>
+
+<file path=ppt/slides/slide11.xml><?xml version="1.0" encoding="utf-8"?>
+<p:sld xmlns:a="http://schemas.openxmlformats.org/drawingml/2006/main" xmlns:r="http://schemas.openxmlformats.org/officeDocument/2006/relationships" xmlns:p="http://schemas.openxmlformats.org/presentationml/2006/main">
+  <p:cSld>
+    <p:spTree>
+      <p:nvGrpSpPr>
+        <p:cNvPr id="1" name=""/>
+        <p:cNvGrpSpPr/>
+        <p:nvPr/>
+      </p:nvGrpSpPr>
+      <p:grpSpPr>
+        <a:xfrm>
+          <a:off x="0" y="0"/>
+          <a:ext cx="0" cy="0"/>
+          <a:chOff x="0" y="0"/>
+          <a:chExt cx="0" cy="0"/>
+        </a:xfrm>
+      </p:grpSpPr>
+      <p:pic>
+        <p:nvPicPr>
+          <p:cNvPr id="5" name="Picture 4">
+            <a:extLst>
+              <a:ext uri="{FF2B5EF4-FFF2-40B4-BE49-F238E27FC236}">
+                <a16:creationId xmlns:a16="http://schemas.microsoft.com/office/drawing/2014/main" id="{7D9CF8EB-5A73-4D1C-A62A-5CBB4238B215}"/>
               </a:ext>
             </a:extLst>
           </p:cNvPr>
@@ -16585,15 +18386,15 @@
         </p:blipFill>
         <p:spPr>
           <a:xfrm>
-            <a:off x="504001" y="1134348"/>
-            <a:ext cx="7047619" cy="4990476"/>
+            <a:off x="498818" y="1021235"/>
+            <a:ext cx="6061373" cy="5443422"/>
           </a:xfrm>
           <a:prstGeom prst="rect">
             <a:avLst/>
           </a:prstGeom>
           <a:ln>
             <a:solidFill>
-              <a:schemeClr val="tx1"/>
+              <a:schemeClr val="bg2"/>
             </a:solidFill>
           </a:ln>
         </p:spPr>
@@ -16640,7 +18441,7 @@
         </p:nvSpPr>
         <p:spPr bwMode="gray">
           <a:xfrm>
-            <a:off x="8012317" y="2756491"/>
+            <a:off x="7184753" y="2312413"/>
             <a:ext cx="3678160" cy="677425"/>
           </a:xfrm>
           <a:prstGeom prst="wedgeRectCallout">
@@ -16722,13 +18523,13 @@
         </p:nvSpPr>
         <p:spPr bwMode="gray">
           <a:xfrm>
-            <a:off x="7190633" y="4428919"/>
+            <a:off x="7184753" y="3742946"/>
             <a:ext cx="4505724" cy="677425"/>
           </a:xfrm>
           <a:prstGeom prst="wedgeRectCallout">
             <a:avLst>
-              <a:gd name="adj1" fmla="val -78085"/>
-              <a:gd name="adj2" fmla="val 2845"/>
+              <a:gd name="adj1" fmla="val -77899"/>
+              <a:gd name="adj2" fmla="val 18944"/>
             </a:avLst>
           </a:prstGeom>
           <a:ln>
@@ -16810,9 +18611,16 @@
                 <a:ea typeface="Arial Unicode MS" pitchFamily="34" charset="-128"/>
                 <a:cs typeface="Arial Unicode MS" pitchFamily="34" charset="-128"/>
               </a:rPr>
-              <a:t>on port 80</a:t>
-            </a:r>
-            <a:endParaRPr kumimoji="0" lang="en-US" sz="1800" b="0" i="0" u="none" strike="noStrike" kern="0" cap="none" spc="0" normalizeH="0" baseline="0" noProof="0" dirty="0">
+              <a:t>on </a:t>
+            </a:r>
+            <a:r>
+              <a:rPr lang="en-US" sz="1800" b="1" kern="0" dirty="0">
+                <a:ea typeface="Arial Unicode MS" pitchFamily="34" charset="-128"/>
+                <a:cs typeface="Arial Unicode MS" pitchFamily="34" charset="-128"/>
+              </a:rPr>
+              <a:t>named port http</a:t>
+            </a:r>
+            <a:endParaRPr kumimoji="0" lang="en-US" sz="1800" b="1" i="0" u="none" strike="noStrike" kern="0" cap="none" spc="0" normalizeH="0" baseline="0" noProof="0" dirty="0">
               <a:ln>
                 <a:noFill/>
               </a:ln>
@@ -16839,13 +18647,13 @@
         </p:nvSpPr>
         <p:spPr bwMode="gray">
           <a:xfrm>
-            <a:off x="7184753" y="5786111"/>
+            <a:off x="7184753" y="5601602"/>
             <a:ext cx="4505724" cy="677425"/>
           </a:xfrm>
           <a:prstGeom prst="wedgeRectCallout">
             <a:avLst>
-              <a:gd name="adj1" fmla="val -76679"/>
-              <a:gd name="adj2" fmla="val -43931"/>
+              <a:gd name="adj1" fmla="val -77051"/>
+              <a:gd name="adj2" fmla="val 3127"/>
             </a:avLst>
           </a:prstGeom>
           <a:ln>
@@ -16927,9 +18735,16 @@
                 <a:ea typeface="Arial Unicode MS" pitchFamily="34" charset="-128"/>
                 <a:cs typeface="Arial Unicode MS" pitchFamily="34" charset="-128"/>
               </a:rPr>
-              <a:t> on port 80</a:t>
-            </a:r>
-            <a:endParaRPr kumimoji="0" lang="en-US" sz="1800" b="0" i="0" u="none" strike="noStrike" kern="0" cap="none" spc="0" normalizeH="0" baseline="0" noProof="0" dirty="0">
+              <a:t> on </a:t>
+            </a:r>
+            <a:r>
+              <a:rPr lang="en-US" sz="1800" b="1" kern="0" dirty="0">
+                <a:ea typeface="Arial Unicode MS" pitchFamily="34" charset="-128"/>
+                <a:cs typeface="Arial Unicode MS" pitchFamily="34" charset="-128"/>
+              </a:rPr>
+              <a:t>named port http</a:t>
+            </a:r>
+            <a:endParaRPr kumimoji="0" lang="en-US" sz="1800" b="1" i="0" u="none" strike="noStrike" kern="0" cap="none" spc="0" normalizeH="0" baseline="0" noProof="0" dirty="0">
               <a:ln>
                 <a:noFill/>
               </a:ln>
@@ -16956,7 +18771,7 @@
         </p:nvSpPr>
         <p:spPr bwMode="gray">
           <a:xfrm>
-            <a:off x="7184753" y="1595111"/>
+            <a:off x="7184753" y="1256398"/>
             <a:ext cx="4505724" cy="677425"/>
           </a:xfrm>
           <a:prstGeom prst="wedgeRectCallout">
@@ -17058,7 +18873,7 @@
 </p:sld>
 </file>
 
-<file path=ppt/slides/slide11.xml><?xml version="1.0" encoding="utf-8"?>
+<file path=ppt/slides/slide12.xml><?xml version="1.0" encoding="utf-8"?>
 <p:sld xmlns:a="http://schemas.openxmlformats.org/drawingml/2006/main" xmlns:r="http://schemas.openxmlformats.org/officeDocument/2006/relationships" xmlns:p="http://schemas.openxmlformats.org/presentationml/2006/main">
   <p:cSld>
     <p:spTree>
@@ -17140,7 +18955,7 @@
 </p:sld>
 </file>
 
-<file path=ppt/slides/slide12.xml><?xml version="1.0" encoding="utf-8"?>
+<file path=ppt/slides/slide13.xml><?xml version="1.0" encoding="utf-8"?>
 <p:sld xmlns:a="http://schemas.openxmlformats.org/drawingml/2006/main" xmlns:r="http://schemas.openxmlformats.org/officeDocument/2006/relationships" xmlns:p="http://schemas.openxmlformats.org/presentationml/2006/main">
   <p:cSld>
     <p:spTree>
@@ -18891,7 +20706,7 @@
 </p:sld>
 </file>
 
-<file path=ppt/slides/slide13.xml><?xml version="1.0" encoding="utf-8"?>
+<file path=ppt/slides/slide14.xml><?xml version="1.0" encoding="utf-8"?>
 <p:sld xmlns:a="http://schemas.openxmlformats.org/drawingml/2006/main" xmlns:r="http://schemas.openxmlformats.org/officeDocument/2006/relationships" xmlns:p="http://schemas.openxmlformats.org/presentationml/2006/main">
   <p:cSld>
     <p:spTree>
@@ -18908,41 +20723,6 @@
           <a:chExt cx="0" cy="0"/>
         </a:xfrm>
       </p:grpSpPr>
-      <p:pic>
-        <p:nvPicPr>
-          <p:cNvPr id="3" name="Picture 2">
-            <a:extLst>
-              <a:ext uri="{FF2B5EF4-FFF2-40B4-BE49-F238E27FC236}">
-                <a16:creationId xmlns:a16="http://schemas.microsoft.com/office/drawing/2014/main" id="{3B20B5A0-3E17-4121-8EA5-4A0F4A768AB1}"/>
-              </a:ext>
-            </a:extLst>
-          </p:cNvPr>
-          <p:cNvPicPr>
-            <a:picLocks noChangeAspect="1"/>
-          </p:cNvPicPr>
-          <p:nvPr/>
-        </p:nvPicPr>
-        <p:blipFill>
-          <a:blip r:embed="rId3"/>
-          <a:stretch>
-            <a:fillRect/>
-          </a:stretch>
-        </p:blipFill>
-        <p:spPr>
-          <a:xfrm>
-            <a:off x="504001" y="1087333"/>
-            <a:ext cx="6685714" cy="5266667"/>
-          </a:xfrm>
-          <a:prstGeom prst="rect">
-            <a:avLst/>
-          </a:prstGeom>
-          <a:ln>
-            <a:solidFill>
-              <a:schemeClr val="tx1"/>
-            </a:solidFill>
-          </a:ln>
-        </p:spPr>
-      </p:pic>
       <p:sp>
         <p:nvSpPr>
           <p:cNvPr id="2" name="Title 1">
@@ -18985,7 +20765,7 @@
         </p:nvSpPr>
         <p:spPr bwMode="gray">
           <a:xfrm>
-            <a:off x="7588740" y="1757359"/>
+            <a:off x="7169290" y="1824471"/>
             <a:ext cx="4101737" cy="677425"/>
           </a:xfrm>
           <a:prstGeom prst="wedgeRectCallout">
@@ -19081,7 +20861,7 @@
         </p:nvSpPr>
         <p:spPr bwMode="gray">
           <a:xfrm>
-            <a:off x="7588740" y="3536095"/>
+            <a:off x="7169291" y="3670319"/>
             <a:ext cx="4101737" cy="677425"/>
           </a:xfrm>
           <a:prstGeom prst="wedgeRectCallout">
@@ -19163,6 +20943,41 @@
           </a:p>
         </p:txBody>
       </p:sp>
+      <p:pic>
+        <p:nvPicPr>
+          <p:cNvPr id="5" name="Picture 4">
+            <a:extLst>
+              <a:ext uri="{FF2B5EF4-FFF2-40B4-BE49-F238E27FC236}">
+                <a16:creationId xmlns:a16="http://schemas.microsoft.com/office/drawing/2014/main" id="{6BECE4E1-C8FD-4270-947D-714C20FBEDE2}"/>
+              </a:ext>
+            </a:extLst>
+          </p:cNvPr>
+          <p:cNvPicPr>
+            <a:picLocks noChangeAspect="1"/>
+          </p:cNvPicPr>
+          <p:nvPr/>
+        </p:nvPicPr>
+        <p:blipFill>
+          <a:blip r:embed="rId3"/>
+          <a:stretch>
+            <a:fillRect/>
+          </a:stretch>
+        </p:blipFill>
+        <p:spPr>
+          <a:xfrm>
+            <a:off x="504001" y="1040040"/>
+            <a:ext cx="5502516" cy="5390396"/>
+          </a:xfrm>
+          <a:prstGeom prst="rect">
+            <a:avLst/>
+          </a:prstGeom>
+          <a:ln>
+            <a:solidFill>
+              <a:schemeClr val="bg2"/>
+            </a:solidFill>
+          </a:ln>
+        </p:spPr>
+      </p:pic>
     </p:spTree>
     <p:extLst>
       <p:ext uri="{BB962C8B-B14F-4D97-AF65-F5344CB8AC3E}">
@@ -19176,7 +20991,7 @@
 </p:sld>
 </file>
 
-<file path=ppt/slides/slide14.xml><?xml version="1.0" encoding="utf-8"?>
+<file path=ppt/slides/slide15.xml><?xml version="1.0" encoding="utf-8"?>
 <p:sld xmlns:a="http://schemas.openxmlformats.org/drawingml/2006/main" xmlns:r="http://schemas.openxmlformats.org/officeDocument/2006/relationships" xmlns:p="http://schemas.openxmlformats.org/presentationml/2006/main">
   <p:cSld>
     <p:spTree>
@@ -19258,7 +21073,7 @@
 </p:sld>
 </file>
 
-<file path=ppt/slides/slide15.xml><?xml version="1.0" encoding="utf-8"?>
+<file path=ppt/slides/slide16.xml><?xml version="1.0" encoding="utf-8"?>
 <p:sld xmlns:a="http://schemas.openxmlformats.org/drawingml/2006/main" xmlns:r="http://schemas.openxmlformats.org/officeDocument/2006/relationships" xmlns:p="http://schemas.openxmlformats.org/presentationml/2006/main">
   <p:cSld>
     <p:spTree>
@@ -19275,6 +21090,41 @@
           <a:chExt cx="0" cy="0"/>
         </a:xfrm>
       </p:grpSpPr>
+      <p:pic>
+        <p:nvPicPr>
+          <p:cNvPr id="9" name="Picture 8">
+            <a:extLst>
+              <a:ext uri="{FF2B5EF4-FFF2-40B4-BE49-F238E27FC236}">
+                <a16:creationId xmlns:a16="http://schemas.microsoft.com/office/drawing/2014/main" id="{BA854BC9-3DE1-41ED-81DD-E001D42FFF87}"/>
+              </a:ext>
+            </a:extLst>
+          </p:cNvPr>
+          <p:cNvPicPr>
+            <a:picLocks noChangeAspect="1"/>
+          </p:cNvPicPr>
+          <p:nvPr/>
+        </p:nvPicPr>
+        <p:blipFill>
+          <a:blip r:embed="rId3"/>
+          <a:stretch>
+            <a:fillRect/>
+          </a:stretch>
+        </p:blipFill>
+        <p:spPr>
+          <a:xfrm>
+            <a:off x="504001" y="4081518"/>
+            <a:ext cx="8800000" cy="2209524"/>
+          </a:xfrm>
+          <a:prstGeom prst="rect">
+            <a:avLst/>
+          </a:prstGeom>
+          <a:ln>
+            <a:solidFill>
+              <a:schemeClr val="bg2"/>
+            </a:solidFill>
+          </a:ln>
+        </p:spPr>
+      </p:pic>
       <p:sp>
         <p:nvSpPr>
           <p:cNvPr id="2" name="Title 1">
@@ -19303,52 +21153,12 @@
           </a:p>
         </p:txBody>
       </p:sp>
-      <p:sp>
-        <p:nvSpPr>
-          <p:cNvPr id="3" name="Rectangle 2">
+      <p:pic>
+        <p:nvPicPr>
+          <p:cNvPr id="4" name="Picture 3">
             <a:extLst>
               <a:ext uri="{FF2B5EF4-FFF2-40B4-BE49-F238E27FC236}">
-                <a16:creationId xmlns:a16="http://schemas.microsoft.com/office/drawing/2014/main" id="{E3EA302C-7C5C-4EA1-B07D-C5E3F2E702DC}"/>
-              </a:ext>
-            </a:extLst>
-          </p:cNvPr>
-          <p:cNvSpPr/>
-          <p:nvPr/>
-        </p:nvSpPr>
-        <p:spPr>
-          <a:xfrm>
-            <a:off x="504001" y="5912596"/>
-            <a:ext cx="10565828" cy="369332"/>
-          </a:xfrm>
-          <a:prstGeom prst="rect">
-            <a:avLst/>
-          </a:prstGeom>
-        </p:spPr>
-        <p:txBody>
-          <a:bodyPr wrap="square">
-            <a:spAutoFit/>
-          </a:bodyPr>
-          <a:lstStyle/>
-          <a:p>
-            <a:r>
-              <a:rPr lang="en-US" sz="1800" dirty="0">
-                <a:hlinkClick r:id="rId3"/>
-              </a:rPr>
-              <a:t>https://github.wdf.sap.corp/pages/kubernetes/gardener/doc/2017/01/16/howto-service-access.html</a:t>
-            </a:r>
-            <a:r>
-              <a:rPr lang="en-US" sz="1800" dirty="0"/>
-              <a:t> </a:t>
-            </a:r>
-          </a:p>
-        </p:txBody>
-      </p:sp>
-      <p:pic>
-        <p:nvPicPr>
-          <p:cNvPr id="5" name="Picture 4">
-            <a:extLst>
-              <a:ext uri="{FF2B5EF4-FFF2-40B4-BE49-F238E27FC236}">
-                <a16:creationId xmlns:a16="http://schemas.microsoft.com/office/drawing/2014/main" id="{41898D19-20AB-4D49-9531-92309164D9C9}"/>
+                <a16:creationId xmlns:a16="http://schemas.microsoft.com/office/drawing/2014/main" id="{CE945C15-B1AB-4337-B3FC-B7EF2C6E7BD0}"/>
               </a:ext>
             </a:extLst>
           </p:cNvPr>
@@ -19365,14 +21175,232 @@
         </p:blipFill>
         <p:spPr>
           <a:xfrm>
-            <a:off x="504001" y="992308"/>
-            <a:ext cx="8710274" cy="4801311"/>
+            <a:off x="504001" y="1340298"/>
+            <a:ext cx="8247619" cy="1123810"/>
           </a:xfrm>
           <a:prstGeom prst="rect">
             <a:avLst/>
           </a:prstGeom>
+          <a:ln>
+            <a:solidFill>
+              <a:schemeClr val="bg2"/>
+            </a:solidFill>
+          </a:ln>
         </p:spPr>
       </p:pic>
+      <p:pic>
+        <p:nvPicPr>
+          <p:cNvPr id="6" name="Picture 5">
+            <a:extLst>
+              <a:ext uri="{FF2B5EF4-FFF2-40B4-BE49-F238E27FC236}">
+                <a16:creationId xmlns:a16="http://schemas.microsoft.com/office/drawing/2014/main" id="{25B9AA87-1572-47C4-9278-DB997F1B338D}"/>
+              </a:ext>
+            </a:extLst>
+          </p:cNvPr>
+          <p:cNvPicPr>
+            <a:picLocks noChangeAspect="1"/>
+          </p:cNvPicPr>
+          <p:nvPr/>
+        </p:nvPicPr>
+        <p:blipFill>
+          <a:blip r:embed="rId5"/>
+          <a:stretch>
+            <a:fillRect/>
+          </a:stretch>
+        </p:blipFill>
+        <p:spPr>
+          <a:xfrm>
+            <a:off x="504001" y="3076619"/>
+            <a:ext cx="5047619" cy="704762"/>
+          </a:xfrm>
+          <a:prstGeom prst="rect">
+            <a:avLst/>
+          </a:prstGeom>
+          <a:ln>
+            <a:solidFill>
+              <a:schemeClr val="bg2"/>
+            </a:solidFill>
+          </a:ln>
+        </p:spPr>
+      </p:pic>
+      <p:sp>
+        <p:nvSpPr>
+          <p:cNvPr id="7" name="Speech Bubble: Rectangle 6">
+            <a:extLst>
+              <a:ext uri="{FF2B5EF4-FFF2-40B4-BE49-F238E27FC236}">
+                <a16:creationId xmlns:a16="http://schemas.microsoft.com/office/drawing/2014/main" id="{9F07FF1E-0A50-4CCD-B516-0BE884026A6C}"/>
+              </a:ext>
+            </a:extLst>
+          </p:cNvPr>
+          <p:cNvSpPr/>
+          <p:nvPr/>
+        </p:nvSpPr>
+        <p:spPr bwMode="gray">
+          <a:xfrm>
+            <a:off x="7588740" y="2791582"/>
+            <a:ext cx="4101737" cy="677425"/>
+          </a:xfrm>
+          <a:prstGeom prst="wedgeRectCallout">
+            <a:avLst>
+              <a:gd name="adj1" fmla="val -40130"/>
+              <a:gd name="adj2" fmla="val -102857"/>
+            </a:avLst>
+          </a:prstGeom>
+          <a:ln>
+            <a:headEnd/>
+            <a:tailEnd/>
+          </a:ln>
+        </p:spPr>
+        <p:style>
+          <a:lnRef idx="2">
+            <a:schemeClr val="accent5"/>
+          </a:lnRef>
+          <a:fillRef idx="1">
+            <a:schemeClr val="lt1"/>
+          </a:fillRef>
+          <a:effectRef idx="0">
+            <a:schemeClr val="accent5"/>
+          </a:effectRef>
+          <a:fontRef idx="minor">
+            <a:schemeClr val="dk1"/>
+          </a:fontRef>
+        </p:style>
+        <p:txBody>
+          <a:bodyPr lIns="90000" tIns="72000" rIns="90000" bIns="72000" rtlCol="0" anchor="ctr"/>
+          <a:lstStyle/>
+          <a:p>
+            <a:pPr marR="0" algn="ctr" defTabSz="914400" eaLnBrk="1" fontAlgn="base" latinLnBrk="0" hangingPunct="1">
+              <a:lnSpc>
+                <a:spcPct val="100000"/>
+              </a:lnSpc>
+              <a:spcBef>
+                <a:spcPct val="50000"/>
+              </a:spcBef>
+              <a:spcAft>
+                <a:spcPct val="0"/>
+              </a:spcAft>
+              <a:buClr>
+                <a:srgbClr val="F0AB00"/>
+              </a:buClr>
+              <a:buSzPct val="80000"/>
+              <a:tabLst/>
+            </a:pPr>
+            <a:r>
+              <a:rPr lang="en-US" sz="1800" kern="0" dirty="0">
+                <a:ea typeface="Arial Unicode MS" pitchFamily="34" charset="-128"/>
+                <a:cs typeface="Arial Unicode MS" pitchFamily="34" charset="-128"/>
+              </a:rPr>
+              <a:t>Nginx ingress is available as an addon to Gardener</a:t>
+            </a:r>
+            <a:endParaRPr kumimoji="0" lang="en-US" sz="1800" b="0" i="0" u="none" strike="noStrike" kern="0" cap="none" spc="0" normalizeH="0" baseline="0" noProof="0" dirty="0">
+              <a:ln>
+                <a:noFill/>
+              </a:ln>
+              <a:effectLst/>
+              <a:uLnTx/>
+              <a:uFillTx/>
+              <a:ea typeface="Arial Unicode MS" pitchFamily="34" charset="-128"/>
+              <a:cs typeface="Arial Unicode MS" pitchFamily="34" charset="-128"/>
+            </a:endParaRPr>
+          </a:p>
+        </p:txBody>
+      </p:sp>
+      <p:sp>
+        <p:nvSpPr>
+          <p:cNvPr id="8" name="Speech Bubble: Rectangle 7">
+            <a:extLst>
+              <a:ext uri="{FF2B5EF4-FFF2-40B4-BE49-F238E27FC236}">
+                <a16:creationId xmlns:a16="http://schemas.microsoft.com/office/drawing/2014/main" id="{A9828D4C-8360-40B0-92B3-928A2F07DEE0}"/>
+              </a:ext>
+            </a:extLst>
+          </p:cNvPr>
+          <p:cNvSpPr/>
+          <p:nvPr/>
+        </p:nvSpPr>
+        <p:spPr bwMode="gray">
+          <a:xfrm>
+            <a:off x="6893698" y="4231357"/>
+            <a:ext cx="4101737" cy="677425"/>
+          </a:xfrm>
+          <a:prstGeom prst="wedgeRectCallout">
+            <a:avLst>
+              <a:gd name="adj1" fmla="val -65900"/>
+              <a:gd name="adj2" fmla="val -133816"/>
+            </a:avLst>
+          </a:prstGeom>
+          <a:ln>
+            <a:headEnd/>
+            <a:tailEnd/>
+          </a:ln>
+        </p:spPr>
+        <p:style>
+          <a:lnRef idx="2">
+            <a:schemeClr val="accent5"/>
+          </a:lnRef>
+          <a:fillRef idx="1">
+            <a:schemeClr val="lt1"/>
+          </a:fillRef>
+          <a:effectRef idx="0">
+            <a:schemeClr val="accent5"/>
+          </a:effectRef>
+          <a:fontRef idx="minor">
+            <a:schemeClr val="dk1"/>
+          </a:fontRef>
+        </p:style>
+        <p:txBody>
+          <a:bodyPr lIns="90000" tIns="72000" rIns="90000" bIns="72000" rtlCol="0" anchor="ctr"/>
+          <a:lstStyle/>
+          <a:p>
+            <a:pPr marR="0" algn="ctr" defTabSz="914400" eaLnBrk="1" fontAlgn="base" latinLnBrk="0" hangingPunct="1">
+              <a:lnSpc>
+                <a:spcPct val="100000"/>
+              </a:lnSpc>
+              <a:spcBef>
+                <a:spcPct val="50000"/>
+              </a:spcBef>
+              <a:spcAft>
+                <a:spcPct val="0"/>
+              </a:spcAft>
+              <a:buClr>
+                <a:srgbClr val="F0AB00"/>
+              </a:buClr>
+              <a:buSzPct val="80000"/>
+              <a:tabLst/>
+            </a:pPr>
+            <a:r>
+              <a:rPr lang="en-US" sz="1800" kern="0" dirty="0">
+                <a:ea typeface="Arial Unicode MS" pitchFamily="34" charset="-128"/>
+                <a:cs typeface="Arial Unicode MS" pitchFamily="34" charset="-128"/>
+              </a:rPr>
+              <a:t>Gardener allocates a wildcard domain for the </a:t>
+            </a:r>
+            <a:r>
+              <a:rPr lang="en-US" sz="1800" kern="0" dirty="0" err="1">
+                <a:ea typeface="Arial Unicode MS" pitchFamily="34" charset="-128"/>
+                <a:cs typeface="Arial Unicode MS" pitchFamily="34" charset="-128"/>
+              </a:rPr>
+              <a:t>LoadBalancer</a:t>
+            </a:r>
+            <a:r>
+              <a:rPr lang="en-US" sz="1800" kern="0" dirty="0">
+                <a:ea typeface="Arial Unicode MS" pitchFamily="34" charset="-128"/>
+                <a:cs typeface="Arial Unicode MS" pitchFamily="34" charset="-128"/>
+              </a:rPr>
+              <a:t> Service</a:t>
+            </a:r>
+            <a:endParaRPr kumimoji="0" lang="en-US" sz="1800" b="0" i="0" u="none" strike="noStrike" kern="0" cap="none" spc="0" normalizeH="0" baseline="0" noProof="0" dirty="0">
+              <a:ln>
+                <a:noFill/>
+              </a:ln>
+              <a:effectLst/>
+              <a:uLnTx/>
+              <a:uFillTx/>
+              <a:ea typeface="Arial Unicode MS" pitchFamily="34" charset="-128"/>
+              <a:cs typeface="Arial Unicode MS" pitchFamily="34" charset="-128"/>
+            </a:endParaRPr>
+          </a:p>
+        </p:txBody>
+      </p:sp>
     </p:spTree>
     <p:extLst>
       <p:ext uri="{BB962C8B-B14F-4D97-AF65-F5344CB8AC3E}">
@@ -19386,7 +21414,7 @@
 </p:sld>
 </file>
 
-<file path=ppt/slides/slide16.xml><?xml version="1.0" encoding="utf-8"?>
+<file path=ppt/slides/slide17.xml><?xml version="1.0" encoding="utf-8"?>
 <p:sld xmlns:a="http://schemas.openxmlformats.org/drawingml/2006/main" xmlns:r="http://schemas.openxmlformats.org/officeDocument/2006/relationships" xmlns:p="http://schemas.openxmlformats.org/presentationml/2006/main">
   <p:cSld>
     <p:spTree>
@@ -21058,7 +23086,7 @@
 </p:sld>
 </file>
 
-<file path=ppt/slides/slide17.xml><?xml version="1.0" encoding="utf-8"?>
+<file path=ppt/slides/slide18.xml><?xml version="1.0" encoding="utf-8"?>
 <p:sld xmlns:a="http://schemas.openxmlformats.org/drawingml/2006/main" xmlns:r="http://schemas.openxmlformats.org/officeDocument/2006/relationships" xmlns:p="http://schemas.openxmlformats.org/presentationml/2006/main" show="0">
   <p:cSld>
     <p:spTree>
@@ -27275,7 +29303,7 @@
         <p:spPr>
           <a:xfrm>
             <a:off x="4592572" y="1673072"/>
-            <a:ext cx="6791708" cy="3877985"/>
+            <a:ext cx="6791708" cy="4847481"/>
           </a:xfrm>
           <a:prstGeom prst="rect">
             <a:avLst/>
@@ -27307,7 +29335,7 @@
                 <a:ea typeface="Arial Unicode MS" pitchFamily="34" charset="-128"/>
                 <a:cs typeface="Arial Unicode MS" pitchFamily="34" charset="-128"/>
               </a:rPr>
-              <a:t>Ingress resource describes the desired state</a:t>
+              <a:t>Ingress resource describes the desired state for routing</a:t>
             </a:r>
           </a:p>
           <a:p>
@@ -27330,7 +29358,7 @@
                 <a:ea typeface="Arial Unicode MS" pitchFamily="34" charset="-128"/>
                 <a:cs typeface="Arial Unicode MS" pitchFamily="34" charset="-128"/>
               </a:rPr>
-              <a:t>Cluster specific “ingress controller” will enforce desired state</a:t>
+              <a:t>Cluster specific “ingress controller” will act as edge router and enforce desired state</a:t>
             </a:r>
           </a:p>
           <a:p>
@@ -27353,7 +29381,21 @@
                 <a:ea typeface="Arial Unicode MS" pitchFamily="34" charset="-128"/>
                 <a:cs typeface="Arial Unicode MS" pitchFamily="34" charset="-128"/>
               </a:rPr>
-              <a:t>Creation of endpoints</a:t>
+              <a:t>Ingress controller is typically exposed via a </a:t>
+            </a:r>
+            <a:r>
+              <a:rPr lang="en-US" sz="1800" kern="0" dirty="0" err="1">
+                <a:ea typeface="Arial Unicode MS" pitchFamily="34" charset="-128"/>
+                <a:cs typeface="Arial Unicode MS" pitchFamily="34" charset="-128"/>
+              </a:rPr>
+              <a:t>LoadBalancer</a:t>
+            </a:r>
+            <a:r>
+              <a:rPr lang="en-US" sz="1800" kern="0" dirty="0">
+                <a:ea typeface="Arial Unicode MS" pitchFamily="34" charset="-128"/>
+                <a:cs typeface="Arial Unicode MS" pitchFamily="34" charset="-128"/>
+              </a:rPr>
+              <a:t> service</a:t>
             </a:r>
           </a:p>
           <a:p>
@@ -27376,21 +29418,7 @@
                 <a:ea typeface="Arial Unicode MS" pitchFamily="34" charset="-128"/>
                 <a:cs typeface="Arial Unicode MS" pitchFamily="34" charset="-128"/>
               </a:rPr>
-              <a:t>Creation of an external </a:t>
-            </a:r>
-            <a:r>
-              <a:rPr lang="en-US" sz="1800" kern="0" dirty="0" err="1">
-                <a:ea typeface="Arial Unicode MS" pitchFamily="34" charset="-128"/>
-                <a:cs typeface="Arial Unicode MS" pitchFamily="34" charset="-128"/>
-              </a:rPr>
-              <a:t>loadbalancer</a:t>
-            </a:r>
-            <a:r>
-              <a:rPr lang="en-US" sz="1800" kern="0" dirty="0">
-                <a:ea typeface="Arial Unicode MS" pitchFamily="34" charset="-128"/>
-                <a:cs typeface="Arial Unicode MS" pitchFamily="34" charset="-128"/>
-              </a:rPr>
-              <a:t> or re-use of existing</a:t>
+              <a:t>Handle traffic according to ingress specifications</a:t>
             </a:r>
           </a:p>
           <a:p>
@@ -27460,6 +29488,29 @@
                 <a:cs typeface="Arial Unicode MS" pitchFamily="34" charset="-128"/>
               </a:rPr>
               <a:t>…</a:t>
+            </a:r>
+          </a:p>
+          <a:p>
+            <a:pPr marL="285750" indent="-285750" fontAlgn="base">
+              <a:spcBef>
+                <a:spcPct val="50000"/>
+              </a:spcBef>
+              <a:spcAft>
+                <a:spcPct val="0"/>
+              </a:spcAft>
+              <a:buClr>
+                <a:srgbClr val="F0AB00"/>
+              </a:buClr>
+              <a:buSzPct val="80000"/>
+              <a:buFont typeface="Wingdings" panose="05000000000000000000" pitchFamily="2" charset="2"/>
+              <a:buChar char="§"/>
+            </a:pPr>
+            <a:r>
+              <a:rPr lang="en-US" sz="1800" kern="0" dirty="0">
+                <a:ea typeface="Arial Unicode MS" pitchFamily="34" charset="-128"/>
+                <a:cs typeface="Arial Unicode MS" pitchFamily="34" charset="-128"/>
+              </a:rPr>
+              <a:t>Overhaul in K8s v1.19 with move to from beta to v1 </a:t>
             </a:r>
           </a:p>
           <a:p>
@@ -29064,10 +31115,10 @@
       </p:grpSpPr>
       <p:pic>
         <p:nvPicPr>
-          <p:cNvPr id="5" name="Picture 4">
+          <p:cNvPr id="6" name="Picture 5">
             <a:extLst>
               <a:ext uri="{FF2B5EF4-FFF2-40B4-BE49-F238E27FC236}">
-                <a16:creationId xmlns:a16="http://schemas.microsoft.com/office/drawing/2014/main" id="{158F1394-FE1B-4B34-BF04-C3F9C9AD2C89}"/>
+                <a16:creationId xmlns:a16="http://schemas.microsoft.com/office/drawing/2014/main" id="{2D481D01-45DE-4C3E-9525-2092524BD26A}"/>
               </a:ext>
             </a:extLst>
           </p:cNvPr>
@@ -29084,15 +31135,15 @@
         </p:blipFill>
         <p:spPr>
           <a:xfrm>
-            <a:off x="504001" y="1292811"/>
-            <a:ext cx="7589797" cy="4605627"/>
+            <a:off x="568532" y="1046940"/>
+            <a:ext cx="7285714" cy="5400000"/>
           </a:xfrm>
           <a:prstGeom prst="rect">
             <a:avLst/>
           </a:prstGeom>
           <a:ln>
             <a:solidFill>
-              <a:schemeClr val="tx1"/>
+              <a:schemeClr val="bg2"/>
             </a:solidFill>
           </a:ln>
         </p:spPr>
@@ -29139,7 +31190,7 @@
         </p:nvSpPr>
         <p:spPr bwMode="gray">
           <a:xfrm>
-            <a:off x="6834495" y="2207587"/>
+            <a:off x="6834494" y="1730281"/>
             <a:ext cx="4101737" cy="677425"/>
           </a:xfrm>
           <a:prstGeom prst="wedgeRectCallout">
@@ -29221,13 +31272,13 @@
         </p:nvSpPr>
         <p:spPr bwMode="gray">
           <a:xfrm>
-            <a:off x="7464147" y="5676575"/>
+            <a:off x="6767861" y="4929955"/>
             <a:ext cx="4101737" cy="677425"/>
           </a:xfrm>
           <a:prstGeom prst="wedgeRectCallout">
             <a:avLst>
-              <a:gd name="adj1" fmla="val -78560"/>
-              <a:gd name="adj2" fmla="val -30566"/>
+              <a:gd name="adj1" fmla="val -70175"/>
+              <a:gd name="adj2" fmla="val 54881"/>
             </a:avLst>
           </a:prstGeom>
           <a:ln>
@@ -29445,6 +31496,177 @@
       </p:grpSpPr>
       <p:sp>
         <p:nvSpPr>
+          <p:cNvPr id="3" name="Title 2">
+            <a:extLst>
+              <a:ext uri="{FF2B5EF4-FFF2-40B4-BE49-F238E27FC236}">
+                <a16:creationId xmlns:a16="http://schemas.microsoft.com/office/drawing/2014/main" id="{A5F13419-2B50-487D-9A91-8EB6AB90360B}"/>
+              </a:ext>
+            </a:extLst>
+          </p:cNvPr>
+          <p:cNvSpPr>
+            <a:spLocks noGrp="1"/>
+          </p:cNvSpPr>
+          <p:nvPr>
+            <p:ph type="title"/>
+          </p:nvPr>
+        </p:nvSpPr>
+        <p:spPr/>
+        <p:txBody>
+          <a:bodyPr/>
+          <a:lstStyle/>
+          <a:p>
+            <a:r>
+              <a:rPr lang="en-US" dirty="0"/>
+              <a:t>Default Backend</a:t>
+            </a:r>
+          </a:p>
+        </p:txBody>
+      </p:sp>
+      <p:pic>
+        <p:nvPicPr>
+          <p:cNvPr id="4" name="Picture 3">
+            <a:extLst>
+              <a:ext uri="{FF2B5EF4-FFF2-40B4-BE49-F238E27FC236}">
+                <a16:creationId xmlns:a16="http://schemas.microsoft.com/office/drawing/2014/main" id="{30AF77B6-15E8-465D-8DDE-0B70C8DE1DBB}"/>
+              </a:ext>
+            </a:extLst>
+          </p:cNvPr>
+          <p:cNvPicPr>
+            <a:picLocks noChangeAspect="1"/>
+          </p:cNvPicPr>
+          <p:nvPr/>
+        </p:nvPicPr>
+        <p:blipFill>
+          <a:blip r:embed="rId3"/>
+          <a:stretch>
+            <a:fillRect/>
+          </a:stretch>
+        </p:blipFill>
+        <p:spPr>
+          <a:xfrm>
+            <a:off x="504000" y="1143926"/>
+            <a:ext cx="4074244" cy="1792222"/>
+          </a:xfrm>
+          <a:prstGeom prst="rect">
+            <a:avLst/>
+          </a:prstGeom>
+          <a:ln>
+            <a:solidFill>
+              <a:schemeClr val="bg2"/>
+            </a:solidFill>
+          </a:ln>
+        </p:spPr>
+      </p:pic>
+      <p:sp>
+        <p:nvSpPr>
+          <p:cNvPr id="5" name="Speech Bubble: Rectangle 4">
+            <a:extLst>
+              <a:ext uri="{FF2B5EF4-FFF2-40B4-BE49-F238E27FC236}">
+                <a16:creationId xmlns:a16="http://schemas.microsoft.com/office/drawing/2014/main" id="{E5B940EF-67AD-47D1-8007-AFA0233841AD}"/>
+              </a:ext>
+            </a:extLst>
+          </p:cNvPr>
+          <p:cNvSpPr/>
+          <p:nvPr/>
+        </p:nvSpPr>
+        <p:spPr bwMode="gray">
+          <a:xfrm>
+            <a:off x="5014083" y="4080072"/>
+            <a:ext cx="6676394" cy="677425"/>
+          </a:xfrm>
+          <a:prstGeom prst="wedgeRectCallout">
+            <a:avLst>
+              <a:gd name="adj1" fmla="val -57431"/>
+              <a:gd name="adj2" fmla="val -194496"/>
+            </a:avLst>
+          </a:prstGeom>
+          <a:ln>
+            <a:headEnd/>
+            <a:tailEnd/>
+          </a:ln>
+        </p:spPr>
+        <p:style>
+          <a:lnRef idx="2">
+            <a:schemeClr val="accent5"/>
+          </a:lnRef>
+          <a:fillRef idx="1">
+            <a:schemeClr val="lt1"/>
+          </a:fillRef>
+          <a:effectRef idx="0">
+            <a:schemeClr val="accent5"/>
+          </a:effectRef>
+          <a:fontRef idx="minor">
+            <a:schemeClr val="dk1"/>
+          </a:fontRef>
+        </p:style>
+        <p:txBody>
+          <a:bodyPr lIns="90000" tIns="72000" rIns="90000" bIns="72000" rtlCol="0" anchor="ctr"/>
+          <a:lstStyle/>
+          <a:p>
+            <a:pPr marR="0" algn="ctr" defTabSz="914400" eaLnBrk="1" fontAlgn="base" latinLnBrk="0" hangingPunct="1">
+              <a:lnSpc>
+                <a:spcPct val="100000"/>
+              </a:lnSpc>
+              <a:spcBef>
+                <a:spcPct val="50000"/>
+              </a:spcBef>
+              <a:spcAft>
+                <a:spcPct val="0"/>
+              </a:spcAft>
+              <a:buClr>
+                <a:srgbClr val="F0AB00"/>
+              </a:buClr>
+              <a:buSzPct val="80000"/>
+              <a:tabLst/>
+            </a:pPr>
+            <a:r>
+              <a:rPr kumimoji="0" lang="en-US" sz="1800" b="0" i="0" u="none" strike="noStrike" kern="0" cap="none" spc="0" normalizeH="0" baseline="0" noProof="0" dirty="0">
+                <a:ln>
+                  <a:noFill/>
+                </a:ln>
+                <a:effectLst/>
+                <a:uLnTx/>
+                <a:uFillTx/>
+                <a:ea typeface="Arial Unicode MS" pitchFamily="34" charset="-128"/>
+                <a:cs typeface="Arial Unicode MS" pitchFamily="34" charset="-128"/>
+              </a:rPr>
+              <a:t>Specify a default backend for this ingress – result is similar to an ingress with only one rule</a:t>
+            </a:r>
+          </a:p>
+        </p:txBody>
+      </p:sp>
+    </p:spTree>
+    <p:extLst>
+      <p:ext uri="{BB962C8B-B14F-4D97-AF65-F5344CB8AC3E}">
+        <p14:creationId xmlns:p14="http://schemas.microsoft.com/office/powerpoint/2010/main" val="3959222018"/>
+      </p:ext>
+    </p:extLst>
+  </p:cSld>
+  <p:clrMapOvr>
+    <a:masterClrMapping/>
+  </p:clrMapOvr>
+</p:sld>
+</file>
+
+<file path=ppt/slides/slide9.xml><?xml version="1.0" encoding="utf-8"?>
+<p:sld xmlns:a="http://schemas.openxmlformats.org/drawingml/2006/main" xmlns:r="http://schemas.openxmlformats.org/officeDocument/2006/relationships" xmlns:p="http://schemas.openxmlformats.org/presentationml/2006/main">
+  <p:cSld>
+    <p:spTree>
+      <p:nvGrpSpPr>
+        <p:cNvPr id="1" name=""/>
+        <p:cNvGrpSpPr/>
+        <p:nvPr/>
+      </p:nvGrpSpPr>
+      <p:grpSpPr>
+        <a:xfrm>
+          <a:off x="0" y="0"/>
+          <a:ext cx="0" cy="0"/>
+          <a:chOff x="0" y="0"/>
+          <a:chExt cx="0" cy="0"/>
+        </a:xfrm>
+      </p:grpSpPr>
+      <p:sp>
+        <p:nvSpPr>
           <p:cNvPr id="3" name="Title 2"/>
           <p:cNvSpPr>
             <a:spLocks noGrp="1"/>
@@ -29499,1699 +31721,6 @@
     <p:extLst>
       <p:ext uri="{BB962C8B-B14F-4D97-AF65-F5344CB8AC3E}">
         <p14:creationId xmlns:p14="http://schemas.microsoft.com/office/powerpoint/2010/main" val="2946468943"/>
-      </p:ext>
-    </p:extLst>
-  </p:cSld>
-  <p:clrMapOvr>
-    <a:masterClrMapping/>
-  </p:clrMapOvr>
-</p:sld>
-</file>
-
-<file path=ppt/slides/slide9.xml><?xml version="1.0" encoding="utf-8"?>
-<p:sld xmlns:a="http://schemas.openxmlformats.org/drawingml/2006/main" xmlns:r="http://schemas.openxmlformats.org/officeDocument/2006/relationships" xmlns:p="http://schemas.openxmlformats.org/presentationml/2006/main">
-  <p:cSld>
-    <p:spTree>
-      <p:nvGrpSpPr>
-        <p:cNvPr id="1" name=""/>
-        <p:cNvGrpSpPr/>
-        <p:nvPr/>
-      </p:nvGrpSpPr>
-      <p:grpSpPr>
-        <a:xfrm>
-          <a:off x="0" y="0"/>
-          <a:ext cx="0" cy="0"/>
-          <a:chOff x="0" y="0"/>
-          <a:chExt cx="0" cy="0"/>
-        </a:xfrm>
-      </p:grpSpPr>
-      <p:sp>
-        <p:nvSpPr>
-          <p:cNvPr id="14" name="Rectangle: Rounded Corners 13">
-            <a:extLst>
-              <a:ext uri="{FF2B5EF4-FFF2-40B4-BE49-F238E27FC236}">
-                <a16:creationId xmlns:a16="http://schemas.microsoft.com/office/drawing/2014/main" id="{4DF03BB3-7969-41F8-BB01-B24EF0F775A1}"/>
-              </a:ext>
-            </a:extLst>
-          </p:cNvPr>
-          <p:cNvSpPr/>
-          <p:nvPr/>
-        </p:nvSpPr>
-        <p:spPr bwMode="gray">
-          <a:xfrm>
-            <a:off x="5270643" y="1206858"/>
-            <a:ext cx="6378813" cy="5093357"/>
-          </a:xfrm>
-          <a:prstGeom prst="roundRect">
-            <a:avLst/>
-          </a:prstGeom>
-          <a:ln>
-            <a:headEnd/>
-            <a:tailEnd/>
-          </a:ln>
-        </p:spPr>
-        <p:style>
-          <a:lnRef idx="1">
-            <a:schemeClr val="accent2"/>
-          </a:lnRef>
-          <a:fillRef idx="2">
-            <a:schemeClr val="accent2"/>
-          </a:fillRef>
-          <a:effectRef idx="1">
-            <a:schemeClr val="accent2"/>
-          </a:effectRef>
-          <a:fontRef idx="minor">
-            <a:schemeClr val="dk1"/>
-          </a:fontRef>
-        </p:style>
-        <p:txBody>
-          <a:bodyPr lIns="90000" tIns="72000" rIns="90000" bIns="72000" rtlCol="0" anchor="t"/>
-          <a:lstStyle/>
-          <a:p>
-            <a:pPr marR="0" algn="ctr" defTabSz="914400" eaLnBrk="1" fontAlgn="base" latinLnBrk="0" hangingPunct="1">
-              <a:lnSpc>
-                <a:spcPct val="100000"/>
-              </a:lnSpc>
-              <a:spcBef>
-                <a:spcPct val="50000"/>
-              </a:spcBef>
-              <a:spcAft>
-                <a:spcPct val="0"/>
-              </a:spcAft>
-              <a:buClr>
-                <a:srgbClr val="F0AB00"/>
-              </a:buClr>
-              <a:buSzPct val="80000"/>
-              <a:tabLst/>
-            </a:pPr>
-            <a:r>
-              <a:rPr kumimoji="0" lang="en-US" sz="1800" b="1" i="0" u="none" strike="noStrike" kern="0" cap="none" spc="0" normalizeH="0" baseline="0" noProof="0" dirty="0">
-                <a:ln>
-                  <a:noFill/>
-                </a:ln>
-                <a:effectLst/>
-                <a:uLnTx/>
-                <a:uFillTx/>
-                <a:ea typeface="Arial Unicode MS" pitchFamily="34" charset="-128"/>
-                <a:cs typeface="Arial Unicode MS" pitchFamily="34" charset="-128"/>
-              </a:rPr>
-              <a:t>Inside K8s</a:t>
-            </a:r>
-          </a:p>
-        </p:txBody>
-      </p:sp>
-      <p:sp>
-        <p:nvSpPr>
-          <p:cNvPr id="2" name="Title 1">
-            <a:extLst>
-              <a:ext uri="{FF2B5EF4-FFF2-40B4-BE49-F238E27FC236}">
-                <a16:creationId xmlns:a16="http://schemas.microsoft.com/office/drawing/2014/main" id="{5A81982A-92E0-45C7-BD26-824B847D1E7C}"/>
-              </a:ext>
-            </a:extLst>
-          </p:cNvPr>
-          <p:cNvSpPr>
-            <a:spLocks noGrp="1"/>
-          </p:cNvSpPr>
-          <p:nvPr>
-            <p:ph type="title"/>
-          </p:nvPr>
-        </p:nvSpPr>
-        <p:spPr/>
-        <p:txBody>
-          <a:bodyPr/>
-          <a:lstStyle/>
-          <a:p>
-            <a:r>
-              <a:rPr lang="en-US" dirty="0"/>
-              <a:t>Fanout</a:t>
-            </a:r>
-          </a:p>
-        </p:txBody>
-      </p:sp>
-      <p:grpSp>
-        <p:nvGrpSpPr>
-          <p:cNvPr id="8" name="Group 7">
-            <a:extLst>
-              <a:ext uri="{FF2B5EF4-FFF2-40B4-BE49-F238E27FC236}">
-                <a16:creationId xmlns:a16="http://schemas.microsoft.com/office/drawing/2014/main" id="{358CDFFD-2085-488C-BBB2-C4A1E71F2454}"/>
-              </a:ext>
-            </a:extLst>
-          </p:cNvPr>
-          <p:cNvGrpSpPr/>
-          <p:nvPr/>
-        </p:nvGrpSpPr>
-        <p:grpSpPr>
-          <a:xfrm>
-            <a:off x="7772400" y="2171876"/>
-            <a:ext cx="3573677" cy="1778068"/>
-            <a:chOff x="7814563" y="2523339"/>
-            <a:chExt cx="3266338" cy="1778068"/>
-          </a:xfrm>
-        </p:grpSpPr>
-        <p:sp>
-          <p:nvSpPr>
-            <p:cNvPr id="3" name="Rectangle 2">
-              <a:extLst>
-                <a:ext uri="{FF2B5EF4-FFF2-40B4-BE49-F238E27FC236}">
-                  <a16:creationId xmlns:a16="http://schemas.microsoft.com/office/drawing/2014/main" id="{B4457830-39F9-4350-B509-B924BFD1AFE9}"/>
-                </a:ext>
-              </a:extLst>
-            </p:cNvPr>
-            <p:cNvSpPr/>
-            <p:nvPr/>
-          </p:nvSpPr>
-          <p:spPr bwMode="gray">
-            <a:xfrm>
-              <a:off x="7814563" y="3016033"/>
-              <a:ext cx="1117498" cy="795956"/>
-            </a:xfrm>
-            <a:prstGeom prst="rect">
-              <a:avLst/>
-            </a:prstGeom>
-            <a:solidFill>
-              <a:schemeClr val="accent4">
-                <a:lumMod val="60000"/>
-                <a:lumOff val="40000"/>
-              </a:schemeClr>
-            </a:solidFill>
-            <a:ln>
-              <a:solidFill>
-                <a:schemeClr val="accent4">
-                  <a:lumMod val="60000"/>
-                  <a:lumOff val="40000"/>
-                </a:schemeClr>
-              </a:solidFill>
-              <a:headEnd/>
-              <a:tailEnd/>
-            </a:ln>
-          </p:spPr>
-          <p:style>
-            <a:lnRef idx="1">
-              <a:schemeClr val="accent1"/>
-            </a:lnRef>
-            <a:fillRef idx="2">
-              <a:schemeClr val="accent1"/>
-            </a:fillRef>
-            <a:effectRef idx="1">
-              <a:schemeClr val="accent1"/>
-            </a:effectRef>
-            <a:fontRef idx="minor">
-              <a:schemeClr val="dk1"/>
-            </a:fontRef>
-          </p:style>
-          <p:txBody>
-            <a:bodyPr lIns="90000" tIns="72000" rIns="90000" bIns="72000" rtlCol="0" anchor="ctr"/>
-            <a:lstStyle/>
-            <a:p>
-              <a:pPr marR="0" algn="ctr" defTabSz="914400" eaLnBrk="1" fontAlgn="base" latinLnBrk="0" hangingPunct="1">
-                <a:lnSpc>
-                  <a:spcPct val="100000"/>
-                </a:lnSpc>
-                <a:spcBef>
-                  <a:spcPct val="50000"/>
-                </a:spcBef>
-                <a:spcAft>
-                  <a:spcPct val="0"/>
-                </a:spcAft>
-                <a:buClr>
-                  <a:srgbClr val="F0AB00"/>
-                </a:buClr>
-                <a:buSzPct val="80000"/>
-                <a:tabLst/>
-              </a:pPr>
-              <a:r>
-                <a:rPr lang="de-DE" sz="1800" b="1" kern="0" dirty="0">
-                  <a:ea typeface="Arial Unicode MS" pitchFamily="34" charset="-128"/>
-                  <a:cs typeface="Arial Unicode MS" pitchFamily="34" charset="-128"/>
-                </a:rPr>
-                <a:t>Service</a:t>
-              </a:r>
-            </a:p>
-            <a:p>
-              <a:pPr marR="0" algn="ctr" defTabSz="914400" eaLnBrk="1" fontAlgn="base" latinLnBrk="0" hangingPunct="1">
-                <a:lnSpc>
-                  <a:spcPct val="100000"/>
-                </a:lnSpc>
-                <a:spcBef>
-                  <a:spcPct val="50000"/>
-                </a:spcBef>
-                <a:spcAft>
-                  <a:spcPct val="0"/>
-                </a:spcAft>
-                <a:buClr>
-                  <a:srgbClr val="F0AB00"/>
-                </a:buClr>
-                <a:buSzPct val="80000"/>
-                <a:tabLst/>
-              </a:pPr>
-              <a:r>
-                <a:rPr kumimoji="0" lang="de-DE" sz="1800" b="0" i="0" u="none" strike="noStrike" kern="0" cap="none" spc="0" normalizeH="0" baseline="0" noProof="0" dirty="0">
-                  <a:ln>
-                    <a:noFill/>
-                  </a:ln>
-                  <a:effectLst/>
-                  <a:uLnTx/>
-                  <a:uFillTx/>
-                  <a:ea typeface="Arial Unicode MS" pitchFamily="34" charset="-128"/>
-                  <a:cs typeface="Arial Unicode MS" pitchFamily="34" charset="-128"/>
-                </a:rPr>
-                <a:t>Port </a:t>
-              </a:r>
-              <a:r>
-                <a:rPr lang="de-DE" sz="1800" kern="0" dirty="0">
-                  <a:ea typeface="Arial Unicode MS" pitchFamily="34" charset="-128"/>
-                  <a:cs typeface="Arial Unicode MS" pitchFamily="34" charset="-128"/>
-                </a:rPr>
-                <a:t>8081</a:t>
-              </a:r>
-              <a:endParaRPr kumimoji="0" lang="de-DE" sz="1800" b="0" i="0" u="none" strike="noStrike" kern="0" cap="none" spc="0" normalizeH="0" baseline="0" noProof="0" dirty="0">
-                <a:ln>
-                  <a:noFill/>
-                </a:ln>
-                <a:effectLst/>
-                <a:uLnTx/>
-                <a:uFillTx/>
-                <a:ea typeface="Arial Unicode MS" pitchFamily="34" charset="-128"/>
-                <a:cs typeface="Arial Unicode MS" pitchFamily="34" charset="-128"/>
-              </a:endParaRPr>
-            </a:p>
-          </p:txBody>
-        </p:sp>
-        <p:sp>
-          <p:nvSpPr>
-            <p:cNvPr id="4" name="Rectangle 3">
-              <a:extLst>
-                <a:ext uri="{FF2B5EF4-FFF2-40B4-BE49-F238E27FC236}">
-                  <a16:creationId xmlns:a16="http://schemas.microsoft.com/office/drawing/2014/main" id="{08D608E2-0C6A-4963-B4A7-7686ABF7E70E}"/>
-                </a:ext>
-              </a:extLst>
-            </p:cNvPr>
-            <p:cNvSpPr/>
-            <p:nvPr/>
-          </p:nvSpPr>
-          <p:spPr bwMode="gray">
-            <a:xfrm>
-              <a:off x="9963403" y="2523339"/>
-              <a:ext cx="1117498" cy="795956"/>
-            </a:xfrm>
-            <a:prstGeom prst="rect">
-              <a:avLst/>
-            </a:prstGeom>
-            <a:solidFill>
-              <a:schemeClr val="accent4">
-                <a:lumMod val="60000"/>
-                <a:lumOff val="40000"/>
-              </a:schemeClr>
-            </a:solidFill>
-            <a:ln>
-              <a:solidFill>
-                <a:schemeClr val="accent4">
-                  <a:lumMod val="60000"/>
-                  <a:lumOff val="40000"/>
-                </a:schemeClr>
-              </a:solidFill>
-              <a:headEnd/>
-              <a:tailEnd/>
-            </a:ln>
-          </p:spPr>
-          <p:style>
-            <a:lnRef idx="1">
-              <a:schemeClr val="accent1"/>
-            </a:lnRef>
-            <a:fillRef idx="2">
-              <a:schemeClr val="accent1"/>
-            </a:fillRef>
-            <a:effectRef idx="1">
-              <a:schemeClr val="accent1"/>
-            </a:effectRef>
-            <a:fontRef idx="minor">
-              <a:schemeClr val="dk1"/>
-            </a:fontRef>
-          </p:style>
-          <p:txBody>
-            <a:bodyPr lIns="90000" tIns="72000" rIns="90000" bIns="72000" rtlCol="0" anchor="ctr"/>
-            <a:lstStyle/>
-            <a:p>
-              <a:pPr algn="ctr" defTabSz="914400" fontAlgn="base">
-                <a:spcBef>
-                  <a:spcPct val="50000"/>
-                </a:spcBef>
-                <a:spcAft>
-                  <a:spcPct val="0"/>
-                </a:spcAft>
-                <a:buClr>
-                  <a:srgbClr val="F0AB00"/>
-                </a:buClr>
-                <a:buSzPct val="80000"/>
-              </a:pPr>
-              <a:r>
-                <a:rPr lang="de-DE" sz="1800" b="1" kern="0" dirty="0" err="1">
-                  <a:ea typeface="Arial Unicode MS" pitchFamily="34" charset="-128"/>
-                  <a:cs typeface="Arial Unicode MS" pitchFamily="34" charset="-128"/>
-                </a:rPr>
-                <a:t>Pod</a:t>
-              </a:r>
-              <a:endParaRPr lang="de-DE" sz="1800" b="1" kern="0" dirty="0">
-                <a:ea typeface="Arial Unicode MS" pitchFamily="34" charset="-128"/>
-                <a:cs typeface="Arial Unicode MS" pitchFamily="34" charset="-128"/>
-              </a:endParaRPr>
-            </a:p>
-            <a:p>
-              <a:pPr algn="ctr" defTabSz="914400" fontAlgn="base">
-                <a:spcBef>
-                  <a:spcPct val="50000"/>
-                </a:spcBef>
-                <a:spcAft>
-                  <a:spcPct val="0"/>
-                </a:spcAft>
-                <a:buClr>
-                  <a:srgbClr val="F0AB00"/>
-                </a:buClr>
-                <a:buSzPct val="80000"/>
-              </a:pPr>
-              <a:r>
-                <a:rPr lang="de-DE" sz="1800" kern="0" dirty="0">
-                  <a:ea typeface="Arial Unicode MS" pitchFamily="34" charset="-128"/>
-                  <a:cs typeface="Arial Unicode MS" pitchFamily="34" charset="-128"/>
-                </a:rPr>
-                <a:t>Port 80</a:t>
-              </a:r>
-            </a:p>
-          </p:txBody>
-        </p:sp>
-        <p:sp>
-          <p:nvSpPr>
-            <p:cNvPr id="5" name="Rectangle 4">
-              <a:extLst>
-                <a:ext uri="{FF2B5EF4-FFF2-40B4-BE49-F238E27FC236}">
-                  <a16:creationId xmlns:a16="http://schemas.microsoft.com/office/drawing/2014/main" id="{0D18E228-9082-4236-885A-0F4636E68086}"/>
-                </a:ext>
-              </a:extLst>
-            </p:cNvPr>
-            <p:cNvSpPr/>
-            <p:nvPr/>
-          </p:nvSpPr>
-          <p:spPr bwMode="gray">
-            <a:xfrm>
-              <a:off x="9963403" y="3505451"/>
-              <a:ext cx="1117498" cy="795956"/>
-            </a:xfrm>
-            <a:prstGeom prst="rect">
-              <a:avLst/>
-            </a:prstGeom>
-            <a:solidFill>
-              <a:schemeClr val="accent4">
-                <a:lumMod val="60000"/>
-                <a:lumOff val="40000"/>
-              </a:schemeClr>
-            </a:solidFill>
-            <a:ln>
-              <a:solidFill>
-                <a:schemeClr val="accent4">
-                  <a:lumMod val="60000"/>
-                  <a:lumOff val="40000"/>
-                </a:schemeClr>
-              </a:solidFill>
-              <a:headEnd/>
-              <a:tailEnd/>
-            </a:ln>
-          </p:spPr>
-          <p:style>
-            <a:lnRef idx="1">
-              <a:schemeClr val="accent1"/>
-            </a:lnRef>
-            <a:fillRef idx="2">
-              <a:schemeClr val="accent1"/>
-            </a:fillRef>
-            <a:effectRef idx="1">
-              <a:schemeClr val="accent1"/>
-            </a:effectRef>
-            <a:fontRef idx="minor">
-              <a:schemeClr val="dk1"/>
-            </a:fontRef>
-          </p:style>
-          <p:txBody>
-            <a:bodyPr lIns="90000" tIns="72000" rIns="90000" bIns="72000" rtlCol="0" anchor="ctr"/>
-            <a:lstStyle/>
-            <a:p>
-              <a:pPr algn="ctr" defTabSz="914400" fontAlgn="base">
-                <a:spcBef>
-                  <a:spcPct val="50000"/>
-                </a:spcBef>
-                <a:spcAft>
-                  <a:spcPct val="0"/>
-                </a:spcAft>
-                <a:buClr>
-                  <a:srgbClr val="F0AB00"/>
-                </a:buClr>
-                <a:buSzPct val="80000"/>
-              </a:pPr>
-              <a:r>
-                <a:rPr lang="de-DE" sz="1800" b="1" kern="0" dirty="0" err="1">
-                  <a:ea typeface="Arial Unicode MS" pitchFamily="34" charset="-128"/>
-                  <a:cs typeface="Arial Unicode MS" pitchFamily="34" charset="-128"/>
-                </a:rPr>
-                <a:t>Pod</a:t>
-              </a:r>
-              <a:endParaRPr lang="de-DE" sz="1800" b="1" kern="0" dirty="0">
-                <a:ea typeface="Arial Unicode MS" pitchFamily="34" charset="-128"/>
-                <a:cs typeface="Arial Unicode MS" pitchFamily="34" charset="-128"/>
-              </a:endParaRPr>
-            </a:p>
-            <a:p>
-              <a:pPr algn="ctr" defTabSz="914400" fontAlgn="base">
-                <a:spcBef>
-                  <a:spcPct val="50000"/>
-                </a:spcBef>
-                <a:spcAft>
-                  <a:spcPct val="0"/>
-                </a:spcAft>
-                <a:buClr>
-                  <a:srgbClr val="F0AB00"/>
-                </a:buClr>
-                <a:buSzPct val="80000"/>
-              </a:pPr>
-              <a:r>
-                <a:rPr lang="de-DE" sz="1800" kern="0" dirty="0">
-                  <a:ea typeface="Arial Unicode MS" pitchFamily="34" charset="-128"/>
-                  <a:cs typeface="Arial Unicode MS" pitchFamily="34" charset="-128"/>
-                </a:rPr>
-                <a:t>Port 80</a:t>
-              </a:r>
-            </a:p>
-          </p:txBody>
-        </p:sp>
-        <p:cxnSp>
-          <p:nvCxnSpPr>
-            <p:cNvPr id="6" name="Connector: Elbow 5">
-              <a:extLst>
-                <a:ext uri="{FF2B5EF4-FFF2-40B4-BE49-F238E27FC236}">
-                  <a16:creationId xmlns:a16="http://schemas.microsoft.com/office/drawing/2014/main" id="{B1B508C1-CE67-4683-8539-9ED63738D7AF}"/>
-                </a:ext>
-              </a:extLst>
-            </p:cNvPr>
-            <p:cNvCxnSpPr>
-              <a:cxnSpLocks/>
-              <a:stCxn id="3" idx="3"/>
-              <a:endCxn id="4" idx="1"/>
-            </p:cNvCxnSpPr>
-            <p:nvPr/>
-          </p:nvCxnSpPr>
-          <p:spPr>
-            <a:xfrm flipV="1">
-              <a:off x="8932061" y="2921317"/>
-              <a:ext cx="1031342" cy="492694"/>
-            </a:xfrm>
-            <a:prstGeom prst="bentConnector3">
-              <a:avLst/>
-            </a:prstGeom>
-            <a:ln w="57150">
-              <a:solidFill>
-                <a:schemeClr val="accent4">
-                  <a:lumMod val="60000"/>
-                  <a:lumOff val="40000"/>
-                </a:schemeClr>
-              </a:solidFill>
-              <a:headEnd type="none" w="med" len="med"/>
-              <a:tailEnd type="none" w="med" len="med"/>
-            </a:ln>
-          </p:spPr>
-          <p:style>
-            <a:lnRef idx="1">
-              <a:schemeClr val="accent1"/>
-            </a:lnRef>
-            <a:fillRef idx="0">
-              <a:schemeClr val="accent1"/>
-            </a:fillRef>
-            <a:effectRef idx="0">
-              <a:schemeClr val="accent1"/>
-            </a:effectRef>
-            <a:fontRef idx="minor">
-              <a:schemeClr val="tx1"/>
-            </a:fontRef>
-          </p:style>
-        </p:cxnSp>
-        <p:cxnSp>
-          <p:nvCxnSpPr>
-            <p:cNvPr id="7" name="Connector: Elbow 6">
-              <a:extLst>
-                <a:ext uri="{FF2B5EF4-FFF2-40B4-BE49-F238E27FC236}">
-                  <a16:creationId xmlns:a16="http://schemas.microsoft.com/office/drawing/2014/main" id="{0B8E918E-7337-4DDD-A077-2D130786BAFE}"/>
-                </a:ext>
-              </a:extLst>
-            </p:cNvPr>
-            <p:cNvCxnSpPr>
-              <a:cxnSpLocks/>
-              <a:stCxn id="3" idx="3"/>
-              <a:endCxn id="5" idx="1"/>
-            </p:cNvCxnSpPr>
-            <p:nvPr/>
-          </p:nvCxnSpPr>
-          <p:spPr>
-            <a:xfrm>
-              <a:off x="8932061" y="3414011"/>
-              <a:ext cx="1031342" cy="489418"/>
-            </a:xfrm>
-            <a:prstGeom prst="bentConnector3">
-              <a:avLst/>
-            </a:prstGeom>
-            <a:ln w="57150">
-              <a:solidFill>
-                <a:schemeClr val="accent4">
-                  <a:lumMod val="60000"/>
-                  <a:lumOff val="40000"/>
-                </a:schemeClr>
-              </a:solidFill>
-              <a:headEnd type="none" w="med" len="med"/>
-              <a:tailEnd type="none" w="med" len="med"/>
-            </a:ln>
-          </p:spPr>
-          <p:style>
-            <a:lnRef idx="1">
-              <a:schemeClr val="accent1"/>
-            </a:lnRef>
-            <a:fillRef idx="0">
-              <a:schemeClr val="accent1"/>
-            </a:fillRef>
-            <a:effectRef idx="0">
-              <a:schemeClr val="accent1"/>
-            </a:effectRef>
-            <a:fontRef idx="minor">
-              <a:schemeClr val="tx1"/>
-            </a:fontRef>
-          </p:style>
-        </p:cxnSp>
-      </p:grpSp>
-      <p:sp>
-        <p:nvSpPr>
-          <p:cNvPr id="9" name="Rectangle 8">
-            <a:extLst>
-              <a:ext uri="{FF2B5EF4-FFF2-40B4-BE49-F238E27FC236}">
-                <a16:creationId xmlns:a16="http://schemas.microsoft.com/office/drawing/2014/main" id="{099CA93B-821C-49D8-A92A-02926E93612E}"/>
-              </a:ext>
-            </a:extLst>
-          </p:cNvPr>
-          <p:cNvSpPr/>
-          <p:nvPr/>
-        </p:nvSpPr>
-        <p:spPr bwMode="gray">
-          <a:xfrm>
-            <a:off x="3200128" y="2322576"/>
-            <a:ext cx="4052013" cy="1982018"/>
-          </a:xfrm>
-          <a:prstGeom prst="rect">
-            <a:avLst/>
-          </a:prstGeom>
-          <a:ln>
-            <a:headEnd/>
-            <a:tailEnd/>
-          </a:ln>
-        </p:spPr>
-        <p:style>
-          <a:lnRef idx="1">
-            <a:schemeClr val="accent1"/>
-          </a:lnRef>
-          <a:fillRef idx="2">
-            <a:schemeClr val="accent1"/>
-          </a:fillRef>
-          <a:effectRef idx="1">
-            <a:schemeClr val="accent1"/>
-          </a:effectRef>
-          <a:fontRef idx="minor">
-            <a:schemeClr val="dk1"/>
-          </a:fontRef>
-        </p:style>
-        <p:txBody>
-          <a:bodyPr lIns="90000" tIns="72000" rIns="90000" bIns="72000" rtlCol="0" anchor="ctr"/>
-          <a:lstStyle/>
-          <a:p>
-            <a:pPr marR="0" algn="ctr" defTabSz="914400" eaLnBrk="1" fontAlgn="base" latinLnBrk="0" hangingPunct="1">
-              <a:lnSpc>
-                <a:spcPct val="100000"/>
-              </a:lnSpc>
-              <a:spcBef>
-                <a:spcPct val="50000"/>
-              </a:spcBef>
-              <a:spcAft>
-                <a:spcPct val="0"/>
-              </a:spcAft>
-              <a:buClr>
-                <a:srgbClr val="F0AB00"/>
-              </a:buClr>
-              <a:buSzPct val="80000"/>
-              <a:tabLst/>
-            </a:pPr>
-            <a:r>
-              <a:rPr lang="de-DE" sz="1800" b="1" kern="0" dirty="0">
-                <a:ea typeface="Arial Unicode MS" pitchFamily="34" charset="-128"/>
-                <a:cs typeface="Arial Unicode MS" pitchFamily="34" charset="-128"/>
-              </a:rPr>
-              <a:t>Ingress</a:t>
-            </a:r>
-          </a:p>
-          <a:p>
-            <a:pPr marR="0" algn="ctr" defTabSz="914400" eaLnBrk="1" fontAlgn="base" latinLnBrk="0" hangingPunct="1">
-              <a:lnSpc>
-                <a:spcPct val="100000"/>
-              </a:lnSpc>
-              <a:spcBef>
-                <a:spcPct val="50000"/>
-              </a:spcBef>
-              <a:spcAft>
-                <a:spcPct val="0"/>
-              </a:spcAft>
-              <a:buClr>
-                <a:srgbClr val="F0AB00"/>
-              </a:buClr>
-              <a:buSzPct val="80000"/>
-              <a:tabLst/>
-            </a:pPr>
-            <a:r>
-              <a:rPr lang="de-DE" sz="1800" kern="0" dirty="0">
-                <a:ea typeface="Arial Unicode MS" pitchFamily="34" charset="-128"/>
-                <a:cs typeface="Arial Unicode MS" pitchFamily="34" charset="-128"/>
-                <a:hlinkClick r:id="rId3"/>
-              </a:rPr>
-              <a:t>https://koopa.ondemand.com/</a:t>
-            </a:r>
-            <a:r>
-              <a:rPr lang="de-DE" sz="1800" b="1" kern="0" dirty="0">
-                <a:ea typeface="Arial Unicode MS" pitchFamily="34" charset="-128"/>
-                <a:cs typeface="Arial Unicode MS" pitchFamily="34" charset="-128"/>
-                <a:hlinkClick r:id="rId3"/>
-              </a:rPr>
-              <a:t>green</a:t>
-            </a:r>
-            <a:r>
-              <a:rPr lang="de-DE" sz="800" b="1" kern="0" dirty="0">
-                <a:ea typeface="Arial Unicode MS" pitchFamily="34" charset="-128"/>
-                <a:cs typeface="Arial Unicode MS" pitchFamily="34" charset="-128"/>
-              </a:rPr>
-              <a:t> </a:t>
-            </a:r>
-          </a:p>
-          <a:p>
-            <a:pPr algn="ctr" defTabSz="914400" fontAlgn="base">
-              <a:spcBef>
-                <a:spcPct val="50000"/>
-              </a:spcBef>
-              <a:spcAft>
-                <a:spcPct val="0"/>
-              </a:spcAft>
-              <a:buClr>
-                <a:srgbClr val="F0AB00"/>
-              </a:buClr>
-              <a:buSzPct val="80000"/>
-            </a:pPr>
-            <a:r>
-              <a:rPr lang="de-DE" sz="1800" kern="0" dirty="0">
-                <a:ea typeface="Arial Unicode MS" pitchFamily="34" charset="-128"/>
-                <a:cs typeface="Arial Unicode MS" pitchFamily="34" charset="-128"/>
-                <a:hlinkClick r:id="rId4"/>
-              </a:rPr>
-              <a:t>https://koopa.ondemand.com/</a:t>
-            </a:r>
-            <a:r>
-              <a:rPr lang="de-DE" sz="1800" b="1" kern="0" dirty="0">
-                <a:ea typeface="Arial Unicode MS" pitchFamily="34" charset="-128"/>
-                <a:cs typeface="Arial Unicode MS" pitchFamily="34" charset="-128"/>
-                <a:hlinkClick r:id="rId4"/>
-              </a:rPr>
-              <a:t>red</a:t>
-            </a:r>
-            <a:r>
-              <a:rPr lang="de-DE" sz="1800" kern="0" dirty="0">
-                <a:ea typeface="Arial Unicode MS" pitchFamily="34" charset="-128"/>
-                <a:cs typeface="Arial Unicode MS" pitchFamily="34" charset="-128"/>
-              </a:rPr>
-              <a:t>  </a:t>
-            </a:r>
-          </a:p>
-          <a:p>
-            <a:pPr algn="ctr" defTabSz="914400" fontAlgn="base">
-              <a:spcBef>
-                <a:spcPct val="50000"/>
-              </a:spcBef>
-              <a:spcAft>
-                <a:spcPct val="0"/>
-              </a:spcAft>
-              <a:buClr>
-                <a:srgbClr val="F0AB00"/>
-              </a:buClr>
-              <a:buSzPct val="80000"/>
-            </a:pPr>
-            <a:r>
-              <a:rPr lang="de-DE" sz="1800" kern="0" dirty="0">
-                <a:ea typeface="Arial Unicode MS" pitchFamily="34" charset="-128"/>
-                <a:cs typeface="Arial Unicode MS" pitchFamily="34" charset="-128"/>
-              </a:rPr>
-              <a:t>35.205.166.164</a:t>
-            </a:r>
-            <a:endParaRPr kumimoji="0" lang="de-DE" sz="1800" b="0" i="0" u="none" strike="noStrike" kern="0" cap="none" spc="0" normalizeH="0" baseline="0" noProof="0" dirty="0">
-              <a:ln>
-                <a:noFill/>
-              </a:ln>
-              <a:effectLst/>
-              <a:uLnTx/>
-              <a:uFillTx/>
-              <a:ea typeface="Arial Unicode MS" pitchFamily="34" charset="-128"/>
-              <a:cs typeface="Arial Unicode MS" pitchFamily="34" charset="-128"/>
-            </a:endParaRPr>
-          </a:p>
-        </p:txBody>
-      </p:sp>
-      <p:sp>
-        <p:nvSpPr>
-          <p:cNvPr id="12" name="Cloud 11">
-            <a:extLst>
-              <a:ext uri="{FF2B5EF4-FFF2-40B4-BE49-F238E27FC236}">
-                <a16:creationId xmlns:a16="http://schemas.microsoft.com/office/drawing/2014/main" id="{1743D8BF-8F3B-443E-ABD5-8A254B403503}"/>
-              </a:ext>
-            </a:extLst>
-          </p:cNvPr>
-          <p:cNvSpPr/>
-          <p:nvPr/>
-        </p:nvSpPr>
-        <p:spPr bwMode="gray">
-          <a:xfrm>
-            <a:off x="320690" y="2760382"/>
-            <a:ext cx="2249770" cy="1106406"/>
-          </a:xfrm>
-          <a:prstGeom prst="cloud">
-            <a:avLst/>
-          </a:prstGeom>
-          <a:ln>
-            <a:headEnd/>
-            <a:tailEnd/>
-          </a:ln>
-        </p:spPr>
-        <p:style>
-          <a:lnRef idx="2">
-            <a:schemeClr val="accent1">
-              <a:shade val="50000"/>
-            </a:schemeClr>
-          </a:lnRef>
-          <a:fillRef idx="1">
-            <a:schemeClr val="accent1"/>
-          </a:fillRef>
-          <a:effectRef idx="0">
-            <a:schemeClr val="accent1"/>
-          </a:effectRef>
-          <a:fontRef idx="minor">
-            <a:schemeClr val="lt1"/>
-          </a:fontRef>
-        </p:style>
-        <p:txBody>
-          <a:bodyPr lIns="90000" tIns="72000" rIns="90000" bIns="72000" rtlCol="0" anchor="ctr"/>
-          <a:lstStyle/>
-          <a:p>
-            <a:pPr marR="0" algn="ctr" defTabSz="914400" eaLnBrk="1" fontAlgn="base" latinLnBrk="0" hangingPunct="1">
-              <a:lnSpc>
-                <a:spcPct val="100000"/>
-              </a:lnSpc>
-              <a:spcBef>
-                <a:spcPct val="50000"/>
-              </a:spcBef>
-              <a:spcAft>
-                <a:spcPct val="0"/>
-              </a:spcAft>
-              <a:buClr>
-                <a:srgbClr val="F0AB00"/>
-              </a:buClr>
-              <a:buSzPct val="80000"/>
-              <a:tabLst/>
-            </a:pPr>
-            <a:endParaRPr kumimoji="0" lang="en-US" sz="1800" b="0" i="0" u="none" strike="noStrike" kern="0" cap="none" spc="0" normalizeH="0" baseline="0" noProof="0" dirty="0" err="1">
-              <a:ln>
-                <a:noFill/>
-              </a:ln>
-              <a:effectLst/>
-              <a:uLnTx/>
-              <a:uFillTx/>
-              <a:ea typeface="Arial Unicode MS" pitchFamily="34" charset="-128"/>
-              <a:cs typeface="Arial Unicode MS" pitchFamily="34" charset="-128"/>
-            </a:endParaRPr>
-          </a:p>
-        </p:txBody>
-      </p:sp>
-      <p:pic>
-        <p:nvPicPr>
-          <p:cNvPr id="13" name="Graphic 12" descr="User">
-            <a:extLst>
-              <a:ext uri="{FF2B5EF4-FFF2-40B4-BE49-F238E27FC236}">
-                <a16:creationId xmlns:a16="http://schemas.microsoft.com/office/drawing/2014/main" id="{59D580DD-E40F-4993-B360-B0AD4EB046D0}"/>
-              </a:ext>
-            </a:extLst>
-          </p:cNvPr>
-          <p:cNvPicPr>
-            <a:picLocks noChangeAspect="1"/>
-          </p:cNvPicPr>
-          <p:nvPr/>
-        </p:nvPicPr>
-        <p:blipFill>
-          <a:blip r:embed="rId5">
-            <a:extLst>
-              <a:ext uri="{96DAC541-7B7A-43D3-8B79-37D633B846F1}">
-                <asvg:svgBlip xmlns:asvg="http://schemas.microsoft.com/office/drawing/2016/SVG/main" r:embed="rId6"/>
-              </a:ext>
-            </a:extLst>
-          </a:blip>
-          <a:stretch>
-            <a:fillRect/>
-          </a:stretch>
-        </p:blipFill>
-        <p:spPr>
-          <a:xfrm>
-            <a:off x="986764" y="2787861"/>
-            <a:ext cx="914400" cy="914400"/>
-          </a:xfrm>
-          <a:prstGeom prst="rect">
-            <a:avLst/>
-          </a:prstGeom>
-        </p:spPr>
-      </p:pic>
-      <p:cxnSp>
-        <p:nvCxnSpPr>
-          <p:cNvPr id="33" name="Straight Connector 32">
-            <a:extLst>
-              <a:ext uri="{FF2B5EF4-FFF2-40B4-BE49-F238E27FC236}">
-                <a16:creationId xmlns:a16="http://schemas.microsoft.com/office/drawing/2014/main" id="{93CFC0E6-4B2E-4A4A-8320-32CEDFC1F8AC}"/>
-              </a:ext>
-            </a:extLst>
-          </p:cNvPr>
-          <p:cNvCxnSpPr>
-            <a:cxnSpLocks/>
-          </p:cNvCxnSpPr>
-          <p:nvPr/>
-        </p:nvCxnSpPr>
-        <p:spPr>
-          <a:xfrm>
-            <a:off x="1818290" y="3181110"/>
-            <a:ext cx="1381838" cy="6351"/>
-          </a:xfrm>
-          <a:prstGeom prst="line">
-            <a:avLst/>
-          </a:prstGeom>
-          <a:ln w="57150">
-            <a:solidFill>
-              <a:schemeClr val="accent4">
-                <a:lumMod val="60000"/>
-                <a:lumOff val="40000"/>
-              </a:schemeClr>
-            </a:solidFill>
-            <a:headEnd type="none" w="med" len="med"/>
-            <a:tailEnd type="triangle" w="med" len="med"/>
-          </a:ln>
-        </p:spPr>
-        <p:style>
-          <a:lnRef idx="1">
-            <a:schemeClr val="accent1"/>
-          </a:lnRef>
-          <a:fillRef idx="0">
-            <a:schemeClr val="accent1"/>
-          </a:fillRef>
-          <a:effectRef idx="0">
-            <a:schemeClr val="accent1"/>
-          </a:effectRef>
-          <a:fontRef idx="minor">
-            <a:schemeClr val="tx1"/>
-          </a:fontRef>
-        </p:style>
-      </p:cxnSp>
-      <p:grpSp>
-        <p:nvGrpSpPr>
-          <p:cNvPr id="45" name="Group 44">
-            <a:extLst>
-              <a:ext uri="{FF2B5EF4-FFF2-40B4-BE49-F238E27FC236}">
-                <a16:creationId xmlns:a16="http://schemas.microsoft.com/office/drawing/2014/main" id="{D9E39F9B-D558-4B40-B770-65B1E36C58AE}"/>
-              </a:ext>
-            </a:extLst>
-          </p:cNvPr>
-          <p:cNvGrpSpPr/>
-          <p:nvPr/>
-        </p:nvGrpSpPr>
-        <p:grpSpPr>
-          <a:xfrm>
-            <a:off x="7772400" y="4304593"/>
-            <a:ext cx="3573677" cy="1778068"/>
-            <a:chOff x="7814563" y="2523339"/>
-            <a:chExt cx="3266338" cy="1778068"/>
-          </a:xfrm>
-        </p:grpSpPr>
-        <p:sp>
-          <p:nvSpPr>
-            <p:cNvPr id="46" name="Rectangle 45">
-              <a:extLst>
-                <a:ext uri="{FF2B5EF4-FFF2-40B4-BE49-F238E27FC236}">
-                  <a16:creationId xmlns:a16="http://schemas.microsoft.com/office/drawing/2014/main" id="{CEEAF3AB-2B14-422E-BE74-A813BE5ADFF9}"/>
-                </a:ext>
-              </a:extLst>
-            </p:cNvPr>
-            <p:cNvSpPr/>
-            <p:nvPr/>
-          </p:nvSpPr>
-          <p:spPr bwMode="gray">
-            <a:xfrm>
-              <a:off x="7814563" y="3016033"/>
-              <a:ext cx="1117498" cy="795956"/>
-            </a:xfrm>
-            <a:prstGeom prst="rect">
-              <a:avLst/>
-            </a:prstGeom>
-            <a:ln>
-              <a:headEnd/>
-              <a:tailEnd/>
-            </a:ln>
-          </p:spPr>
-          <p:style>
-            <a:lnRef idx="2">
-              <a:schemeClr val="accent5">
-                <a:shade val="50000"/>
-              </a:schemeClr>
-            </a:lnRef>
-            <a:fillRef idx="1">
-              <a:schemeClr val="accent5"/>
-            </a:fillRef>
-            <a:effectRef idx="0">
-              <a:schemeClr val="accent5"/>
-            </a:effectRef>
-            <a:fontRef idx="minor">
-              <a:schemeClr val="lt1"/>
-            </a:fontRef>
-          </p:style>
-          <p:txBody>
-            <a:bodyPr lIns="90000" tIns="72000" rIns="90000" bIns="72000" rtlCol="0" anchor="ctr"/>
-            <a:lstStyle/>
-            <a:p>
-              <a:pPr marR="0" algn="ctr" defTabSz="914400" eaLnBrk="1" fontAlgn="base" latinLnBrk="0" hangingPunct="1">
-                <a:lnSpc>
-                  <a:spcPct val="100000"/>
-                </a:lnSpc>
-                <a:spcBef>
-                  <a:spcPct val="50000"/>
-                </a:spcBef>
-                <a:spcAft>
-                  <a:spcPct val="0"/>
-                </a:spcAft>
-                <a:buClr>
-                  <a:srgbClr val="F0AB00"/>
-                </a:buClr>
-                <a:buSzPct val="80000"/>
-                <a:tabLst/>
-              </a:pPr>
-              <a:r>
-                <a:rPr lang="de-DE" sz="1800" b="1" kern="0" dirty="0">
-                  <a:ea typeface="Arial Unicode MS" pitchFamily="34" charset="-128"/>
-                  <a:cs typeface="Arial Unicode MS" pitchFamily="34" charset="-128"/>
-                </a:rPr>
-                <a:t>Service</a:t>
-              </a:r>
-            </a:p>
-            <a:p>
-              <a:pPr marR="0" algn="ctr" defTabSz="914400" eaLnBrk="1" fontAlgn="base" latinLnBrk="0" hangingPunct="1">
-                <a:lnSpc>
-                  <a:spcPct val="100000"/>
-                </a:lnSpc>
-                <a:spcBef>
-                  <a:spcPct val="50000"/>
-                </a:spcBef>
-                <a:spcAft>
-                  <a:spcPct val="0"/>
-                </a:spcAft>
-                <a:buClr>
-                  <a:srgbClr val="F0AB00"/>
-                </a:buClr>
-                <a:buSzPct val="80000"/>
-                <a:tabLst/>
-              </a:pPr>
-              <a:r>
-                <a:rPr kumimoji="0" lang="de-DE" sz="1800" b="0" i="0" u="none" strike="noStrike" kern="0" cap="none" spc="0" normalizeH="0" baseline="0" noProof="0" dirty="0">
-                  <a:ln>
-                    <a:noFill/>
-                  </a:ln>
-                  <a:effectLst/>
-                  <a:uLnTx/>
-                  <a:uFillTx/>
-                  <a:ea typeface="Arial Unicode MS" pitchFamily="34" charset="-128"/>
-                  <a:cs typeface="Arial Unicode MS" pitchFamily="34" charset="-128"/>
-                </a:rPr>
-                <a:t>Port </a:t>
-              </a:r>
-              <a:r>
-                <a:rPr lang="de-DE" sz="1800" kern="0" dirty="0">
-                  <a:ea typeface="Arial Unicode MS" pitchFamily="34" charset="-128"/>
-                  <a:cs typeface="Arial Unicode MS" pitchFamily="34" charset="-128"/>
-                </a:rPr>
-                <a:t>8081</a:t>
-              </a:r>
-              <a:endParaRPr kumimoji="0" lang="de-DE" sz="1800" b="0" i="0" u="none" strike="noStrike" kern="0" cap="none" spc="0" normalizeH="0" baseline="0" noProof="0" dirty="0">
-                <a:ln>
-                  <a:noFill/>
-                </a:ln>
-                <a:effectLst/>
-                <a:uLnTx/>
-                <a:uFillTx/>
-                <a:ea typeface="Arial Unicode MS" pitchFamily="34" charset="-128"/>
-                <a:cs typeface="Arial Unicode MS" pitchFamily="34" charset="-128"/>
-              </a:endParaRPr>
-            </a:p>
-          </p:txBody>
-        </p:sp>
-        <p:sp>
-          <p:nvSpPr>
-            <p:cNvPr id="47" name="Rectangle 46">
-              <a:extLst>
-                <a:ext uri="{FF2B5EF4-FFF2-40B4-BE49-F238E27FC236}">
-                  <a16:creationId xmlns:a16="http://schemas.microsoft.com/office/drawing/2014/main" id="{4E86DE12-4246-4DA8-BEB6-AACA302A24EC}"/>
-                </a:ext>
-              </a:extLst>
-            </p:cNvPr>
-            <p:cNvSpPr/>
-            <p:nvPr/>
-          </p:nvSpPr>
-          <p:spPr bwMode="gray">
-            <a:xfrm>
-              <a:off x="9963403" y="2523339"/>
-              <a:ext cx="1117498" cy="795956"/>
-            </a:xfrm>
-            <a:prstGeom prst="rect">
-              <a:avLst/>
-            </a:prstGeom>
-            <a:ln>
-              <a:headEnd/>
-              <a:tailEnd/>
-            </a:ln>
-          </p:spPr>
-          <p:style>
-            <a:lnRef idx="2">
-              <a:schemeClr val="accent5">
-                <a:shade val="50000"/>
-              </a:schemeClr>
-            </a:lnRef>
-            <a:fillRef idx="1">
-              <a:schemeClr val="accent5"/>
-            </a:fillRef>
-            <a:effectRef idx="0">
-              <a:schemeClr val="accent5"/>
-            </a:effectRef>
-            <a:fontRef idx="minor">
-              <a:schemeClr val="lt1"/>
-            </a:fontRef>
-          </p:style>
-          <p:txBody>
-            <a:bodyPr lIns="90000" tIns="72000" rIns="90000" bIns="72000" rtlCol="0" anchor="ctr"/>
-            <a:lstStyle/>
-            <a:p>
-              <a:pPr algn="ctr" defTabSz="914400" fontAlgn="base">
-                <a:spcBef>
-                  <a:spcPct val="50000"/>
-                </a:spcBef>
-                <a:spcAft>
-                  <a:spcPct val="0"/>
-                </a:spcAft>
-                <a:buClr>
-                  <a:srgbClr val="F0AB00"/>
-                </a:buClr>
-                <a:buSzPct val="80000"/>
-              </a:pPr>
-              <a:r>
-                <a:rPr lang="de-DE" sz="1800" b="1" kern="0" dirty="0" err="1">
-                  <a:ea typeface="Arial Unicode MS" pitchFamily="34" charset="-128"/>
-                  <a:cs typeface="Arial Unicode MS" pitchFamily="34" charset="-128"/>
-                </a:rPr>
-                <a:t>Pod</a:t>
-              </a:r>
-              <a:endParaRPr lang="de-DE" sz="1800" b="1" kern="0" dirty="0">
-                <a:ea typeface="Arial Unicode MS" pitchFamily="34" charset="-128"/>
-                <a:cs typeface="Arial Unicode MS" pitchFamily="34" charset="-128"/>
-              </a:endParaRPr>
-            </a:p>
-            <a:p>
-              <a:pPr algn="ctr" defTabSz="914400" fontAlgn="base">
-                <a:spcBef>
-                  <a:spcPct val="50000"/>
-                </a:spcBef>
-                <a:spcAft>
-                  <a:spcPct val="0"/>
-                </a:spcAft>
-                <a:buClr>
-                  <a:srgbClr val="F0AB00"/>
-                </a:buClr>
-                <a:buSzPct val="80000"/>
-              </a:pPr>
-              <a:r>
-                <a:rPr lang="de-DE" sz="1800" kern="0" dirty="0">
-                  <a:ea typeface="Arial Unicode MS" pitchFamily="34" charset="-128"/>
-                  <a:cs typeface="Arial Unicode MS" pitchFamily="34" charset="-128"/>
-                </a:rPr>
-                <a:t>Port 80</a:t>
-              </a:r>
-            </a:p>
-          </p:txBody>
-        </p:sp>
-        <p:sp>
-          <p:nvSpPr>
-            <p:cNvPr id="48" name="Rectangle 47">
-              <a:extLst>
-                <a:ext uri="{FF2B5EF4-FFF2-40B4-BE49-F238E27FC236}">
-                  <a16:creationId xmlns:a16="http://schemas.microsoft.com/office/drawing/2014/main" id="{4122934F-5543-403B-8578-B738A0FA9A96}"/>
-                </a:ext>
-              </a:extLst>
-            </p:cNvPr>
-            <p:cNvSpPr/>
-            <p:nvPr/>
-          </p:nvSpPr>
-          <p:spPr bwMode="gray">
-            <a:xfrm>
-              <a:off x="9963403" y="3505451"/>
-              <a:ext cx="1117498" cy="795956"/>
-            </a:xfrm>
-            <a:prstGeom prst="rect">
-              <a:avLst/>
-            </a:prstGeom>
-            <a:ln>
-              <a:headEnd/>
-              <a:tailEnd/>
-            </a:ln>
-          </p:spPr>
-          <p:style>
-            <a:lnRef idx="2">
-              <a:schemeClr val="accent5">
-                <a:shade val="50000"/>
-              </a:schemeClr>
-            </a:lnRef>
-            <a:fillRef idx="1">
-              <a:schemeClr val="accent5"/>
-            </a:fillRef>
-            <a:effectRef idx="0">
-              <a:schemeClr val="accent5"/>
-            </a:effectRef>
-            <a:fontRef idx="minor">
-              <a:schemeClr val="lt1"/>
-            </a:fontRef>
-          </p:style>
-          <p:txBody>
-            <a:bodyPr lIns="90000" tIns="72000" rIns="90000" bIns="72000" rtlCol="0" anchor="ctr"/>
-            <a:lstStyle/>
-            <a:p>
-              <a:pPr algn="ctr" defTabSz="914400" fontAlgn="base">
-                <a:spcBef>
-                  <a:spcPct val="50000"/>
-                </a:spcBef>
-                <a:spcAft>
-                  <a:spcPct val="0"/>
-                </a:spcAft>
-                <a:buClr>
-                  <a:srgbClr val="F0AB00"/>
-                </a:buClr>
-                <a:buSzPct val="80000"/>
-              </a:pPr>
-              <a:r>
-                <a:rPr lang="de-DE" sz="1800" b="1" kern="0" dirty="0" err="1">
-                  <a:ea typeface="Arial Unicode MS" pitchFamily="34" charset="-128"/>
-                  <a:cs typeface="Arial Unicode MS" pitchFamily="34" charset="-128"/>
-                </a:rPr>
-                <a:t>Pod</a:t>
-              </a:r>
-              <a:endParaRPr lang="de-DE" sz="1800" b="1" kern="0" dirty="0">
-                <a:ea typeface="Arial Unicode MS" pitchFamily="34" charset="-128"/>
-                <a:cs typeface="Arial Unicode MS" pitchFamily="34" charset="-128"/>
-              </a:endParaRPr>
-            </a:p>
-            <a:p>
-              <a:pPr algn="ctr" defTabSz="914400" fontAlgn="base">
-                <a:spcBef>
-                  <a:spcPct val="50000"/>
-                </a:spcBef>
-                <a:spcAft>
-                  <a:spcPct val="0"/>
-                </a:spcAft>
-                <a:buClr>
-                  <a:srgbClr val="F0AB00"/>
-                </a:buClr>
-                <a:buSzPct val="80000"/>
-              </a:pPr>
-              <a:r>
-                <a:rPr lang="de-DE" sz="1800" kern="0" dirty="0">
-                  <a:ea typeface="Arial Unicode MS" pitchFamily="34" charset="-128"/>
-                  <a:cs typeface="Arial Unicode MS" pitchFamily="34" charset="-128"/>
-                </a:rPr>
-                <a:t>Port 80</a:t>
-              </a:r>
-            </a:p>
-          </p:txBody>
-        </p:sp>
-        <p:cxnSp>
-          <p:nvCxnSpPr>
-            <p:cNvPr id="49" name="Connector: Elbow 48">
-              <a:extLst>
-                <a:ext uri="{FF2B5EF4-FFF2-40B4-BE49-F238E27FC236}">
-                  <a16:creationId xmlns:a16="http://schemas.microsoft.com/office/drawing/2014/main" id="{B359FC99-1C4A-4619-A466-64CCFC7A7B3A}"/>
-                </a:ext>
-              </a:extLst>
-            </p:cNvPr>
-            <p:cNvCxnSpPr>
-              <a:cxnSpLocks/>
-              <a:stCxn id="46" idx="3"/>
-              <a:endCxn id="47" idx="1"/>
-            </p:cNvCxnSpPr>
-            <p:nvPr/>
-          </p:nvCxnSpPr>
-          <p:spPr>
-            <a:xfrm flipV="1">
-              <a:off x="8932061" y="2921317"/>
-              <a:ext cx="1031342" cy="492694"/>
-            </a:xfrm>
-            <a:prstGeom prst="bentConnector3">
-              <a:avLst/>
-            </a:prstGeom>
-            <a:ln w="38100">
-              <a:headEnd type="none" w="med" len="med"/>
-              <a:tailEnd type="none" w="med" len="med"/>
-            </a:ln>
-          </p:spPr>
-          <p:style>
-            <a:lnRef idx="2">
-              <a:schemeClr val="accent5">
-                <a:shade val="50000"/>
-              </a:schemeClr>
-            </a:lnRef>
-            <a:fillRef idx="1">
-              <a:schemeClr val="accent5"/>
-            </a:fillRef>
-            <a:effectRef idx="0">
-              <a:schemeClr val="accent5"/>
-            </a:effectRef>
-            <a:fontRef idx="minor">
-              <a:schemeClr val="lt1"/>
-            </a:fontRef>
-          </p:style>
-        </p:cxnSp>
-        <p:cxnSp>
-          <p:nvCxnSpPr>
-            <p:cNvPr id="50" name="Connector: Elbow 49">
-              <a:extLst>
-                <a:ext uri="{FF2B5EF4-FFF2-40B4-BE49-F238E27FC236}">
-                  <a16:creationId xmlns:a16="http://schemas.microsoft.com/office/drawing/2014/main" id="{E03C267F-AC82-4CAE-92DE-678DD4DF9F43}"/>
-                </a:ext>
-              </a:extLst>
-            </p:cNvPr>
-            <p:cNvCxnSpPr>
-              <a:cxnSpLocks/>
-              <a:stCxn id="46" idx="3"/>
-              <a:endCxn id="48" idx="1"/>
-            </p:cNvCxnSpPr>
-            <p:nvPr/>
-          </p:nvCxnSpPr>
-          <p:spPr>
-            <a:xfrm>
-              <a:off x="8932061" y="3414011"/>
-              <a:ext cx="1031342" cy="489418"/>
-            </a:xfrm>
-            <a:prstGeom prst="bentConnector3">
-              <a:avLst/>
-            </a:prstGeom>
-            <a:ln w="38100">
-              <a:headEnd type="none" w="med" len="med"/>
-              <a:tailEnd type="none" w="med" len="med"/>
-            </a:ln>
-          </p:spPr>
-          <p:style>
-            <a:lnRef idx="2">
-              <a:schemeClr val="accent5">
-                <a:shade val="50000"/>
-              </a:schemeClr>
-            </a:lnRef>
-            <a:fillRef idx="1">
-              <a:schemeClr val="accent5"/>
-            </a:fillRef>
-            <a:effectRef idx="0">
-              <a:schemeClr val="accent5"/>
-            </a:effectRef>
-            <a:fontRef idx="minor">
-              <a:schemeClr val="lt1"/>
-            </a:fontRef>
-          </p:style>
-        </p:cxnSp>
-      </p:grpSp>
-      <p:cxnSp>
-        <p:nvCxnSpPr>
-          <p:cNvPr id="56" name="Straight Connector 55">
-            <a:extLst>
-              <a:ext uri="{FF2B5EF4-FFF2-40B4-BE49-F238E27FC236}">
-                <a16:creationId xmlns:a16="http://schemas.microsoft.com/office/drawing/2014/main" id="{0353F190-1BB4-4019-BD52-08E340747687}"/>
-              </a:ext>
-            </a:extLst>
-          </p:cNvPr>
-          <p:cNvCxnSpPr>
-            <a:cxnSpLocks/>
-          </p:cNvCxnSpPr>
-          <p:nvPr/>
-        </p:nvCxnSpPr>
-        <p:spPr>
-          <a:xfrm>
-            <a:off x="1818290" y="3387160"/>
-            <a:ext cx="1381838" cy="0"/>
-          </a:xfrm>
-          <a:prstGeom prst="line">
-            <a:avLst/>
-          </a:prstGeom>
-          <a:ln w="57150">
-            <a:solidFill>
-              <a:schemeClr val="accent5"/>
-            </a:solidFill>
-            <a:headEnd type="none" w="med" len="med"/>
-            <a:tailEnd type="triangle" w="med" len="med"/>
-          </a:ln>
-        </p:spPr>
-        <p:style>
-          <a:lnRef idx="1">
-            <a:schemeClr val="accent1"/>
-          </a:lnRef>
-          <a:fillRef idx="0">
-            <a:schemeClr val="accent1"/>
-          </a:fillRef>
-          <a:effectRef idx="0">
-            <a:schemeClr val="accent1"/>
-          </a:effectRef>
-          <a:fontRef idx="minor">
-            <a:schemeClr val="tx1"/>
-          </a:fontRef>
-        </p:style>
-      </p:cxnSp>
-      <p:sp>
-        <p:nvSpPr>
-          <p:cNvPr id="61" name="Speech Bubble: Rectangle 60">
-            <a:extLst>
-              <a:ext uri="{FF2B5EF4-FFF2-40B4-BE49-F238E27FC236}">
-                <a16:creationId xmlns:a16="http://schemas.microsoft.com/office/drawing/2014/main" id="{56360F17-096E-4C95-841B-4E6B27202A13}"/>
-              </a:ext>
-            </a:extLst>
-          </p:cNvPr>
-          <p:cNvSpPr/>
-          <p:nvPr/>
-        </p:nvSpPr>
-        <p:spPr bwMode="gray">
-          <a:xfrm>
-            <a:off x="849098" y="5204116"/>
-            <a:ext cx="3649701" cy="1014983"/>
-          </a:xfrm>
-          <a:prstGeom prst="wedgeRectCallout">
-            <a:avLst>
-              <a:gd name="adj1" fmla="val 26705"/>
-              <a:gd name="adj2" fmla="val -162849"/>
-            </a:avLst>
-          </a:prstGeom>
-          <a:ln>
-            <a:headEnd/>
-            <a:tailEnd/>
-          </a:ln>
-        </p:spPr>
-        <p:style>
-          <a:lnRef idx="2">
-            <a:schemeClr val="accent5"/>
-          </a:lnRef>
-          <a:fillRef idx="1">
-            <a:schemeClr val="lt1"/>
-          </a:fillRef>
-          <a:effectRef idx="0">
-            <a:schemeClr val="accent5"/>
-          </a:effectRef>
-          <a:fontRef idx="minor">
-            <a:schemeClr val="dk1"/>
-          </a:fontRef>
-        </p:style>
-        <p:txBody>
-          <a:bodyPr lIns="90000" tIns="72000" rIns="90000" bIns="72000" rtlCol="0" anchor="ctr"/>
-          <a:lstStyle/>
-          <a:p>
-            <a:pPr marR="0" algn="ctr" defTabSz="914400" eaLnBrk="1" fontAlgn="base" latinLnBrk="0" hangingPunct="1">
-              <a:lnSpc>
-                <a:spcPct val="100000"/>
-              </a:lnSpc>
-              <a:spcBef>
-                <a:spcPct val="50000"/>
-              </a:spcBef>
-              <a:spcAft>
-                <a:spcPct val="0"/>
-              </a:spcAft>
-              <a:buClr>
-                <a:srgbClr val="F0AB00"/>
-              </a:buClr>
-              <a:buSzPct val="80000"/>
-              <a:tabLst/>
-            </a:pPr>
-            <a:r>
-              <a:rPr kumimoji="0" lang="en-US" sz="1800" b="0" i="0" u="none" strike="noStrike" kern="0" cap="none" spc="0" normalizeH="0" baseline="0" noProof="0" dirty="0">
-                <a:ln>
-                  <a:noFill/>
-                </a:ln>
-                <a:effectLst/>
-                <a:uLnTx/>
-                <a:uFillTx/>
-                <a:ea typeface="Arial Unicode MS" pitchFamily="34" charset="-128"/>
-                <a:cs typeface="Arial Unicode MS" pitchFamily="34" charset="-128"/>
-              </a:rPr>
-              <a:t>Users access different backends via different suffixes: </a:t>
-            </a:r>
-            <a:r>
-              <a:rPr kumimoji="0" lang="en-US" sz="1800" b="1" i="0" u="sng" strike="noStrike" kern="0" cap="none" spc="0" normalizeH="0" baseline="0" noProof="0" dirty="0">
-                <a:ln>
-                  <a:noFill/>
-                </a:ln>
-                <a:solidFill>
-                  <a:schemeClr val="accent3"/>
-                </a:solidFill>
-                <a:effectLst/>
-                <a:uLnTx/>
-                <a:uFillTx/>
-                <a:ea typeface="Arial Unicode MS" pitchFamily="34" charset="-128"/>
-                <a:cs typeface="Arial Unicode MS" pitchFamily="34" charset="-128"/>
-              </a:rPr>
-              <a:t>/green </a:t>
-            </a:r>
-            <a:r>
-              <a:rPr kumimoji="0" lang="en-US" sz="1800" b="0" i="0" u="none" strike="noStrike" kern="0" cap="none" spc="0" normalizeH="0" baseline="0" noProof="0" dirty="0">
-                <a:ln>
-                  <a:noFill/>
-                </a:ln>
-                <a:effectLst/>
-                <a:uLnTx/>
-                <a:uFillTx/>
-                <a:ea typeface="Arial Unicode MS" pitchFamily="34" charset="-128"/>
-                <a:cs typeface="Arial Unicode MS" pitchFamily="34" charset="-128"/>
-              </a:rPr>
-              <a:t>or </a:t>
-            </a:r>
-            <a:r>
-              <a:rPr lang="en-US" sz="1800" b="1" u="sng" kern="0" dirty="0">
-                <a:solidFill>
-                  <a:schemeClr val="accent3"/>
-                </a:solidFill>
-                <a:ea typeface="Arial Unicode MS" pitchFamily="34" charset="-128"/>
-              </a:rPr>
-              <a:t>/red</a:t>
-            </a:r>
-          </a:p>
-        </p:txBody>
-      </p:sp>
-      <p:cxnSp>
-        <p:nvCxnSpPr>
-          <p:cNvPr id="69" name="Connector: Elbow 68">
-            <a:extLst>
-              <a:ext uri="{FF2B5EF4-FFF2-40B4-BE49-F238E27FC236}">
-                <a16:creationId xmlns:a16="http://schemas.microsoft.com/office/drawing/2014/main" id="{DE6C42AB-2708-4B3C-A9D4-CACA17320CE4}"/>
-              </a:ext>
-            </a:extLst>
-          </p:cNvPr>
-          <p:cNvCxnSpPr>
-            <a:cxnSpLocks/>
-            <a:stCxn id="3" idx="1"/>
-          </p:cNvCxnSpPr>
-          <p:nvPr/>
-        </p:nvCxnSpPr>
-        <p:spPr>
-          <a:xfrm rot="10800000" flipV="1">
-            <a:off x="7275708" y="3062547"/>
-            <a:ext cx="496693" cy="244709"/>
-          </a:xfrm>
-          <a:prstGeom prst="bentConnector3">
-            <a:avLst>
-              <a:gd name="adj1" fmla="val 50000"/>
-            </a:avLst>
-          </a:prstGeom>
-          <a:ln w="57150">
-            <a:solidFill>
-              <a:schemeClr val="accent4">
-                <a:lumMod val="60000"/>
-                <a:lumOff val="40000"/>
-              </a:schemeClr>
-            </a:solidFill>
-            <a:headEnd type="none" w="med" len="med"/>
-            <a:tailEnd type="none" w="med" len="med"/>
-          </a:ln>
-        </p:spPr>
-        <p:style>
-          <a:lnRef idx="1">
-            <a:schemeClr val="accent1"/>
-          </a:lnRef>
-          <a:fillRef idx="0">
-            <a:schemeClr val="accent1"/>
-          </a:fillRef>
-          <a:effectRef idx="0">
-            <a:schemeClr val="accent1"/>
-          </a:effectRef>
-          <a:fontRef idx="minor">
-            <a:schemeClr val="tx1"/>
-          </a:fontRef>
-        </p:style>
-      </p:cxnSp>
-      <p:cxnSp>
-        <p:nvCxnSpPr>
-          <p:cNvPr id="73" name="Connector: Elbow 72">
-            <a:extLst>
-              <a:ext uri="{FF2B5EF4-FFF2-40B4-BE49-F238E27FC236}">
-                <a16:creationId xmlns:a16="http://schemas.microsoft.com/office/drawing/2014/main" id="{0F105FA0-FC20-48F8-8370-34E3EEB66099}"/>
-              </a:ext>
-            </a:extLst>
-          </p:cNvPr>
-          <p:cNvCxnSpPr>
-            <a:cxnSpLocks/>
-            <a:stCxn id="9" idx="3"/>
-            <a:endCxn id="46" idx="1"/>
-          </p:cNvCxnSpPr>
-          <p:nvPr/>
-        </p:nvCxnSpPr>
-        <p:spPr>
-          <a:xfrm>
-            <a:off x="7252141" y="3313585"/>
-            <a:ext cx="520259" cy="1881680"/>
-          </a:xfrm>
-          <a:prstGeom prst="bentConnector3">
-            <a:avLst>
-              <a:gd name="adj1" fmla="val 21717"/>
-            </a:avLst>
-          </a:prstGeom>
-          <a:ln w="38100">
-            <a:headEnd type="none" w="med" len="med"/>
-            <a:tailEnd type="none" w="med" len="med"/>
-          </a:ln>
-        </p:spPr>
-        <p:style>
-          <a:lnRef idx="2">
-            <a:schemeClr val="accent5">
-              <a:shade val="50000"/>
-            </a:schemeClr>
-          </a:lnRef>
-          <a:fillRef idx="1">
-            <a:schemeClr val="accent5"/>
-          </a:fillRef>
-          <a:effectRef idx="0">
-            <a:schemeClr val="accent5"/>
-          </a:effectRef>
-          <a:fontRef idx="minor">
-            <a:schemeClr val="lt1"/>
-          </a:fontRef>
-        </p:style>
-      </p:cxnSp>
-      <p:pic>
-        <p:nvPicPr>
-          <p:cNvPr id="63" name="Picture 2" descr="https://vignette.wikia.nocookie.net/nintendo/images/8/83/KoopaNSMB.png/revision/latest?cb=20110724132501&amp;path-prefix=en">
-            <a:extLst>
-              <a:ext uri="{FF2B5EF4-FFF2-40B4-BE49-F238E27FC236}">
-                <a16:creationId xmlns:a16="http://schemas.microsoft.com/office/drawing/2014/main" id="{146A0740-6CF7-4453-940E-E529058DAC5C}"/>
-              </a:ext>
-            </a:extLst>
-          </p:cNvPr>
-          <p:cNvPicPr>
-            <a:picLocks noChangeAspect="1" noChangeArrowheads="1"/>
-          </p:cNvPicPr>
-          <p:nvPr/>
-        </p:nvPicPr>
-        <p:blipFill>
-          <a:blip r:embed="rId7">
-            <a:extLst>
-              <a:ext uri="{28A0092B-C50C-407E-A947-70E740481C1C}">
-                <a14:useLocalDpi xmlns:a14="http://schemas.microsoft.com/office/drawing/2010/main" val="0"/>
-              </a:ext>
-            </a:extLst>
-          </a:blip>
-          <a:srcRect/>
-          <a:stretch>
-            <a:fillRect/>
-          </a:stretch>
-        </p:blipFill>
-        <p:spPr bwMode="auto">
-          <a:xfrm>
-            <a:off x="6601051" y="1908914"/>
-            <a:ext cx="519950" cy="827324"/>
-          </a:xfrm>
-          <a:prstGeom prst="rect">
-            <a:avLst/>
-          </a:prstGeom>
-          <a:noFill/>
-          <a:extLst>
-            <a:ext uri="{909E8E84-426E-40DD-AFC4-6F175D3DCCD1}">
-              <a14:hiddenFill xmlns:a14="http://schemas.microsoft.com/office/drawing/2010/main">
-                <a:solidFill>
-                  <a:srgbClr val="FFFFFF"/>
-                </a:solidFill>
-              </a14:hiddenFill>
-            </a:ext>
-          </a:extLst>
-        </p:spPr>
-      </p:pic>
-      <p:pic>
-        <p:nvPicPr>
-          <p:cNvPr id="64" name="Picture 10" descr="Image result for nintendo koopa troopa">
-            <a:extLst>
-              <a:ext uri="{FF2B5EF4-FFF2-40B4-BE49-F238E27FC236}">
-                <a16:creationId xmlns:a16="http://schemas.microsoft.com/office/drawing/2014/main" id="{B849C9E0-9AB3-481D-88A2-9845E445CE6D}"/>
-              </a:ext>
-            </a:extLst>
-          </p:cNvPr>
-          <p:cNvPicPr>
-            <a:picLocks noChangeAspect="1" noChangeArrowheads="1"/>
-          </p:cNvPicPr>
-          <p:nvPr/>
-        </p:nvPicPr>
-        <p:blipFill>
-          <a:blip r:embed="rId8">
-            <a:extLst>
-              <a:ext uri="{28A0092B-C50C-407E-A947-70E740481C1C}">
-                <a14:useLocalDpi xmlns:a14="http://schemas.microsoft.com/office/drawing/2010/main" val="0"/>
-              </a:ext>
-            </a:extLst>
-          </a:blip>
-          <a:srcRect/>
-          <a:stretch>
-            <a:fillRect/>
-          </a:stretch>
-        </p:blipFill>
-        <p:spPr bwMode="auto">
-          <a:xfrm>
-            <a:off x="6541385" y="3825518"/>
-            <a:ext cx="647257" cy="826723"/>
-          </a:xfrm>
-          <a:prstGeom prst="rect">
-            <a:avLst/>
-          </a:prstGeom>
-          <a:noFill/>
-          <a:extLst>
-            <a:ext uri="{909E8E84-426E-40DD-AFC4-6F175D3DCCD1}">
-              <a14:hiddenFill xmlns:a14="http://schemas.microsoft.com/office/drawing/2010/main">
-                <a:solidFill>
-                  <a:srgbClr val="FFFFFF"/>
-                </a:solidFill>
-              </a14:hiddenFill>
-            </a:ext>
-          </a:extLst>
-        </p:spPr>
-      </p:pic>
-    </p:spTree>
-    <p:extLst>
-      <p:ext uri="{BB962C8B-B14F-4D97-AF65-F5344CB8AC3E}">
-        <p14:creationId xmlns:p14="http://schemas.microsoft.com/office/powerpoint/2010/main" val="3337258942"/>
       </p:ext>
     </p:extLst>
   </p:cSld>
